--- a/output/wordlabs-marine-3day.pptx
+++ b/output/wordlabs-marine-3day.pptx
@@ -4240,7 +4240,7 @@
                 <a:ea typeface="Calibri" pitchFamily="34" charset="-122"/>
                 <a:cs typeface="Calibri" pitchFamily="34" charset="-120"/>
               </a:rPr>
-              <a:t>"of the sea or ocean"</a:t>
+              <a:t>"relating to the sea"</a:t>
             </a:r>
             <a:endParaRPr lang="en-US" sz="2200" dirty="0"/>
           </a:p>
@@ -4279,7 +4279,7 @@
                 <a:ea typeface="Calibri" pitchFamily="34" charset="-122"/>
                 <a:cs typeface="Calibri" pitchFamily="34" charset="-120"/>
               </a:rPr>
-              <a:t>Origin: Latin: marinus</a:t>
+              <a:t>Origin: Core English root</a:t>
             </a:r>
             <a:endParaRPr lang="en-US" sz="1300" dirty="0"/>
           </a:p>
@@ -5288,7 +5288,7 @@
                 <a:ea typeface="Calibri" pitchFamily="34" charset="-122"/>
                 <a:cs typeface="Calibri" pitchFamily="34" charset="-120"/>
               </a:rPr>
-              <a:t>Word Labs  •  wordlabs.app  •  Root: 'marine' = of the sea or ocean</a:t>
+              <a:t>Word Labs  •  wordlabs.app  •  Root: 'marine' = relating to the sea</a:t>
             </a:r>
             <a:endParaRPr lang="en-US" sz="800" dirty="0"/>
           </a:p>
@@ -5928,7 +5928,7 @@
                 <a:ea typeface="Calibri" pitchFamily="34" charset="-122"/>
                 <a:cs typeface="Calibri" pitchFamily="34" charset="-120"/>
               </a:rPr>
-              <a:t>Word Labs  •  wordlabs.app  •  Root: 'marine' = of the sea or ocean</a:t>
+              <a:t>Word Labs  •  wordlabs.app  •  Root: 'marine' = relating to the sea</a:t>
             </a:r>
             <a:endParaRPr lang="en-US" sz="800" dirty="0"/>
           </a:p>
@@ -6040,7 +6040,7 @@
                 <a:ea typeface="Calibri" pitchFamily="34" charset="-122"/>
                 <a:cs typeface="Calibri" pitchFamily="34" charset="-120"/>
               </a:rPr>
-              <a:t>The </a:t>
+              <a:t>The old </a:t>
             </a:r>
             <a:pPr algn="l" indent="0" marL="0">
               <a:buNone/>
@@ -6057,7 +6057,7 @@
                 <a:ea typeface="Calibri" pitchFamily="34" charset="-122"/>
                 <a:cs typeface="Calibri" pitchFamily="34" charset="-120"/>
               </a:rPr>
-              <a:t>marine</a:t>
+              <a:t>mariner</a:t>
             </a:r>
             <a:pPr algn="l" indent="0" marL="0">
               <a:buNone/>
@@ -6071,7 +6071,7 @@
                 <a:ea typeface="Calibri" pitchFamily="34" charset="-122"/>
                 <a:cs typeface="Calibri" pitchFamily="34" charset="-120"/>
               </a:rPr>
-              <a:t> biologist was excited to board the </a:t>
+              <a:t> had sailed across many oceans. The </a:t>
             </a:r>
             <a:pPr algn="l" indent="0" marL="0">
               <a:buNone/>
@@ -6088,7 +6088,7 @@
                 <a:ea typeface="Calibri" pitchFamily="34" charset="-122"/>
                 <a:cs typeface="Calibri" pitchFamily="34" charset="-120"/>
               </a:rPr>
-              <a:t>submarine</a:t>
+              <a:t>marines</a:t>
             </a:r>
             <a:pPr algn="l" indent="0" marL="0">
               <a:buNone/>
@@ -6102,7 +6102,7 @@
                 <a:ea typeface="Calibri" pitchFamily="34" charset="-122"/>
                 <a:cs typeface="Calibri" pitchFamily="34" charset="-120"/>
               </a:rPr>
-              <a:t> and explore the deep ocean floor.</a:t>
+              <a:t> landed on the beach at dawn.</a:t>
             </a:r>
             <a:endParaRPr lang="en-US" sz="1800" dirty="0"/>
           </a:p>
@@ -6257,7 +6257,7 @@
                 <a:ea typeface="Trebuchet MS" pitchFamily="34" charset="-122"/>
                 <a:cs typeface="Trebuchet MS" pitchFamily="34" charset="-120"/>
               </a:rPr>
-              <a:t>marine</a:t>
+              <a:t>mariner</a:t>
             </a:r>
             <a:endParaRPr lang="en-US" sz="1400" dirty="0"/>
           </a:p>
@@ -6385,7 +6385,7 @@
                 <a:ea typeface="Trebuchet MS" pitchFamily="34" charset="-122"/>
                 <a:cs typeface="Trebuchet MS" pitchFamily="34" charset="-120"/>
               </a:rPr>
-              <a:t>submarine</a:t>
+              <a:t>marines</a:t>
             </a:r>
             <a:endParaRPr lang="en-US" sz="1400" dirty="0"/>
           </a:p>
@@ -6716,7 +6716,7 @@
                 <a:ea typeface="Calibri" pitchFamily="34" charset="-122"/>
                 <a:cs typeface="Calibri" pitchFamily="34" charset="-120"/>
               </a:rPr>
-              <a:t>Word Labs  •  wordlabs.app  •  Root: 'marine' = of the sea or ocean</a:t>
+              <a:t>Word Labs  •  wordlabs.app  •  Root: 'marine' = relating to the sea</a:t>
             </a:r>
             <a:endParaRPr lang="en-US" sz="800" dirty="0"/>
           </a:p>
@@ -6855,7 +6855,7 @@
                 <a:ea typeface="Trebuchet MS" pitchFamily="34" charset="-122"/>
                 <a:cs typeface="Trebuchet MS" pitchFamily="34" charset="-120"/>
               </a:rPr>
-              <a:t>marine</a:t>
+              <a:t>mariner</a:t>
             </a:r>
             <a:endParaRPr lang="en-US" sz="2800" dirty="0"/>
           </a:p>
@@ -7543,7 +7543,7 @@
                 <a:ea typeface="Calibri" pitchFamily="34" charset="-122"/>
                 <a:cs typeface="Calibri" pitchFamily="34" charset="-120"/>
               </a:rPr>
-              <a:t>Word Labs  •  wordlabs.app  •  Root: 'marine' = of the sea or ocean</a:t>
+              <a:t>Word Labs  •  wordlabs.app  •  Root: 'marine' = relating to the sea</a:t>
             </a:r>
             <a:endParaRPr lang="en-US" sz="800" dirty="0"/>
           </a:p>
@@ -7682,7 +7682,7 @@
                 <a:ea typeface="Trebuchet MS" pitchFamily="34" charset="-122"/>
                 <a:cs typeface="Trebuchet MS" pitchFamily="34" charset="-120"/>
               </a:rPr>
-              <a:t>marine</a:t>
+              <a:t>mariner</a:t>
             </a:r>
             <a:endParaRPr lang="en-US" sz="2800" dirty="0"/>
           </a:p>
@@ -7762,7 +7762,7 @@
         </p:nvSpPr>
         <p:spPr>
           <a:xfrm>
-            <a:off x="4370832" y="2258568"/>
+            <a:off x="2938272" y="2258568"/>
             <a:ext cx="1828800" cy="292608"/>
           </a:xfrm>
           <a:prstGeom prst="rect">
@@ -7796,7 +7796,7 @@
         </p:nvSpPr>
         <p:spPr>
           <a:xfrm>
-            <a:off x="4370832" y="2258568"/>
+            <a:off x="2938272" y="2258568"/>
             <a:ext cx="1828800" cy="292608"/>
           </a:xfrm>
           <a:prstGeom prst="rect">
@@ -7835,7 +7835,7 @@
         </p:nvSpPr>
         <p:spPr>
           <a:xfrm>
-            <a:off x="4370832" y="2569464"/>
+            <a:off x="2938272" y="2569464"/>
             <a:ext cx="1828800" cy="201168"/>
           </a:xfrm>
           <a:prstGeom prst="rect">
@@ -7860,7 +7860,7 @@
                 <a:ea typeface="Calibri" pitchFamily="34" charset="-122"/>
                 <a:cs typeface="Calibri" pitchFamily="34" charset="-120"/>
               </a:rPr>
-              <a:t>of the sea</a:t>
+              <a:t>relating to the sea</a:t>
             </a:r>
             <a:endParaRPr lang="en-US" sz="850" dirty="0"/>
           </a:p>
@@ -7869,6 +7869,118 @@
       <p:sp>
         <p:nvSpPr>
           <p:cNvPr id="19" name="Shape 17"/>
+          <p:cNvSpPr/>
+          <p:nvPr/>
+        </p:nvSpPr>
+        <p:spPr>
+          <a:xfrm>
+            <a:off x="5803392" y="2258568"/>
+            <a:ext cx="1828800" cy="292608"/>
+          </a:xfrm>
+          <a:prstGeom prst="rect">
+            <a:avLst>
+              <a:gd name="adj" fmla="val 25000"/>
+            </a:avLst>
+          </a:prstGeom>
+          <a:solidFill>
+            <a:srgbClr val="FCE7F3"/>
+          </a:solidFill>
+          <a:ln w="19050">
+            <a:solidFill>
+              <a:srgbClr val="DB2777"/>
+            </a:solidFill>
+            <a:prstDash val="solid"/>
+          </a:ln>
+          <a:effectLst>
+            <a:outerShdw sx="100000" sy="100000" kx="0" ky="0" algn="bl" rotWithShape="0" blurRad="101600" dist="38100" dir="8100000">
+              <a:srgbClr val="000000">
+                <a:alpha val="12000"/>
+              </a:srgbClr>
+            </a:outerShdw>
+          </a:effectLst>
+        </p:spPr>
+      </p:sp>
+      <p:sp>
+        <p:nvSpPr>
+          <p:cNvPr id="20" name="Text 18"/>
+          <p:cNvSpPr/>
+          <p:nvPr/>
+        </p:nvSpPr>
+        <p:spPr>
+          <a:xfrm>
+            <a:off x="5803392" y="2258568"/>
+            <a:ext cx="1828800" cy="292608"/>
+          </a:xfrm>
+          <a:prstGeom prst="rect">
+            <a:avLst/>
+          </a:prstGeom>
+          <a:noFill/>
+          <a:ln/>
+        </p:spPr>
+        <p:txBody>
+          <a:bodyPr wrap="square" lIns="0" tIns="0" rIns="0" bIns="0" rtlCol="0" anchor="ctr"/>
+          <a:lstStyle/>
+          <a:p>
+            <a:pPr algn="ctr" indent="0" marL="0">
+              <a:buNone/>
+            </a:pPr>
+            <a:r>
+              <a:rPr lang="en-US" sz="1300" b="1" dirty="0">
+                <a:solidFill>
+                  <a:srgbClr val="9D174D"/>
+                </a:solidFill>
+                <a:latin typeface="Trebuchet MS" pitchFamily="34" charset="0"/>
+                <a:ea typeface="Trebuchet MS" pitchFamily="34" charset="-122"/>
+                <a:cs typeface="Trebuchet MS" pitchFamily="34" charset="-120"/>
+              </a:rPr>
+              <a:t>er</a:t>
+            </a:r>
+            <a:endParaRPr lang="en-US" sz="1300" dirty="0"/>
+          </a:p>
+        </p:txBody>
+      </p:sp>
+      <p:sp>
+        <p:nvSpPr>
+          <p:cNvPr id="21" name="Text 19"/>
+          <p:cNvSpPr/>
+          <p:nvPr/>
+        </p:nvSpPr>
+        <p:spPr>
+          <a:xfrm>
+            <a:off x="5803392" y="2569464"/>
+            <a:ext cx="1828800" cy="201168"/>
+          </a:xfrm>
+          <a:prstGeom prst="rect">
+            <a:avLst/>
+          </a:prstGeom>
+          <a:noFill/>
+          <a:ln/>
+        </p:spPr>
+        <p:txBody>
+          <a:bodyPr wrap="square" lIns="0" tIns="0" rIns="0" bIns="0" rtlCol="0" anchor="t"/>
+          <a:lstStyle/>
+          <a:p>
+            <a:pPr algn="ctr" indent="0" marL="0">
+              <a:buNone/>
+            </a:pPr>
+            <a:r>
+              <a:rPr lang="en-US" sz="850" dirty="0">
+                <a:solidFill>
+                  <a:srgbClr val="475569"/>
+                </a:solidFill>
+                <a:latin typeface="Calibri" pitchFamily="34" charset="0"/>
+                <a:ea typeface="Calibri" pitchFamily="34" charset="-122"/>
+                <a:cs typeface="Calibri" pitchFamily="34" charset="-120"/>
+              </a:rPr>
+              <a:t>person who; more</a:t>
+            </a:r>
+            <a:endParaRPr lang="en-US" sz="850" dirty="0"/>
+          </a:p>
+        </p:txBody>
+      </p:sp>
+      <p:sp>
+        <p:nvSpPr>
+          <p:cNvPr id="22" name="Shape 20"/>
           <p:cNvSpPr/>
           <p:nvPr/>
         </p:nvSpPr>
@@ -7895,7 +8007,7 @@
       </p:sp>
       <p:sp>
         <p:nvSpPr>
-          <p:cNvPr id="20" name="Text 18"/>
+          <p:cNvPr id="23" name="Text 21"/>
           <p:cNvSpPr/>
           <p:nvPr/>
         </p:nvSpPr>
@@ -7934,7 +8046,7 @@
       </p:sp>
       <p:sp>
         <p:nvSpPr>
-          <p:cNvPr id="21" name="Shape 19"/>
+          <p:cNvPr id="24" name="Shape 22"/>
           <p:cNvSpPr/>
           <p:nvPr/>
         </p:nvSpPr>
@@ -7961,7 +8073,7 @@
       </p:sp>
       <p:sp>
         <p:nvSpPr>
-          <p:cNvPr id="22" name="Text 20"/>
+          <p:cNvPr id="25" name="Text 23"/>
           <p:cNvSpPr/>
           <p:nvPr/>
         </p:nvSpPr>
@@ -8000,7 +8112,7 @@
       </p:sp>
       <p:sp>
         <p:nvSpPr>
-          <p:cNvPr id="23" name="Shape 21"/>
+          <p:cNvPr id="26" name="Shape 24"/>
           <p:cNvSpPr/>
           <p:nvPr/>
         </p:nvSpPr>
@@ -8027,7 +8139,7 @@
       </p:sp>
       <p:sp>
         <p:nvSpPr>
-          <p:cNvPr id="24" name="Text 22"/>
+          <p:cNvPr id="27" name="Text 25"/>
           <p:cNvSpPr/>
           <p:nvPr/>
         </p:nvSpPr>
@@ -8066,7 +8178,7 @@
       </p:sp>
       <p:sp>
         <p:nvSpPr>
-          <p:cNvPr id="25" name="Shape 23"/>
+          <p:cNvPr id="28" name="Shape 26"/>
           <p:cNvSpPr/>
           <p:nvPr/>
         </p:nvSpPr>
@@ -8093,7 +8205,7 @@
       </p:sp>
       <p:sp>
         <p:nvSpPr>
-          <p:cNvPr id="26" name="Text 24"/>
+          <p:cNvPr id="29" name="Text 27"/>
           <p:cNvSpPr/>
           <p:nvPr/>
         </p:nvSpPr>
@@ -8416,7 +8528,7 @@
                 <a:ea typeface="Calibri" pitchFamily="34" charset="-122"/>
                 <a:cs typeface="Calibri" pitchFamily="34" charset="-120"/>
               </a:rPr>
-              <a:t>Word Labs  •  wordlabs.app  •  Root: 'marine' = of the sea or ocean</a:t>
+              <a:t>Word Labs  •  wordlabs.app  •  Root: 'marine' = relating to the sea</a:t>
             </a:r>
             <a:endParaRPr lang="en-US" sz="800" dirty="0"/>
           </a:p>
@@ -8555,7 +8667,7 @@
                 <a:ea typeface="Trebuchet MS" pitchFamily="34" charset="-122"/>
                 <a:cs typeface="Trebuchet MS" pitchFamily="34" charset="-120"/>
               </a:rPr>
-              <a:t>marine</a:t>
+              <a:t>mariner</a:t>
             </a:r>
             <a:endParaRPr lang="en-US" sz="2800" dirty="0"/>
           </a:p>
@@ -8635,7 +8747,7 @@
         </p:nvSpPr>
         <p:spPr>
           <a:xfrm>
-            <a:off x="4370832" y="2258568"/>
+            <a:off x="2938272" y="2258568"/>
             <a:ext cx="1828800" cy="292608"/>
           </a:xfrm>
           <a:prstGeom prst="rect">
@@ -8669,7 +8781,7 @@
         </p:nvSpPr>
         <p:spPr>
           <a:xfrm>
-            <a:off x="4370832" y="2258568"/>
+            <a:off x="2938272" y="2258568"/>
             <a:ext cx="1828800" cy="292608"/>
           </a:xfrm>
           <a:prstGeom prst="rect">
@@ -8708,7 +8820,7 @@
         </p:nvSpPr>
         <p:spPr>
           <a:xfrm>
-            <a:off x="4370832" y="2569464"/>
+            <a:off x="2938272" y="2569464"/>
             <a:ext cx="1828800" cy="201168"/>
           </a:xfrm>
           <a:prstGeom prst="rect">
@@ -8733,7 +8845,7 @@
                 <a:ea typeface="Calibri" pitchFamily="34" charset="-122"/>
                 <a:cs typeface="Calibri" pitchFamily="34" charset="-120"/>
               </a:rPr>
-              <a:t>of the sea</a:t>
+              <a:t>relating to the sea</a:t>
             </a:r>
             <a:endParaRPr lang="en-US" sz="850" dirty="0"/>
           </a:p>
@@ -8742,6 +8854,118 @@
       <p:sp>
         <p:nvSpPr>
           <p:cNvPr id="19" name="Shape 17"/>
+          <p:cNvSpPr/>
+          <p:nvPr/>
+        </p:nvSpPr>
+        <p:spPr>
+          <a:xfrm>
+            <a:off x="5803392" y="2258568"/>
+            <a:ext cx="1828800" cy="292608"/>
+          </a:xfrm>
+          <a:prstGeom prst="rect">
+            <a:avLst>
+              <a:gd name="adj" fmla="val 25000"/>
+            </a:avLst>
+          </a:prstGeom>
+          <a:solidFill>
+            <a:srgbClr val="FCE7F3"/>
+          </a:solidFill>
+          <a:ln w="19050">
+            <a:solidFill>
+              <a:srgbClr val="DB2777"/>
+            </a:solidFill>
+            <a:prstDash val="solid"/>
+          </a:ln>
+          <a:effectLst>
+            <a:outerShdw sx="100000" sy="100000" kx="0" ky="0" algn="bl" rotWithShape="0" blurRad="101600" dist="38100" dir="8100000">
+              <a:srgbClr val="000000">
+                <a:alpha val="12000"/>
+              </a:srgbClr>
+            </a:outerShdw>
+          </a:effectLst>
+        </p:spPr>
+      </p:sp>
+      <p:sp>
+        <p:nvSpPr>
+          <p:cNvPr id="20" name="Text 18"/>
+          <p:cNvSpPr/>
+          <p:nvPr/>
+        </p:nvSpPr>
+        <p:spPr>
+          <a:xfrm>
+            <a:off x="5803392" y="2258568"/>
+            <a:ext cx="1828800" cy="292608"/>
+          </a:xfrm>
+          <a:prstGeom prst="rect">
+            <a:avLst/>
+          </a:prstGeom>
+          <a:noFill/>
+          <a:ln/>
+        </p:spPr>
+        <p:txBody>
+          <a:bodyPr wrap="square" lIns="0" tIns="0" rIns="0" bIns="0" rtlCol="0" anchor="ctr"/>
+          <a:lstStyle/>
+          <a:p>
+            <a:pPr algn="ctr" indent="0" marL="0">
+              <a:buNone/>
+            </a:pPr>
+            <a:r>
+              <a:rPr lang="en-US" sz="1300" b="1" dirty="0">
+                <a:solidFill>
+                  <a:srgbClr val="9D174D"/>
+                </a:solidFill>
+                <a:latin typeface="Trebuchet MS" pitchFamily="34" charset="0"/>
+                <a:ea typeface="Trebuchet MS" pitchFamily="34" charset="-122"/>
+                <a:cs typeface="Trebuchet MS" pitchFamily="34" charset="-120"/>
+              </a:rPr>
+              <a:t>er</a:t>
+            </a:r>
+            <a:endParaRPr lang="en-US" sz="1300" dirty="0"/>
+          </a:p>
+        </p:txBody>
+      </p:sp>
+      <p:sp>
+        <p:nvSpPr>
+          <p:cNvPr id="21" name="Text 19"/>
+          <p:cNvSpPr/>
+          <p:nvPr/>
+        </p:nvSpPr>
+        <p:spPr>
+          <a:xfrm>
+            <a:off x="5803392" y="2569464"/>
+            <a:ext cx="1828800" cy="201168"/>
+          </a:xfrm>
+          <a:prstGeom prst="rect">
+            <a:avLst/>
+          </a:prstGeom>
+          <a:noFill/>
+          <a:ln/>
+        </p:spPr>
+        <p:txBody>
+          <a:bodyPr wrap="square" lIns="0" tIns="0" rIns="0" bIns="0" rtlCol="0" anchor="t"/>
+          <a:lstStyle/>
+          <a:p>
+            <a:pPr algn="ctr" indent="0" marL="0">
+              <a:buNone/>
+            </a:pPr>
+            <a:r>
+              <a:rPr lang="en-US" sz="850" dirty="0">
+                <a:solidFill>
+                  <a:srgbClr val="475569"/>
+                </a:solidFill>
+                <a:latin typeface="Calibri" pitchFamily="34" charset="0"/>
+                <a:ea typeface="Calibri" pitchFamily="34" charset="-122"/>
+                <a:cs typeface="Calibri" pitchFamily="34" charset="-120"/>
+              </a:rPr>
+              <a:t>person who; more</a:t>
+            </a:r>
+            <a:endParaRPr lang="en-US" sz="850" dirty="0"/>
+          </a:p>
+        </p:txBody>
+      </p:sp>
+      <p:sp>
+        <p:nvSpPr>
+          <p:cNvPr id="22" name="Shape 20"/>
           <p:cNvSpPr/>
           <p:nvPr/>
         </p:nvSpPr>
@@ -8768,7 +8992,7 @@
       </p:sp>
       <p:sp>
         <p:nvSpPr>
-          <p:cNvPr id="20" name="Text 18"/>
+          <p:cNvPr id="23" name="Text 21"/>
           <p:cNvSpPr/>
           <p:nvPr/>
         </p:nvSpPr>
@@ -8807,7 +9031,7 @@
       </p:sp>
       <p:sp>
         <p:nvSpPr>
-          <p:cNvPr id="21" name="Shape 19"/>
+          <p:cNvPr id="24" name="Shape 22"/>
           <p:cNvSpPr/>
           <p:nvPr/>
         </p:nvSpPr>
@@ -8834,13 +9058,13 @@
       </p:sp>
       <p:sp>
         <p:nvSpPr>
-          <p:cNvPr id="22" name="Shape 20"/>
-          <p:cNvSpPr/>
-          <p:nvPr/>
-        </p:nvSpPr>
-        <p:spPr>
-          <a:xfrm>
-            <a:off x="2999232" y="3364992"/>
+          <p:cNvPr id="25" name="Shape 23"/>
+          <p:cNvSpPr/>
+          <p:nvPr/>
+        </p:nvSpPr>
+        <p:spPr>
+          <a:xfrm>
+            <a:off x="2313432" y="3364992"/>
             <a:ext cx="1645920" cy="475488"/>
           </a:xfrm>
           <a:prstGeom prst="rect">
@@ -8861,13 +9085,13 @@
       </p:sp>
       <p:sp>
         <p:nvSpPr>
-          <p:cNvPr id="23" name="Text 21"/>
-          <p:cNvSpPr/>
-          <p:nvPr/>
-        </p:nvSpPr>
-        <p:spPr>
-          <a:xfrm>
-            <a:off x="2999232" y="3364992"/>
+          <p:cNvPr id="26" name="Text 24"/>
+          <p:cNvSpPr/>
+          <p:nvPr/>
+        </p:nvSpPr>
+        <p:spPr>
+          <a:xfrm>
+            <a:off x="2313432" y="3364992"/>
             <a:ext cx="1645920" cy="475488"/>
           </a:xfrm>
           <a:prstGeom prst="rect">
@@ -8892,7 +9116,7 @@
                 <a:ea typeface="Trebuchet MS" pitchFamily="34" charset="-122"/>
                 <a:cs typeface="Trebuchet MS" pitchFamily="34" charset="-120"/>
               </a:rPr>
-              <a:t>ma</a:t>
+              <a:t>mar</a:t>
             </a:r>
             <a:endParaRPr lang="en-US" sz="1400" dirty="0"/>
           </a:p>
@@ -8900,14 +9124,14 @@
       </p:sp>
       <p:sp>
         <p:nvSpPr>
-          <p:cNvPr id="24" name="Text 22"/>
-          <p:cNvSpPr/>
-          <p:nvPr/>
-        </p:nvSpPr>
-        <p:spPr>
-          <a:xfrm>
-            <a:off x="4645152" y="3364992"/>
-            <a:ext cx="1097280" cy="475488"/>
+          <p:cNvPr id="27" name="Text 25"/>
+          <p:cNvSpPr/>
+          <p:nvPr/>
+        </p:nvSpPr>
+        <p:spPr>
+          <a:xfrm>
+            <a:off x="3959352" y="3364992"/>
+            <a:ext cx="411480" cy="475488"/>
           </a:xfrm>
           <a:prstGeom prst="rect">
             <a:avLst/>
@@ -8939,13 +9163,13 @@
       </p:sp>
       <p:sp>
         <p:nvSpPr>
-          <p:cNvPr id="25" name="Shape 23"/>
-          <p:cNvSpPr/>
-          <p:nvPr/>
-        </p:nvSpPr>
-        <p:spPr>
-          <a:xfrm>
-            <a:off x="5742432" y="3364992"/>
+          <p:cNvPr id="28" name="Shape 26"/>
+          <p:cNvSpPr/>
+          <p:nvPr/>
+        </p:nvSpPr>
+        <p:spPr>
+          <a:xfrm>
+            <a:off x="4370832" y="3364992"/>
             <a:ext cx="1645920" cy="475488"/>
           </a:xfrm>
           <a:prstGeom prst="rect">
@@ -8966,13 +9190,13 @@
       </p:sp>
       <p:sp>
         <p:nvSpPr>
-          <p:cNvPr id="26" name="Text 24"/>
-          <p:cNvSpPr/>
-          <p:nvPr/>
-        </p:nvSpPr>
-        <p:spPr>
-          <a:xfrm>
-            <a:off x="5742432" y="3364992"/>
+          <p:cNvPr id="29" name="Text 27"/>
+          <p:cNvSpPr/>
+          <p:nvPr/>
+        </p:nvSpPr>
+        <p:spPr>
+          <a:xfrm>
+            <a:off x="4370832" y="3364992"/>
             <a:ext cx="1645920" cy="475488"/>
           </a:xfrm>
           <a:prstGeom prst="rect">
@@ -8997,7 +9221,7 @@
                 <a:ea typeface="Trebuchet MS" pitchFamily="34" charset="-122"/>
                 <a:cs typeface="Trebuchet MS" pitchFamily="34" charset="-120"/>
               </a:rPr>
-              <a:t>rine</a:t>
+              <a:t>i</a:t>
             </a:r>
             <a:endParaRPr lang="en-US" sz="1400" dirty="0"/>
           </a:p>
@@ -9005,7 +9229,112 @@
       </p:sp>
       <p:sp>
         <p:nvSpPr>
-          <p:cNvPr id="27" name="Shape 25"/>
+          <p:cNvPr id="30" name="Text 28"/>
+          <p:cNvSpPr/>
+          <p:nvPr/>
+        </p:nvSpPr>
+        <p:spPr>
+          <a:xfrm>
+            <a:off x="6016752" y="3364992"/>
+            <a:ext cx="411480" cy="475488"/>
+          </a:xfrm>
+          <a:prstGeom prst="rect">
+            <a:avLst/>
+          </a:prstGeom>
+          <a:noFill/>
+          <a:ln/>
+        </p:spPr>
+        <p:txBody>
+          <a:bodyPr wrap="square" lIns="0" tIns="0" rIns="0" bIns="0" rtlCol="0" anchor="ctr"/>
+          <a:lstStyle/>
+          <a:p>
+            <a:pPr algn="ctr" indent="0" marL="0">
+              <a:buNone/>
+            </a:pPr>
+            <a:r>
+              <a:rPr lang="en-US" sz="1600" b="1" dirty="0">
+                <a:solidFill>
+                  <a:srgbClr val="0D9488"/>
+                </a:solidFill>
+                <a:latin typeface="Trebuchet MS" pitchFamily="34" charset="0"/>
+                <a:ea typeface="Trebuchet MS" pitchFamily="34" charset="-122"/>
+                <a:cs typeface="Trebuchet MS" pitchFamily="34" charset="-120"/>
+              </a:rPr>
+              <a:t>·</a:t>
+            </a:r>
+            <a:endParaRPr lang="en-US" sz="1600" dirty="0"/>
+          </a:p>
+        </p:txBody>
+      </p:sp>
+      <p:sp>
+        <p:nvSpPr>
+          <p:cNvPr id="31" name="Shape 29"/>
+          <p:cNvSpPr/>
+          <p:nvPr/>
+        </p:nvSpPr>
+        <p:spPr>
+          <a:xfrm>
+            <a:off x="6428232" y="3364992"/>
+            <a:ext cx="1645920" cy="475488"/>
+          </a:xfrm>
+          <a:prstGeom prst="rect">
+            <a:avLst>
+              <a:gd name="adj" fmla="val 9615"/>
+            </a:avLst>
+          </a:prstGeom>
+          <a:solidFill>
+            <a:srgbClr val="FFFFFF"/>
+          </a:solidFill>
+          <a:ln w="12700">
+            <a:solidFill>
+              <a:srgbClr val="0D9488"/>
+            </a:solidFill>
+            <a:prstDash val="solid"/>
+          </a:ln>
+        </p:spPr>
+      </p:sp>
+      <p:sp>
+        <p:nvSpPr>
+          <p:cNvPr id="32" name="Text 30"/>
+          <p:cNvSpPr/>
+          <p:nvPr/>
+        </p:nvSpPr>
+        <p:spPr>
+          <a:xfrm>
+            <a:off x="6428232" y="3364992"/>
+            <a:ext cx="1645920" cy="475488"/>
+          </a:xfrm>
+          <a:prstGeom prst="rect">
+            <a:avLst/>
+          </a:prstGeom>
+          <a:noFill/>
+          <a:ln/>
+        </p:spPr>
+        <p:txBody>
+          <a:bodyPr wrap="square" lIns="0" tIns="0" rIns="0" bIns="0" rtlCol="0" anchor="ctr"/>
+          <a:lstStyle/>
+          <a:p>
+            <a:pPr algn="ctr" indent="0" marL="0">
+              <a:buNone/>
+            </a:pPr>
+            <a:r>
+              <a:rPr lang="en-US" sz="1400" b="1" dirty="0">
+                <a:solidFill>
+                  <a:srgbClr val="0D9488"/>
+                </a:solidFill>
+                <a:latin typeface="Trebuchet MS" pitchFamily="34" charset="0"/>
+                <a:ea typeface="Trebuchet MS" pitchFamily="34" charset="-122"/>
+                <a:cs typeface="Trebuchet MS" pitchFamily="34" charset="-120"/>
+              </a:rPr>
+              <a:t>ner</a:t>
+            </a:r>
+            <a:endParaRPr lang="en-US" sz="1400" dirty="0"/>
+          </a:p>
+        </p:txBody>
+      </p:sp>
+      <p:sp>
+        <p:nvSpPr>
+          <p:cNvPr id="33" name="Shape 31"/>
           <p:cNvSpPr/>
           <p:nvPr/>
         </p:nvSpPr>
@@ -9032,7 +9361,7 @@
       </p:sp>
       <p:sp>
         <p:nvSpPr>
-          <p:cNvPr id="28" name="Text 26"/>
+          <p:cNvPr id="34" name="Text 32"/>
           <p:cNvSpPr/>
           <p:nvPr/>
         </p:nvSpPr>
@@ -9071,7 +9400,7 @@
       </p:sp>
       <p:sp>
         <p:nvSpPr>
-          <p:cNvPr id="29" name="Shape 27"/>
+          <p:cNvPr id="35" name="Shape 33"/>
           <p:cNvSpPr/>
           <p:nvPr/>
         </p:nvSpPr>
@@ -9098,7 +9427,7 @@
       </p:sp>
       <p:sp>
         <p:nvSpPr>
-          <p:cNvPr id="30" name="Text 28"/>
+          <p:cNvPr id="36" name="Text 34"/>
           <p:cNvSpPr/>
           <p:nvPr/>
         </p:nvSpPr>
@@ -9421,7 +9750,7 @@
                 <a:ea typeface="Calibri" pitchFamily="34" charset="-122"/>
                 <a:cs typeface="Calibri" pitchFamily="34" charset="-120"/>
               </a:rPr>
-              <a:t>Word Labs  •  wordlabs.app  •  Root: 'marine' = of the sea or ocean</a:t>
+              <a:t>Word Labs  •  wordlabs.app  •  Root: 'marine' = relating to the sea</a:t>
             </a:r>
             <a:endParaRPr lang="en-US" sz="800" dirty="0"/>
           </a:p>
@@ -9560,7 +9889,7 @@
                 <a:ea typeface="Trebuchet MS" pitchFamily="34" charset="-122"/>
                 <a:cs typeface="Trebuchet MS" pitchFamily="34" charset="-120"/>
               </a:rPr>
-              <a:t>marine</a:t>
+              <a:t>mariner</a:t>
             </a:r>
             <a:endParaRPr lang="en-US" sz="2800" dirty="0"/>
           </a:p>
@@ -9640,7 +9969,7 @@
         </p:nvSpPr>
         <p:spPr>
           <a:xfrm>
-            <a:off x="4370832" y="2258568"/>
+            <a:off x="2938272" y="2258568"/>
             <a:ext cx="1828800" cy="292608"/>
           </a:xfrm>
           <a:prstGeom prst="rect">
@@ -9674,7 +10003,7 @@
         </p:nvSpPr>
         <p:spPr>
           <a:xfrm>
-            <a:off x="4370832" y="2258568"/>
+            <a:off x="2938272" y="2258568"/>
             <a:ext cx="1828800" cy="292608"/>
           </a:xfrm>
           <a:prstGeom prst="rect">
@@ -9713,7 +10042,7 @@
         </p:nvSpPr>
         <p:spPr>
           <a:xfrm>
-            <a:off x="4370832" y="2569464"/>
+            <a:off x="2938272" y="2569464"/>
             <a:ext cx="1828800" cy="201168"/>
           </a:xfrm>
           <a:prstGeom prst="rect">
@@ -9738,7 +10067,7 @@
                 <a:ea typeface="Calibri" pitchFamily="34" charset="-122"/>
                 <a:cs typeface="Calibri" pitchFamily="34" charset="-120"/>
               </a:rPr>
-              <a:t>of the sea</a:t>
+              <a:t>relating to the sea</a:t>
             </a:r>
             <a:endParaRPr lang="en-US" sz="850" dirty="0"/>
           </a:p>
@@ -9747,6 +10076,118 @@
       <p:sp>
         <p:nvSpPr>
           <p:cNvPr id="19" name="Shape 17"/>
+          <p:cNvSpPr/>
+          <p:nvPr/>
+        </p:nvSpPr>
+        <p:spPr>
+          <a:xfrm>
+            <a:off x="5803392" y="2258568"/>
+            <a:ext cx="1828800" cy="292608"/>
+          </a:xfrm>
+          <a:prstGeom prst="rect">
+            <a:avLst>
+              <a:gd name="adj" fmla="val 25000"/>
+            </a:avLst>
+          </a:prstGeom>
+          <a:solidFill>
+            <a:srgbClr val="FCE7F3"/>
+          </a:solidFill>
+          <a:ln w="19050">
+            <a:solidFill>
+              <a:srgbClr val="DB2777"/>
+            </a:solidFill>
+            <a:prstDash val="solid"/>
+          </a:ln>
+          <a:effectLst>
+            <a:outerShdw sx="100000" sy="100000" kx="0" ky="0" algn="bl" rotWithShape="0" blurRad="101600" dist="38100" dir="8100000">
+              <a:srgbClr val="000000">
+                <a:alpha val="12000"/>
+              </a:srgbClr>
+            </a:outerShdw>
+          </a:effectLst>
+        </p:spPr>
+      </p:sp>
+      <p:sp>
+        <p:nvSpPr>
+          <p:cNvPr id="20" name="Text 18"/>
+          <p:cNvSpPr/>
+          <p:nvPr/>
+        </p:nvSpPr>
+        <p:spPr>
+          <a:xfrm>
+            <a:off x="5803392" y="2258568"/>
+            <a:ext cx="1828800" cy="292608"/>
+          </a:xfrm>
+          <a:prstGeom prst="rect">
+            <a:avLst/>
+          </a:prstGeom>
+          <a:noFill/>
+          <a:ln/>
+        </p:spPr>
+        <p:txBody>
+          <a:bodyPr wrap="square" lIns="0" tIns="0" rIns="0" bIns="0" rtlCol="0" anchor="ctr"/>
+          <a:lstStyle/>
+          <a:p>
+            <a:pPr algn="ctr" indent="0" marL="0">
+              <a:buNone/>
+            </a:pPr>
+            <a:r>
+              <a:rPr lang="en-US" sz="1300" b="1" dirty="0">
+                <a:solidFill>
+                  <a:srgbClr val="9D174D"/>
+                </a:solidFill>
+                <a:latin typeface="Trebuchet MS" pitchFamily="34" charset="0"/>
+                <a:ea typeface="Trebuchet MS" pitchFamily="34" charset="-122"/>
+                <a:cs typeface="Trebuchet MS" pitchFamily="34" charset="-120"/>
+              </a:rPr>
+              <a:t>er</a:t>
+            </a:r>
+            <a:endParaRPr lang="en-US" sz="1300" dirty="0"/>
+          </a:p>
+        </p:txBody>
+      </p:sp>
+      <p:sp>
+        <p:nvSpPr>
+          <p:cNvPr id="21" name="Text 19"/>
+          <p:cNvSpPr/>
+          <p:nvPr/>
+        </p:nvSpPr>
+        <p:spPr>
+          <a:xfrm>
+            <a:off x="5803392" y="2569464"/>
+            <a:ext cx="1828800" cy="201168"/>
+          </a:xfrm>
+          <a:prstGeom prst="rect">
+            <a:avLst/>
+          </a:prstGeom>
+          <a:noFill/>
+          <a:ln/>
+        </p:spPr>
+        <p:txBody>
+          <a:bodyPr wrap="square" lIns="0" tIns="0" rIns="0" bIns="0" rtlCol="0" anchor="t"/>
+          <a:lstStyle/>
+          <a:p>
+            <a:pPr algn="ctr" indent="0" marL="0">
+              <a:buNone/>
+            </a:pPr>
+            <a:r>
+              <a:rPr lang="en-US" sz="850" dirty="0">
+                <a:solidFill>
+                  <a:srgbClr val="475569"/>
+                </a:solidFill>
+                <a:latin typeface="Calibri" pitchFamily="34" charset="0"/>
+                <a:ea typeface="Calibri" pitchFamily="34" charset="-122"/>
+                <a:cs typeface="Calibri" pitchFamily="34" charset="-120"/>
+              </a:rPr>
+              <a:t>person who; more</a:t>
+            </a:r>
+            <a:endParaRPr lang="en-US" sz="850" dirty="0"/>
+          </a:p>
+        </p:txBody>
+      </p:sp>
+      <p:sp>
+        <p:nvSpPr>
+          <p:cNvPr id="22" name="Shape 20"/>
           <p:cNvSpPr/>
           <p:nvPr/>
         </p:nvSpPr>
@@ -9773,7 +10214,7 @@
       </p:sp>
       <p:sp>
         <p:nvSpPr>
-          <p:cNvPr id="20" name="Text 18"/>
+          <p:cNvPr id="23" name="Text 21"/>
           <p:cNvSpPr/>
           <p:nvPr/>
         </p:nvSpPr>
@@ -9812,7 +10253,7 @@
       </p:sp>
       <p:sp>
         <p:nvSpPr>
-          <p:cNvPr id="21" name="Shape 19"/>
+          <p:cNvPr id="24" name="Shape 22"/>
           <p:cNvSpPr/>
           <p:nvPr/>
         </p:nvSpPr>
@@ -9839,13 +10280,13 @@
       </p:sp>
       <p:sp>
         <p:nvSpPr>
-          <p:cNvPr id="22" name="Shape 20"/>
-          <p:cNvSpPr/>
-          <p:nvPr/>
-        </p:nvSpPr>
-        <p:spPr>
-          <a:xfrm>
-            <a:off x="2999232" y="3364992"/>
+          <p:cNvPr id="25" name="Shape 23"/>
+          <p:cNvSpPr/>
+          <p:nvPr/>
+        </p:nvSpPr>
+        <p:spPr>
+          <a:xfrm>
+            <a:off x="2313432" y="3364992"/>
             <a:ext cx="1645920" cy="475488"/>
           </a:xfrm>
           <a:prstGeom prst="rect">
@@ -9866,13 +10307,13 @@
       </p:sp>
       <p:sp>
         <p:nvSpPr>
-          <p:cNvPr id="23" name="Text 21"/>
-          <p:cNvSpPr/>
-          <p:nvPr/>
-        </p:nvSpPr>
-        <p:spPr>
-          <a:xfrm>
-            <a:off x="2999232" y="3364992"/>
+          <p:cNvPr id="26" name="Text 24"/>
+          <p:cNvSpPr/>
+          <p:nvPr/>
+        </p:nvSpPr>
+        <p:spPr>
+          <a:xfrm>
+            <a:off x="2313432" y="3364992"/>
             <a:ext cx="1645920" cy="475488"/>
           </a:xfrm>
           <a:prstGeom prst="rect">
@@ -9897,7 +10338,7 @@
                 <a:ea typeface="Trebuchet MS" pitchFamily="34" charset="-122"/>
                 <a:cs typeface="Trebuchet MS" pitchFamily="34" charset="-120"/>
               </a:rPr>
-              <a:t>ma</a:t>
+              <a:t>mar</a:t>
             </a:r>
             <a:endParaRPr lang="en-US" sz="1400" dirty="0"/>
           </a:p>
@@ -9905,14 +10346,14 @@
       </p:sp>
       <p:sp>
         <p:nvSpPr>
-          <p:cNvPr id="24" name="Text 22"/>
-          <p:cNvSpPr/>
-          <p:nvPr/>
-        </p:nvSpPr>
-        <p:spPr>
-          <a:xfrm>
-            <a:off x="4645152" y="3364992"/>
-            <a:ext cx="1097280" cy="475488"/>
+          <p:cNvPr id="27" name="Text 25"/>
+          <p:cNvSpPr/>
+          <p:nvPr/>
+        </p:nvSpPr>
+        <p:spPr>
+          <a:xfrm>
+            <a:off x="3959352" y="3364992"/>
+            <a:ext cx="411480" cy="475488"/>
           </a:xfrm>
           <a:prstGeom prst="rect">
             <a:avLst/>
@@ -9944,13 +10385,13 @@
       </p:sp>
       <p:sp>
         <p:nvSpPr>
-          <p:cNvPr id="25" name="Shape 23"/>
-          <p:cNvSpPr/>
-          <p:nvPr/>
-        </p:nvSpPr>
-        <p:spPr>
-          <a:xfrm>
-            <a:off x="5742432" y="3364992"/>
+          <p:cNvPr id="28" name="Shape 26"/>
+          <p:cNvSpPr/>
+          <p:nvPr/>
+        </p:nvSpPr>
+        <p:spPr>
+          <a:xfrm>
+            <a:off x="4370832" y="3364992"/>
             <a:ext cx="1645920" cy="475488"/>
           </a:xfrm>
           <a:prstGeom prst="rect">
@@ -9971,13 +10412,13 @@
       </p:sp>
       <p:sp>
         <p:nvSpPr>
-          <p:cNvPr id="26" name="Text 24"/>
-          <p:cNvSpPr/>
-          <p:nvPr/>
-        </p:nvSpPr>
-        <p:spPr>
-          <a:xfrm>
-            <a:off x="5742432" y="3364992"/>
+          <p:cNvPr id="29" name="Text 27"/>
+          <p:cNvSpPr/>
+          <p:nvPr/>
+        </p:nvSpPr>
+        <p:spPr>
+          <a:xfrm>
+            <a:off x="4370832" y="3364992"/>
             <a:ext cx="1645920" cy="475488"/>
           </a:xfrm>
           <a:prstGeom prst="rect">
@@ -10002,7 +10443,7 @@
                 <a:ea typeface="Trebuchet MS" pitchFamily="34" charset="-122"/>
                 <a:cs typeface="Trebuchet MS" pitchFamily="34" charset="-120"/>
               </a:rPr>
-              <a:t>rine</a:t>
+              <a:t>i</a:t>
             </a:r>
             <a:endParaRPr lang="en-US" sz="1400" dirty="0"/>
           </a:p>
@@ -10010,7 +10451,112 @@
       </p:sp>
       <p:sp>
         <p:nvSpPr>
-          <p:cNvPr id="27" name="Shape 25"/>
+          <p:cNvPr id="30" name="Text 28"/>
+          <p:cNvSpPr/>
+          <p:nvPr/>
+        </p:nvSpPr>
+        <p:spPr>
+          <a:xfrm>
+            <a:off x="6016752" y="3364992"/>
+            <a:ext cx="411480" cy="475488"/>
+          </a:xfrm>
+          <a:prstGeom prst="rect">
+            <a:avLst/>
+          </a:prstGeom>
+          <a:noFill/>
+          <a:ln/>
+        </p:spPr>
+        <p:txBody>
+          <a:bodyPr wrap="square" lIns="0" tIns="0" rIns="0" bIns="0" rtlCol="0" anchor="ctr"/>
+          <a:lstStyle/>
+          <a:p>
+            <a:pPr algn="ctr" indent="0" marL="0">
+              <a:buNone/>
+            </a:pPr>
+            <a:r>
+              <a:rPr lang="en-US" sz="1600" b="1" dirty="0">
+                <a:solidFill>
+                  <a:srgbClr val="0D9488"/>
+                </a:solidFill>
+                <a:latin typeface="Trebuchet MS" pitchFamily="34" charset="0"/>
+                <a:ea typeface="Trebuchet MS" pitchFamily="34" charset="-122"/>
+                <a:cs typeface="Trebuchet MS" pitchFamily="34" charset="-120"/>
+              </a:rPr>
+              <a:t>·</a:t>
+            </a:r>
+            <a:endParaRPr lang="en-US" sz="1600" dirty="0"/>
+          </a:p>
+        </p:txBody>
+      </p:sp>
+      <p:sp>
+        <p:nvSpPr>
+          <p:cNvPr id="31" name="Shape 29"/>
+          <p:cNvSpPr/>
+          <p:nvPr/>
+        </p:nvSpPr>
+        <p:spPr>
+          <a:xfrm>
+            <a:off x="6428232" y="3364992"/>
+            <a:ext cx="1645920" cy="475488"/>
+          </a:xfrm>
+          <a:prstGeom prst="rect">
+            <a:avLst>
+              <a:gd name="adj" fmla="val 9615"/>
+            </a:avLst>
+          </a:prstGeom>
+          <a:solidFill>
+            <a:srgbClr val="FFFFFF"/>
+          </a:solidFill>
+          <a:ln w="12700">
+            <a:solidFill>
+              <a:srgbClr val="0D9488"/>
+            </a:solidFill>
+            <a:prstDash val="solid"/>
+          </a:ln>
+        </p:spPr>
+      </p:sp>
+      <p:sp>
+        <p:nvSpPr>
+          <p:cNvPr id="32" name="Text 30"/>
+          <p:cNvSpPr/>
+          <p:nvPr/>
+        </p:nvSpPr>
+        <p:spPr>
+          <a:xfrm>
+            <a:off x="6428232" y="3364992"/>
+            <a:ext cx="1645920" cy="475488"/>
+          </a:xfrm>
+          <a:prstGeom prst="rect">
+            <a:avLst/>
+          </a:prstGeom>
+          <a:noFill/>
+          <a:ln/>
+        </p:spPr>
+        <p:txBody>
+          <a:bodyPr wrap="square" lIns="0" tIns="0" rIns="0" bIns="0" rtlCol="0" anchor="ctr"/>
+          <a:lstStyle/>
+          <a:p>
+            <a:pPr algn="ctr" indent="0" marL="0">
+              <a:buNone/>
+            </a:pPr>
+            <a:r>
+              <a:rPr lang="en-US" sz="1400" b="1" dirty="0">
+                <a:solidFill>
+                  <a:srgbClr val="0D9488"/>
+                </a:solidFill>
+                <a:latin typeface="Trebuchet MS" pitchFamily="34" charset="0"/>
+                <a:ea typeface="Trebuchet MS" pitchFamily="34" charset="-122"/>
+                <a:cs typeface="Trebuchet MS" pitchFamily="34" charset="-120"/>
+              </a:rPr>
+              <a:t>ner</a:t>
+            </a:r>
+            <a:endParaRPr lang="en-US" sz="1400" dirty="0"/>
+          </a:p>
+        </p:txBody>
+      </p:sp>
+      <p:sp>
+        <p:nvSpPr>
+          <p:cNvPr id="33" name="Shape 31"/>
           <p:cNvSpPr/>
           <p:nvPr/>
         </p:nvSpPr>
@@ -10037,7 +10583,7 @@
       </p:sp>
       <p:sp>
         <p:nvSpPr>
-          <p:cNvPr id="28" name="Text 26"/>
+          <p:cNvPr id="34" name="Text 32"/>
           <p:cNvSpPr/>
           <p:nvPr/>
         </p:nvSpPr>
@@ -10076,7 +10622,7 @@
       </p:sp>
       <p:sp>
         <p:nvSpPr>
-          <p:cNvPr id="29" name="Shape 27"/>
+          <p:cNvPr id="35" name="Shape 33"/>
           <p:cNvSpPr/>
           <p:nvPr/>
         </p:nvSpPr>
@@ -10103,13 +10649,13 @@
       </p:sp>
       <p:sp>
         <p:nvSpPr>
-          <p:cNvPr id="30" name="Shape 28"/>
-          <p:cNvSpPr/>
-          <p:nvPr/>
-        </p:nvSpPr>
-        <p:spPr>
-          <a:xfrm>
-            <a:off x="2670048" y="4169664"/>
+          <p:cNvPr id="36" name="Shape 34"/>
+          <p:cNvSpPr/>
+          <p:nvPr/>
+        </p:nvSpPr>
+        <p:spPr>
+          <a:xfrm>
+            <a:off x="2254649" y="4169664"/>
             <a:ext cx="685800" cy="475488"/>
           </a:xfrm>
           <a:prstGeom prst="rect">
@@ -10130,13 +10676,13 @@
       </p:sp>
       <p:sp>
         <p:nvSpPr>
-          <p:cNvPr id="31" name="Text 29"/>
-          <p:cNvSpPr/>
-          <p:nvPr/>
-        </p:nvSpPr>
-        <p:spPr>
-          <a:xfrm>
-            <a:off x="2670048" y="4169664"/>
+          <p:cNvPr id="37" name="Text 35"/>
+          <p:cNvSpPr/>
+          <p:nvPr/>
+        </p:nvSpPr>
+        <p:spPr>
+          <a:xfrm>
+            <a:off x="2254649" y="4169664"/>
             <a:ext cx="685800" cy="475488"/>
           </a:xfrm>
           <a:prstGeom prst="rect">
@@ -10169,13 +10715,13 @@
       </p:sp>
       <p:sp>
         <p:nvSpPr>
-          <p:cNvPr id="32" name="Shape 30"/>
-          <p:cNvSpPr/>
-          <p:nvPr/>
-        </p:nvSpPr>
-        <p:spPr>
-          <a:xfrm>
-            <a:off x="4123944" y="4169664"/>
+          <p:cNvPr id="38" name="Shape 36"/>
+          <p:cNvSpPr/>
+          <p:nvPr/>
+        </p:nvSpPr>
+        <p:spPr>
+          <a:xfrm>
+            <a:off x="3293146" y="4169664"/>
             <a:ext cx="685800" cy="475488"/>
           </a:xfrm>
           <a:prstGeom prst="rect">
@@ -10196,13 +10742,13 @@
       </p:sp>
       <p:sp>
         <p:nvSpPr>
-          <p:cNvPr id="33" name="Text 31"/>
-          <p:cNvSpPr/>
-          <p:nvPr/>
-        </p:nvSpPr>
-        <p:spPr>
-          <a:xfrm>
-            <a:off x="4123944" y="4169664"/>
+          <p:cNvPr id="39" name="Text 37"/>
+          <p:cNvSpPr/>
+          <p:nvPr/>
+        </p:nvSpPr>
+        <p:spPr>
+          <a:xfrm>
+            <a:off x="3293146" y="4169664"/>
             <a:ext cx="685800" cy="475488"/>
           </a:xfrm>
           <a:prstGeom prst="rect">
@@ -10235,13 +10781,13 @@
       </p:sp>
       <p:sp>
         <p:nvSpPr>
-          <p:cNvPr id="34" name="Shape 32"/>
-          <p:cNvSpPr/>
-          <p:nvPr/>
-        </p:nvSpPr>
-        <p:spPr>
-          <a:xfrm>
-            <a:off x="5577840" y="4169664"/>
+          <p:cNvPr id="40" name="Shape 38"/>
+          <p:cNvSpPr/>
+          <p:nvPr/>
+        </p:nvSpPr>
+        <p:spPr>
+          <a:xfrm>
+            <a:off x="4331643" y="4169664"/>
             <a:ext cx="685800" cy="475488"/>
           </a:xfrm>
           <a:prstGeom prst="rect">
@@ -10262,13 +10808,13 @@
       </p:sp>
       <p:sp>
         <p:nvSpPr>
-          <p:cNvPr id="35" name="Text 33"/>
-          <p:cNvSpPr/>
-          <p:nvPr/>
-        </p:nvSpPr>
-        <p:spPr>
-          <a:xfrm>
-            <a:off x="5577840" y="4169664"/>
+          <p:cNvPr id="41" name="Text 39"/>
+          <p:cNvSpPr/>
+          <p:nvPr/>
+        </p:nvSpPr>
+        <p:spPr>
+          <a:xfrm>
+            <a:off x="4331643" y="4169664"/>
             <a:ext cx="685800" cy="475488"/>
           </a:xfrm>
           <a:prstGeom prst="rect">
@@ -10301,13 +10847,13 @@
       </p:sp>
       <p:sp>
         <p:nvSpPr>
-          <p:cNvPr id="36" name="Shape 34"/>
-          <p:cNvSpPr/>
-          <p:nvPr/>
-        </p:nvSpPr>
-        <p:spPr>
-          <a:xfrm>
-            <a:off x="7031736" y="4169664"/>
+          <p:cNvPr id="42" name="Shape 40"/>
+          <p:cNvSpPr/>
+          <p:nvPr/>
+        </p:nvSpPr>
+        <p:spPr>
+          <a:xfrm>
+            <a:off x="5370141" y="4169664"/>
             <a:ext cx="685800" cy="475488"/>
           </a:xfrm>
           <a:prstGeom prst="rect">
@@ -10328,13 +10874,13 @@
       </p:sp>
       <p:sp>
         <p:nvSpPr>
-          <p:cNvPr id="37" name="Text 35"/>
-          <p:cNvSpPr/>
-          <p:nvPr/>
-        </p:nvSpPr>
-        <p:spPr>
-          <a:xfrm>
-            <a:off x="7031736" y="4169664"/>
+          <p:cNvPr id="43" name="Text 41"/>
+          <p:cNvSpPr/>
+          <p:nvPr/>
+        </p:nvSpPr>
+        <p:spPr>
+          <a:xfrm>
+            <a:off x="5370141" y="4169664"/>
             <a:ext cx="685800" cy="475488"/>
           </a:xfrm>
           <a:prstGeom prst="rect">
@@ -10359,7 +10905,139 @@
                 <a:ea typeface="Trebuchet MS" pitchFamily="34" charset="-122"/>
                 <a:cs typeface="Trebuchet MS" pitchFamily="34" charset="-120"/>
               </a:rPr>
-              <a:t>ine</a:t>
+              <a:t>i</a:t>
+            </a:r>
+            <a:endParaRPr lang="en-US" sz="900" dirty="0"/>
+          </a:p>
+        </p:txBody>
+      </p:sp>
+      <p:sp>
+        <p:nvSpPr>
+          <p:cNvPr id="44" name="Shape 42"/>
+          <p:cNvSpPr/>
+          <p:nvPr/>
+        </p:nvSpPr>
+        <p:spPr>
+          <a:xfrm>
+            <a:off x="6408638" y="4169664"/>
+            <a:ext cx="685800" cy="475488"/>
+          </a:xfrm>
+          <a:prstGeom prst="rect">
+            <a:avLst>
+              <a:gd name="adj" fmla="val 7692"/>
+            </a:avLst>
+          </a:prstGeom>
+          <a:solidFill>
+            <a:srgbClr val="FFFFFF"/>
+          </a:solidFill>
+          <a:ln w="12700">
+            <a:solidFill>
+              <a:srgbClr val="DB2777"/>
+            </a:solidFill>
+            <a:prstDash val="solid"/>
+          </a:ln>
+        </p:spPr>
+      </p:sp>
+      <p:sp>
+        <p:nvSpPr>
+          <p:cNvPr id="45" name="Text 43"/>
+          <p:cNvSpPr/>
+          <p:nvPr/>
+        </p:nvSpPr>
+        <p:spPr>
+          <a:xfrm>
+            <a:off x="6408638" y="4169664"/>
+            <a:ext cx="685800" cy="475488"/>
+          </a:xfrm>
+          <a:prstGeom prst="rect">
+            <a:avLst/>
+          </a:prstGeom>
+          <a:noFill/>
+          <a:ln/>
+        </p:spPr>
+        <p:txBody>
+          <a:bodyPr wrap="square" lIns="0" tIns="0" rIns="0" bIns="0" rtlCol="0" anchor="ctr"/>
+          <a:lstStyle/>
+          <a:p>
+            <a:pPr algn="ctr" indent="0" marL="0">
+              <a:buNone/>
+            </a:pPr>
+            <a:r>
+              <a:rPr lang="en-US" sz="900" b="1" dirty="0">
+                <a:solidFill>
+                  <a:srgbClr val="9D174D"/>
+                </a:solidFill>
+                <a:latin typeface="Trebuchet MS" pitchFamily="34" charset="0"/>
+                <a:ea typeface="Trebuchet MS" pitchFamily="34" charset="-122"/>
+                <a:cs typeface="Trebuchet MS" pitchFamily="34" charset="-120"/>
+              </a:rPr>
+              <a:t>n</a:t>
+            </a:r>
+            <a:endParaRPr lang="en-US" sz="900" dirty="0"/>
+          </a:p>
+        </p:txBody>
+      </p:sp>
+      <p:sp>
+        <p:nvSpPr>
+          <p:cNvPr id="46" name="Shape 44"/>
+          <p:cNvSpPr/>
+          <p:nvPr/>
+        </p:nvSpPr>
+        <p:spPr>
+          <a:xfrm>
+            <a:off x="7447135" y="4169664"/>
+            <a:ext cx="685800" cy="475488"/>
+          </a:xfrm>
+          <a:prstGeom prst="rect">
+            <a:avLst>
+              <a:gd name="adj" fmla="val 7692"/>
+            </a:avLst>
+          </a:prstGeom>
+          <a:solidFill>
+            <a:srgbClr val="FFFFFF"/>
+          </a:solidFill>
+          <a:ln w="12700">
+            <a:solidFill>
+              <a:srgbClr val="DB2777"/>
+            </a:solidFill>
+            <a:prstDash val="solid"/>
+          </a:ln>
+        </p:spPr>
+      </p:sp>
+      <p:sp>
+        <p:nvSpPr>
+          <p:cNvPr id="47" name="Text 45"/>
+          <p:cNvSpPr/>
+          <p:nvPr/>
+        </p:nvSpPr>
+        <p:spPr>
+          <a:xfrm>
+            <a:off x="7447135" y="4169664"/>
+            <a:ext cx="685800" cy="475488"/>
+          </a:xfrm>
+          <a:prstGeom prst="rect">
+            <a:avLst/>
+          </a:prstGeom>
+          <a:noFill/>
+          <a:ln/>
+        </p:spPr>
+        <p:txBody>
+          <a:bodyPr wrap="square" lIns="0" tIns="0" rIns="0" bIns="0" rtlCol="0" anchor="ctr"/>
+          <a:lstStyle/>
+          <a:p>
+            <a:pPr algn="ctr" indent="0" marL="0">
+              <a:buNone/>
+            </a:pPr>
+            <a:r>
+              <a:rPr lang="en-US" sz="900" b="1" dirty="0">
+                <a:solidFill>
+                  <a:srgbClr val="9D174D"/>
+                </a:solidFill>
+                <a:latin typeface="Trebuchet MS" pitchFamily="34" charset="0"/>
+                <a:ea typeface="Trebuchet MS" pitchFamily="34" charset="-122"/>
+                <a:cs typeface="Trebuchet MS" pitchFamily="34" charset="-120"/>
+              </a:rPr>
+              <a:t>er</a:t>
             </a:r>
             <a:endParaRPr lang="en-US" sz="900" dirty="0"/>
           </a:p>
@@ -10651,7 +11329,7 @@
                 <a:ea typeface="Calibri" pitchFamily="34" charset="-122"/>
                 <a:cs typeface="Calibri" pitchFamily="34" charset="-120"/>
               </a:rPr>
-              <a:t>Word Labs  •  wordlabs.app  •  Root: 'marine' = of the sea or ocean</a:t>
+              <a:t>Word Labs  •  wordlabs.app  •  Root: 'marine' = relating to the sea</a:t>
             </a:r>
             <a:endParaRPr lang="en-US" sz="800" dirty="0"/>
           </a:p>
@@ -10790,7 +11468,7 @@
                 <a:ea typeface="Trebuchet MS" pitchFamily="34" charset="-122"/>
                 <a:cs typeface="Trebuchet MS" pitchFamily="34" charset="-120"/>
               </a:rPr>
-              <a:t>submarine</a:t>
+              <a:t>marines</a:t>
             </a:r>
             <a:endParaRPr lang="en-US" sz="2800" dirty="0"/>
           </a:p>
@@ -11478,7 +12156,7 @@
                 <a:ea typeface="Calibri" pitchFamily="34" charset="-122"/>
                 <a:cs typeface="Calibri" pitchFamily="34" charset="-120"/>
               </a:rPr>
-              <a:t>Word Labs  •  wordlabs.app  •  Root: 'marine' = of the sea or ocean</a:t>
+              <a:t>Word Labs  •  wordlabs.app  •  Root: 'marine' = relating to the sea</a:t>
             </a:r>
             <a:endParaRPr lang="en-US" sz="800" dirty="0"/>
           </a:p>
@@ -11617,7 +12295,7 @@
                 <a:ea typeface="Trebuchet MS" pitchFamily="34" charset="-122"/>
                 <a:cs typeface="Trebuchet MS" pitchFamily="34" charset="-120"/>
               </a:rPr>
-              <a:t>submarine</a:t>
+              <a:t>marines</a:t>
             </a:r>
             <a:endParaRPr lang="en-US" sz="2800" dirty="0"/>
           </a:p>
@@ -11706,11 +12384,11 @@
             </a:avLst>
           </a:prstGeom>
           <a:solidFill>
-            <a:srgbClr val="DDD6FE"/>
+            <a:srgbClr val="CCFBF1"/>
           </a:solidFill>
           <a:ln w="19050">
             <a:solidFill>
-              <a:srgbClr val="7C3AED"/>
+              <a:srgbClr val="0D9488"/>
             </a:solidFill>
             <a:prstDash val="solid"/>
           </a:ln>
@@ -11750,13 +12428,13 @@
             <a:r>
               <a:rPr lang="en-US" sz="1300" b="1" dirty="0">
                 <a:solidFill>
-                  <a:srgbClr val="4C1D95"/>
+                  <a:srgbClr val="0F766E"/>
                 </a:solidFill>
                 <a:latin typeface="Trebuchet MS" pitchFamily="34" charset="0"/>
                 <a:ea typeface="Trebuchet MS" pitchFamily="34" charset="-122"/>
                 <a:cs typeface="Trebuchet MS" pitchFamily="34" charset="-120"/>
               </a:rPr>
-              <a:t>sub</a:t>
+              <a:t>marine</a:t>
             </a:r>
             <a:endParaRPr lang="en-US" sz="1300" dirty="0"/>
           </a:p>
@@ -11795,7 +12473,7 @@
                 <a:ea typeface="Calibri" pitchFamily="34" charset="-122"/>
                 <a:cs typeface="Calibri" pitchFamily="34" charset="-120"/>
               </a:rPr>
-              <a:t>under, below</a:t>
+              <a:t>relating to the sea</a:t>
             </a:r>
             <a:endParaRPr lang="en-US" sz="850" dirty="0"/>
           </a:p>
@@ -11818,11 +12496,11 @@
             </a:avLst>
           </a:prstGeom>
           <a:solidFill>
-            <a:srgbClr val="CCFBF1"/>
+            <a:srgbClr val="FCE7F3"/>
           </a:solidFill>
           <a:ln w="19050">
             <a:solidFill>
-              <a:srgbClr val="0D9488"/>
+              <a:srgbClr val="DB2777"/>
             </a:solidFill>
             <a:prstDash val="solid"/>
           </a:ln>
@@ -11862,13 +12540,13 @@
             <a:r>
               <a:rPr lang="en-US" sz="1300" b="1" dirty="0">
                 <a:solidFill>
-                  <a:srgbClr val="0F766E"/>
+                  <a:srgbClr val="9D174D"/>
                 </a:solidFill>
                 <a:latin typeface="Trebuchet MS" pitchFamily="34" charset="0"/>
                 <a:ea typeface="Trebuchet MS" pitchFamily="34" charset="-122"/>
                 <a:cs typeface="Trebuchet MS" pitchFamily="34" charset="-120"/>
               </a:rPr>
-              <a:t>marine</a:t>
+              <a:t>s</a:t>
             </a:r>
             <a:endParaRPr lang="en-US" sz="1300" dirty="0"/>
           </a:p>
@@ -11907,7 +12585,7 @@
                 <a:ea typeface="Calibri" pitchFamily="34" charset="-122"/>
                 <a:cs typeface="Calibri" pitchFamily="34" charset="-120"/>
               </a:rPr>
-              <a:t>of the sea</a:t>
+              <a:t>plural or present tense</a:t>
             </a:r>
             <a:endParaRPr lang="en-US" sz="850" dirty="0"/>
           </a:p>
@@ -12463,7 +13141,7 @@
                 <a:ea typeface="Calibri" pitchFamily="34" charset="-122"/>
                 <a:cs typeface="Calibri" pitchFamily="34" charset="-120"/>
               </a:rPr>
-              <a:t>Word Labs  •  wordlabs.app  •  Root: 'marine' = of the sea or ocean</a:t>
+              <a:t>Word Labs  •  wordlabs.app  •  Root: 'marine' = relating to the sea</a:t>
             </a:r>
             <a:endParaRPr lang="en-US" sz="800" dirty="0"/>
           </a:p>
@@ -12602,7 +13280,7 @@
                 <a:ea typeface="Trebuchet MS" pitchFamily="34" charset="-122"/>
                 <a:cs typeface="Trebuchet MS" pitchFamily="34" charset="-120"/>
               </a:rPr>
-              <a:t>submarine</a:t>
+              <a:t>marines</a:t>
             </a:r>
             <a:endParaRPr lang="en-US" sz="2800" dirty="0"/>
           </a:p>
@@ -12691,11 +13369,11 @@
             </a:avLst>
           </a:prstGeom>
           <a:solidFill>
-            <a:srgbClr val="DDD6FE"/>
+            <a:srgbClr val="CCFBF1"/>
           </a:solidFill>
           <a:ln w="19050">
             <a:solidFill>
-              <a:srgbClr val="7C3AED"/>
+              <a:srgbClr val="0D9488"/>
             </a:solidFill>
             <a:prstDash val="solid"/>
           </a:ln>
@@ -12735,13 +13413,13 @@
             <a:r>
               <a:rPr lang="en-US" sz="1300" b="1" dirty="0">
                 <a:solidFill>
-                  <a:srgbClr val="4C1D95"/>
+                  <a:srgbClr val="0F766E"/>
                 </a:solidFill>
                 <a:latin typeface="Trebuchet MS" pitchFamily="34" charset="0"/>
                 <a:ea typeface="Trebuchet MS" pitchFamily="34" charset="-122"/>
                 <a:cs typeface="Trebuchet MS" pitchFamily="34" charset="-120"/>
               </a:rPr>
-              <a:t>sub</a:t>
+              <a:t>marine</a:t>
             </a:r>
             <a:endParaRPr lang="en-US" sz="1300" dirty="0"/>
           </a:p>
@@ -12780,7 +13458,7 @@
                 <a:ea typeface="Calibri" pitchFamily="34" charset="-122"/>
                 <a:cs typeface="Calibri" pitchFamily="34" charset="-120"/>
               </a:rPr>
-              <a:t>under, below</a:t>
+              <a:t>relating to the sea</a:t>
             </a:r>
             <a:endParaRPr lang="en-US" sz="850" dirty="0"/>
           </a:p>
@@ -12803,11 +13481,11 @@
             </a:avLst>
           </a:prstGeom>
           <a:solidFill>
-            <a:srgbClr val="CCFBF1"/>
+            <a:srgbClr val="FCE7F3"/>
           </a:solidFill>
           <a:ln w="19050">
             <a:solidFill>
-              <a:srgbClr val="0D9488"/>
+              <a:srgbClr val="DB2777"/>
             </a:solidFill>
             <a:prstDash val="solid"/>
           </a:ln>
@@ -12847,13 +13525,13 @@
             <a:r>
               <a:rPr lang="en-US" sz="1300" b="1" dirty="0">
                 <a:solidFill>
-                  <a:srgbClr val="0F766E"/>
+                  <a:srgbClr val="9D174D"/>
                 </a:solidFill>
                 <a:latin typeface="Trebuchet MS" pitchFamily="34" charset="0"/>
                 <a:ea typeface="Trebuchet MS" pitchFamily="34" charset="-122"/>
                 <a:cs typeface="Trebuchet MS" pitchFamily="34" charset="-120"/>
               </a:rPr>
-              <a:t>marine</a:t>
+              <a:t>s</a:t>
             </a:r>
             <a:endParaRPr lang="en-US" sz="1300" dirty="0"/>
           </a:p>
@@ -12892,7 +13570,7 @@
                 <a:ea typeface="Calibri" pitchFamily="34" charset="-122"/>
                 <a:cs typeface="Calibri" pitchFamily="34" charset="-120"/>
               </a:rPr>
-              <a:t>of the sea</a:t>
+              <a:t>plural or present tense</a:t>
             </a:r>
             <a:endParaRPr lang="en-US" sz="850" dirty="0"/>
           </a:p>
@@ -12999,7 +13677,7 @@
         </p:nvSpPr>
         <p:spPr>
           <a:xfrm>
-            <a:off x="2313432" y="3364992"/>
+            <a:off x="2999232" y="3364992"/>
             <a:ext cx="1645920" cy="475488"/>
           </a:xfrm>
           <a:prstGeom prst="rect">
@@ -13026,7 +13704,7 @@
         </p:nvSpPr>
         <p:spPr>
           <a:xfrm>
-            <a:off x="2313432" y="3364992"/>
+            <a:off x="2999232" y="3364992"/>
             <a:ext cx="1645920" cy="475488"/>
           </a:xfrm>
           <a:prstGeom prst="rect">
@@ -13051,7 +13729,7 @@
                 <a:ea typeface="Trebuchet MS" pitchFamily="34" charset="-122"/>
                 <a:cs typeface="Trebuchet MS" pitchFamily="34" charset="-120"/>
               </a:rPr>
-              <a:t>sub</a:t>
+              <a:t>ma</a:t>
             </a:r>
             <a:endParaRPr lang="en-US" sz="1400" dirty="0"/>
           </a:p>
@@ -13065,8 +13743,8 @@
         </p:nvSpPr>
         <p:spPr>
           <a:xfrm>
-            <a:off x="3959352" y="3364992"/>
-            <a:ext cx="411480" cy="475488"/>
+            <a:off x="4645152" y="3364992"/>
+            <a:ext cx="1097280" cy="475488"/>
           </a:xfrm>
           <a:prstGeom prst="rect">
             <a:avLst/>
@@ -13104,7 +13782,7 @@
         </p:nvSpPr>
         <p:spPr>
           <a:xfrm>
-            <a:off x="4370832" y="3364992"/>
+            <a:off x="5742432" y="3364992"/>
             <a:ext cx="1645920" cy="475488"/>
           </a:xfrm>
           <a:prstGeom prst="rect">
@@ -13131,7 +13809,7 @@
         </p:nvSpPr>
         <p:spPr>
           <a:xfrm>
-            <a:off x="4370832" y="3364992"/>
+            <a:off x="5742432" y="3364992"/>
             <a:ext cx="1645920" cy="475488"/>
           </a:xfrm>
           <a:prstGeom prst="rect">
@@ -13156,7 +13834,7 @@
                 <a:ea typeface="Trebuchet MS" pitchFamily="34" charset="-122"/>
                 <a:cs typeface="Trebuchet MS" pitchFamily="34" charset="-120"/>
               </a:rPr>
-              <a:t>ma</a:t>
+              <a:t>rines</a:t>
             </a:r>
             <a:endParaRPr lang="en-US" sz="1400" dirty="0"/>
           </a:p>
@@ -13164,119 +13842,80 @@
       </p:sp>
       <p:sp>
         <p:nvSpPr>
-          <p:cNvPr id="30" name="Text 28"/>
-          <p:cNvSpPr/>
-          <p:nvPr/>
-        </p:nvSpPr>
-        <p:spPr>
-          <a:xfrm>
-            <a:off x="6016752" y="3364992"/>
-            <a:ext cx="411480" cy="475488"/>
-          </a:xfrm>
-          <a:prstGeom prst="rect">
-            <a:avLst/>
-          </a:prstGeom>
-          <a:noFill/>
-          <a:ln/>
-        </p:spPr>
-        <p:txBody>
-          <a:bodyPr wrap="square" lIns="0" tIns="0" rIns="0" bIns="0" rtlCol="0" anchor="ctr"/>
-          <a:lstStyle/>
-          <a:p>
-            <a:pPr algn="ctr" indent="0" marL="0">
-              <a:buNone/>
-            </a:pPr>
-            <a:r>
-              <a:rPr lang="en-US" sz="1600" b="1" dirty="0">
-                <a:solidFill>
-                  <a:srgbClr val="0D9488"/>
+          <p:cNvPr id="30" name="Shape 28"/>
+          <p:cNvSpPr/>
+          <p:nvPr/>
+        </p:nvSpPr>
+        <p:spPr>
+          <a:xfrm>
+            <a:off x="365760" y="4096512"/>
+            <a:ext cx="1371600" cy="804672"/>
+          </a:xfrm>
+          <a:prstGeom prst="rect">
+            <a:avLst>
+              <a:gd name="adj" fmla="val 6818"/>
+            </a:avLst>
+          </a:prstGeom>
+          <a:solidFill>
+            <a:srgbClr val="E2E8F0"/>
+          </a:solidFill>
+          <a:ln w="12700">
+            <a:solidFill>
+              <a:srgbClr val="E2E8F0"/>
+            </a:solidFill>
+            <a:prstDash val="solid"/>
+          </a:ln>
+        </p:spPr>
+      </p:sp>
+      <p:sp>
+        <p:nvSpPr>
+          <p:cNvPr id="31" name="Text 29"/>
+          <p:cNvSpPr/>
+          <p:nvPr/>
+        </p:nvSpPr>
+        <p:spPr>
+          <a:xfrm>
+            <a:off x="365760" y="4096512"/>
+            <a:ext cx="1371600" cy="804672"/>
+          </a:xfrm>
+          <a:prstGeom prst="rect">
+            <a:avLst/>
+          </a:prstGeom>
+          <a:noFill/>
+          <a:ln/>
+        </p:spPr>
+        <p:txBody>
+          <a:bodyPr wrap="square" lIns="0" tIns="0" rIns="0" bIns="0" rtlCol="0" anchor="ctr"/>
+          <a:lstStyle/>
+          <a:p>
+            <a:pPr algn="ctr" indent="0" marL="0">
+              <a:buNone/>
+            </a:pPr>
+            <a:r>
+              <a:rPr lang="en-US" sz="1100" b="1" dirty="0">
+                <a:solidFill>
+                  <a:srgbClr val="475569"/>
                 </a:solidFill>
                 <a:latin typeface="Trebuchet MS" pitchFamily="34" charset="0"/>
                 <a:ea typeface="Trebuchet MS" pitchFamily="34" charset="-122"/>
                 <a:cs typeface="Trebuchet MS" pitchFamily="34" charset="-120"/>
               </a:rPr>
-              <a:t>·</a:t>
-            </a:r>
-            <a:endParaRPr lang="en-US" sz="1600" dirty="0"/>
-          </a:p>
-        </p:txBody>
-      </p:sp>
-      <p:sp>
-        <p:nvSpPr>
-          <p:cNvPr id="31" name="Shape 29"/>
-          <p:cNvSpPr/>
-          <p:nvPr/>
-        </p:nvSpPr>
-        <p:spPr>
-          <a:xfrm>
-            <a:off x="6428232" y="3364992"/>
-            <a:ext cx="1645920" cy="475488"/>
-          </a:xfrm>
-          <a:prstGeom prst="rect">
-            <a:avLst>
-              <a:gd name="adj" fmla="val 9615"/>
-            </a:avLst>
-          </a:prstGeom>
-          <a:solidFill>
-            <a:srgbClr val="FFFFFF"/>
-          </a:solidFill>
-          <a:ln w="12700">
-            <a:solidFill>
-              <a:srgbClr val="0D9488"/>
-            </a:solidFill>
-            <a:prstDash val="solid"/>
-          </a:ln>
-        </p:spPr>
-      </p:sp>
-      <p:sp>
-        <p:nvSpPr>
-          <p:cNvPr id="32" name="Text 30"/>
-          <p:cNvSpPr/>
-          <p:nvPr/>
-        </p:nvSpPr>
-        <p:spPr>
-          <a:xfrm>
-            <a:off x="6428232" y="3364992"/>
-            <a:ext cx="1645920" cy="475488"/>
-          </a:xfrm>
-          <a:prstGeom prst="rect">
-            <a:avLst/>
-          </a:prstGeom>
-          <a:noFill/>
-          <a:ln/>
-        </p:spPr>
-        <p:txBody>
-          <a:bodyPr wrap="square" lIns="0" tIns="0" rIns="0" bIns="0" rtlCol="0" anchor="ctr"/>
-          <a:lstStyle/>
-          <a:p>
-            <a:pPr algn="ctr" indent="0" marL="0">
-              <a:buNone/>
-            </a:pPr>
-            <a:r>
-              <a:rPr lang="en-US" sz="1400" b="1" dirty="0">
-                <a:solidFill>
-                  <a:srgbClr val="0D9488"/>
-                </a:solidFill>
-                <a:latin typeface="Trebuchet MS" pitchFamily="34" charset="0"/>
-                <a:ea typeface="Trebuchet MS" pitchFamily="34" charset="-122"/>
-                <a:cs typeface="Trebuchet MS" pitchFamily="34" charset="-120"/>
-              </a:rPr>
-              <a:t>rine</a:t>
-            </a:r>
-            <a:endParaRPr lang="en-US" sz="1400" dirty="0"/>
-          </a:p>
-        </p:txBody>
-      </p:sp>
-      <p:sp>
-        <p:nvSpPr>
-          <p:cNvPr id="33" name="Shape 31"/>
-          <p:cNvSpPr/>
-          <p:nvPr/>
-        </p:nvSpPr>
-        <p:spPr>
-          <a:xfrm>
-            <a:off x="365760" y="4096512"/>
-            <a:ext cx="1371600" cy="804672"/>
+              <a:t>Phonemes</a:t>
+            </a:r>
+            <a:endParaRPr lang="en-US" sz="1100" dirty="0"/>
+          </a:p>
+        </p:txBody>
+      </p:sp>
+      <p:sp>
+        <p:nvSpPr>
+          <p:cNvPr id="32" name="Shape 30"/>
+          <p:cNvSpPr/>
+          <p:nvPr/>
+        </p:nvSpPr>
+        <p:spPr>
+          <a:xfrm>
+            <a:off x="1874520" y="4096512"/>
+            <a:ext cx="6903720" cy="804672"/>
           </a:xfrm>
           <a:prstGeom prst="rect">
             <a:avLst>
@@ -13284,85 +13923,19 @@
             </a:avLst>
           </a:prstGeom>
           <a:solidFill>
-            <a:srgbClr val="E2E8F0"/>
+            <a:srgbClr val="F8FAFC"/>
           </a:solidFill>
           <a:ln w="12700">
             <a:solidFill>
               <a:srgbClr val="E2E8F0"/>
             </a:solidFill>
-            <a:prstDash val="solid"/>
-          </a:ln>
-        </p:spPr>
-      </p:sp>
-      <p:sp>
-        <p:nvSpPr>
-          <p:cNvPr id="34" name="Text 32"/>
-          <p:cNvSpPr/>
-          <p:nvPr/>
-        </p:nvSpPr>
-        <p:spPr>
-          <a:xfrm>
-            <a:off x="365760" y="4096512"/>
-            <a:ext cx="1371600" cy="804672"/>
-          </a:xfrm>
-          <a:prstGeom prst="rect">
-            <a:avLst/>
-          </a:prstGeom>
-          <a:noFill/>
-          <a:ln/>
-        </p:spPr>
-        <p:txBody>
-          <a:bodyPr wrap="square" lIns="0" tIns="0" rIns="0" bIns="0" rtlCol="0" anchor="ctr"/>
-          <a:lstStyle/>
-          <a:p>
-            <a:pPr algn="ctr" indent="0" marL="0">
-              <a:buNone/>
-            </a:pPr>
-            <a:r>
-              <a:rPr lang="en-US" sz="1100" b="1" dirty="0">
-                <a:solidFill>
-                  <a:srgbClr val="475569"/>
-                </a:solidFill>
-                <a:latin typeface="Trebuchet MS" pitchFamily="34" charset="0"/>
-                <a:ea typeface="Trebuchet MS" pitchFamily="34" charset="-122"/>
-                <a:cs typeface="Trebuchet MS" pitchFamily="34" charset="-120"/>
-              </a:rPr>
-              <a:t>Phonemes</a:t>
-            </a:r>
-            <a:endParaRPr lang="en-US" sz="1100" dirty="0"/>
-          </a:p>
-        </p:txBody>
-      </p:sp>
-      <p:sp>
-        <p:nvSpPr>
-          <p:cNvPr id="35" name="Shape 33"/>
-          <p:cNvSpPr/>
-          <p:nvPr/>
-        </p:nvSpPr>
-        <p:spPr>
-          <a:xfrm>
-            <a:off x="1874520" y="4096512"/>
-            <a:ext cx="6903720" cy="804672"/>
-          </a:xfrm>
-          <a:prstGeom prst="rect">
-            <a:avLst>
-              <a:gd name="adj" fmla="val 6818"/>
-            </a:avLst>
-          </a:prstGeom>
-          <a:solidFill>
-            <a:srgbClr val="F8FAFC"/>
-          </a:solidFill>
-          <a:ln w="12700">
-            <a:solidFill>
-              <a:srgbClr val="E2E8F0"/>
-            </a:solidFill>
             <a:prstDash val="dash"/>
           </a:ln>
         </p:spPr>
       </p:sp>
       <p:sp>
         <p:nvSpPr>
-          <p:cNvPr id="36" name="Text 34"/>
+          <p:cNvPr id="33" name="Text 31"/>
           <p:cNvSpPr/>
           <p:nvPr/>
         </p:nvSpPr>
@@ -13594,7 +14167,7 @@
                 <a:ea typeface="Calibri" pitchFamily="34" charset="-122"/>
                 <a:cs typeface="Calibri" pitchFamily="34" charset="-120"/>
               </a:rPr>
-              <a:t>Root 'marine' — of the sea or ocean</a:t>
+              <a:t>Root 'marine' — relating to the sea</a:t>
             </a:r>
             <a:endParaRPr lang="en-US" sz="1600" dirty="0"/>
           </a:p>
@@ -13950,7 +14523,7 @@
                 <a:ea typeface="Calibri" pitchFamily="34" charset="-122"/>
                 <a:cs typeface="Calibri" pitchFamily="34" charset="-120"/>
               </a:rPr>
-              <a:t>Word Labs  •  wordlabs.app  •  Root: 'marine' = of the sea or ocean</a:t>
+              <a:t>Word Labs  •  wordlabs.app  •  Root: 'marine' = relating to the sea</a:t>
             </a:r>
             <a:endParaRPr lang="en-US" sz="800" dirty="0"/>
           </a:p>
@@ -14089,7 +14662,7 @@
                 <a:ea typeface="Trebuchet MS" pitchFamily="34" charset="-122"/>
                 <a:cs typeface="Trebuchet MS" pitchFamily="34" charset="-120"/>
               </a:rPr>
-              <a:t>submarine</a:t>
+              <a:t>marines</a:t>
             </a:r>
             <a:endParaRPr lang="en-US" sz="2800" dirty="0"/>
           </a:p>
@@ -14178,11 +14751,11 @@
             </a:avLst>
           </a:prstGeom>
           <a:solidFill>
-            <a:srgbClr val="DDD6FE"/>
+            <a:srgbClr val="CCFBF1"/>
           </a:solidFill>
           <a:ln w="19050">
             <a:solidFill>
-              <a:srgbClr val="7C3AED"/>
+              <a:srgbClr val="0D9488"/>
             </a:solidFill>
             <a:prstDash val="solid"/>
           </a:ln>
@@ -14222,13 +14795,13 @@
             <a:r>
               <a:rPr lang="en-US" sz="1300" b="1" dirty="0">
                 <a:solidFill>
-                  <a:srgbClr val="4C1D95"/>
+                  <a:srgbClr val="0F766E"/>
                 </a:solidFill>
                 <a:latin typeface="Trebuchet MS" pitchFamily="34" charset="0"/>
                 <a:ea typeface="Trebuchet MS" pitchFamily="34" charset="-122"/>
                 <a:cs typeface="Trebuchet MS" pitchFamily="34" charset="-120"/>
               </a:rPr>
-              <a:t>sub</a:t>
+              <a:t>marine</a:t>
             </a:r>
             <a:endParaRPr lang="en-US" sz="1300" dirty="0"/>
           </a:p>
@@ -14267,7 +14840,7 @@
                 <a:ea typeface="Calibri" pitchFamily="34" charset="-122"/>
                 <a:cs typeface="Calibri" pitchFamily="34" charset="-120"/>
               </a:rPr>
-              <a:t>under, below</a:t>
+              <a:t>relating to the sea</a:t>
             </a:r>
             <a:endParaRPr lang="en-US" sz="850" dirty="0"/>
           </a:p>
@@ -14290,11 +14863,11 @@
             </a:avLst>
           </a:prstGeom>
           <a:solidFill>
-            <a:srgbClr val="CCFBF1"/>
+            <a:srgbClr val="FCE7F3"/>
           </a:solidFill>
           <a:ln w="19050">
             <a:solidFill>
-              <a:srgbClr val="0D9488"/>
+              <a:srgbClr val="DB2777"/>
             </a:solidFill>
             <a:prstDash val="solid"/>
           </a:ln>
@@ -14334,13 +14907,13 @@
             <a:r>
               <a:rPr lang="en-US" sz="1300" b="1" dirty="0">
                 <a:solidFill>
-                  <a:srgbClr val="0F766E"/>
+                  <a:srgbClr val="9D174D"/>
                 </a:solidFill>
                 <a:latin typeface="Trebuchet MS" pitchFamily="34" charset="0"/>
                 <a:ea typeface="Trebuchet MS" pitchFamily="34" charset="-122"/>
                 <a:cs typeface="Trebuchet MS" pitchFamily="34" charset="-120"/>
               </a:rPr>
-              <a:t>marine</a:t>
+              <a:t>s</a:t>
             </a:r>
             <a:endParaRPr lang="en-US" sz="1300" dirty="0"/>
           </a:p>
@@ -14379,7 +14952,7 @@
                 <a:ea typeface="Calibri" pitchFamily="34" charset="-122"/>
                 <a:cs typeface="Calibri" pitchFamily="34" charset="-120"/>
               </a:rPr>
-              <a:t>of the sea</a:t>
+              <a:t>plural or present tense</a:t>
             </a:r>
             <a:endParaRPr lang="en-US" sz="850" dirty="0"/>
           </a:p>
@@ -14486,7 +15059,7 @@
         </p:nvSpPr>
         <p:spPr>
           <a:xfrm>
-            <a:off x="2313432" y="3364992"/>
+            <a:off x="2999232" y="3364992"/>
             <a:ext cx="1645920" cy="475488"/>
           </a:xfrm>
           <a:prstGeom prst="rect">
@@ -14513,7 +15086,7 @@
         </p:nvSpPr>
         <p:spPr>
           <a:xfrm>
-            <a:off x="2313432" y="3364992"/>
+            <a:off x="2999232" y="3364992"/>
             <a:ext cx="1645920" cy="475488"/>
           </a:xfrm>
           <a:prstGeom prst="rect">
@@ -14538,7 +15111,7 @@
                 <a:ea typeface="Trebuchet MS" pitchFamily="34" charset="-122"/>
                 <a:cs typeface="Trebuchet MS" pitchFamily="34" charset="-120"/>
               </a:rPr>
-              <a:t>sub</a:t>
+              <a:t>ma</a:t>
             </a:r>
             <a:endParaRPr lang="en-US" sz="1400" dirty="0"/>
           </a:p>
@@ -14552,8 +15125,8 @@
         </p:nvSpPr>
         <p:spPr>
           <a:xfrm>
-            <a:off x="3959352" y="3364992"/>
-            <a:ext cx="411480" cy="475488"/>
+            <a:off x="4645152" y="3364992"/>
+            <a:ext cx="1097280" cy="475488"/>
           </a:xfrm>
           <a:prstGeom prst="rect">
             <a:avLst/>
@@ -14591,7 +15164,7 @@
         </p:nvSpPr>
         <p:spPr>
           <a:xfrm>
-            <a:off x="4370832" y="3364992"/>
+            <a:off x="5742432" y="3364992"/>
             <a:ext cx="1645920" cy="475488"/>
           </a:xfrm>
           <a:prstGeom prst="rect">
@@ -14618,7 +15191,7 @@
         </p:nvSpPr>
         <p:spPr>
           <a:xfrm>
-            <a:off x="4370832" y="3364992"/>
+            <a:off x="5742432" y="3364992"/>
             <a:ext cx="1645920" cy="475488"/>
           </a:xfrm>
           <a:prstGeom prst="rect">
@@ -14643,7 +15216,7 @@
                 <a:ea typeface="Trebuchet MS" pitchFamily="34" charset="-122"/>
                 <a:cs typeface="Trebuchet MS" pitchFamily="34" charset="-120"/>
               </a:rPr>
-              <a:t>ma</a:t>
+              <a:t>rines</a:t>
             </a:r>
             <a:endParaRPr lang="en-US" sz="1400" dirty="0"/>
           </a:p>
@@ -14651,211 +15224,238 @@
       </p:sp>
       <p:sp>
         <p:nvSpPr>
-          <p:cNvPr id="30" name="Text 28"/>
-          <p:cNvSpPr/>
-          <p:nvPr/>
-        </p:nvSpPr>
-        <p:spPr>
-          <a:xfrm>
-            <a:off x="6016752" y="3364992"/>
-            <a:ext cx="411480" cy="475488"/>
-          </a:xfrm>
-          <a:prstGeom prst="rect">
-            <a:avLst/>
-          </a:prstGeom>
-          <a:noFill/>
-          <a:ln/>
-        </p:spPr>
-        <p:txBody>
-          <a:bodyPr wrap="square" lIns="0" tIns="0" rIns="0" bIns="0" rtlCol="0" anchor="ctr"/>
-          <a:lstStyle/>
-          <a:p>
-            <a:pPr algn="ctr" indent="0" marL="0">
-              <a:buNone/>
-            </a:pPr>
-            <a:r>
-              <a:rPr lang="en-US" sz="1600" b="1" dirty="0">
-                <a:solidFill>
-                  <a:srgbClr val="0D9488"/>
+          <p:cNvPr id="30" name="Shape 28"/>
+          <p:cNvSpPr/>
+          <p:nvPr/>
+        </p:nvSpPr>
+        <p:spPr>
+          <a:xfrm>
+            <a:off x="365760" y="4096512"/>
+            <a:ext cx="1371600" cy="804672"/>
+          </a:xfrm>
+          <a:prstGeom prst="rect">
+            <a:avLst>
+              <a:gd name="adj" fmla="val 6818"/>
+            </a:avLst>
+          </a:prstGeom>
+          <a:solidFill>
+            <a:srgbClr val="E2E8F0"/>
+          </a:solidFill>
+          <a:ln w="12700">
+            <a:solidFill>
+              <a:srgbClr val="E2E8F0"/>
+            </a:solidFill>
+            <a:prstDash val="solid"/>
+          </a:ln>
+        </p:spPr>
+      </p:sp>
+      <p:sp>
+        <p:nvSpPr>
+          <p:cNvPr id="31" name="Text 29"/>
+          <p:cNvSpPr/>
+          <p:nvPr/>
+        </p:nvSpPr>
+        <p:spPr>
+          <a:xfrm>
+            <a:off x="365760" y="4096512"/>
+            <a:ext cx="1371600" cy="804672"/>
+          </a:xfrm>
+          <a:prstGeom prst="rect">
+            <a:avLst/>
+          </a:prstGeom>
+          <a:noFill/>
+          <a:ln/>
+        </p:spPr>
+        <p:txBody>
+          <a:bodyPr wrap="square" lIns="0" tIns="0" rIns="0" bIns="0" rtlCol="0" anchor="ctr"/>
+          <a:lstStyle/>
+          <a:p>
+            <a:pPr algn="ctr" indent="0" marL="0">
+              <a:buNone/>
+            </a:pPr>
+            <a:r>
+              <a:rPr lang="en-US" sz="1100" b="1" dirty="0">
+                <a:solidFill>
+                  <a:srgbClr val="475569"/>
                 </a:solidFill>
                 <a:latin typeface="Trebuchet MS" pitchFamily="34" charset="0"/>
                 <a:ea typeface="Trebuchet MS" pitchFamily="34" charset="-122"/>
                 <a:cs typeface="Trebuchet MS" pitchFamily="34" charset="-120"/>
               </a:rPr>
-              <a:t>·</a:t>
-            </a:r>
-            <a:endParaRPr lang="en-US" sz="1600" dirty="0"/>
-          </a:p>
-        </p:txBody>
-      </p:sp>
-      <p:sp>
-        <p:nvSpPr>
-          <p:cNvPr id="31" name="Shape 29"/>
-          <p:cNvSpPr/>
-          <p:nvPr/>
-        </p:nvSpPr>
-        <p:spPr>
-          <a:xfrm>
-            <a:off x="6428232" y="3364992"/>
-            <a:ext cx="1645920" cy="475488"/>
+              <a:t>Phonemes</a:t>
+            </a:r>
+            <a:endParaRPr lang="en-US" sz="1100" dirty="0"/>
+          </a:p>
+        </p:txBody>
+      </p:sp>
+      <p:sp>
+        <p:nvSpPr>
+          <p:cNvPr id="32" name="Shape 30"/>
+          <p:cNvSpPr/>
+          <p:nvPr/>
+        </p:nvSpPr>
+        <p:spPr>
+          <a:xfrm>
+            <a:off x="1874520" y="4096512"/>
+            <a:ext cx="6903720" cy="658368"/>
           </a:xfrm>
           <a:prstGeom prst="rect">
             <a:avLst>
-              <a:gd name="adj" fmla="val 9615"/>
+              <a:gd name="adj" fmla="val 8333"/>
             </a:avLst>
           </a:prstGeom>
           <a:solidFill>
+            <a:srgbClr val="FCE7F3"/>
+          </a:solidFill>
+          <a:ln w="12700">
+            <a:solidFill>
+              <a:srgbClr val="DB2777"/>
+            </a:solidFill>
+            <a:prstDash val="solid"/>
+          </a:ln>
+        </p:spPr>
+      </p:sp>
+      <p:sp>
+        <p:nvSpPr>
+          <p:cNvPr id="33" name="Shape 31"/>
+          <p:cNvSpPr/>
+          <p:nvPr/>
+        </p:nvSpPr>
+        <p:spPr>
+          <a:xfrm>
+            <a:off x="2254649" y="4169664"/>
+            <a:ext cx="685800" cy="475488"/>
+          </a:xfrm>
+          <a:prstGeom prst="rect">
+            <a:avLst>
+              <a:gd name="adj" fmla="val 7692"/>
+            </a:avLst>
+          </a:prstGeom>
+          <a:solidFill>
             <a:srgbClr val="FFFFFF"/>
           </a:solidFill>
           <a:ln w="12700">
             <a:solidFill>
-              <a:srgbClr val="0D9488"/>
-            </a:solidFill>
-            <a:prstDash val="solid"/>
-          </a:ln>
-        </p:spPr>
-      </p:sp>
-      <p:sp>
-        <p:nvSpPr>
-          <p:cNvPr id="32" name="Text 30"/>
-          <p:cNvSpPr/>
-          <p:nvPr/>
-        </p:nvSpPr>
-        <p:spPr>
-          <a:xfrm>
-            <a:off x="6428232" y="3364992"/>
-            <a:ext cx="1645920" cy="475488"/>
-          </a:xfrm>
-          <a:prstGeom prst="rect">
-            <a:avLst/>
-          </a:prstGeom>
-          <a:noFill/>
-          <a:ln/>
-        </p:spPr>
-        <p:txBody>
-          <a:bodyPr wrap="square" lIns="0" tIns="0" rIns="0" bIns="0" rtlCol="0" anchor="ctr"/>
-          <a:lstStyle/>
-          <a:p>
-            <a:pPr algn="ctr" indent="0" marL="0">
-              <a:buNone/>
-            </a:pPr>
-            <a:r>
-              <a:rPr lang="en-US" sz="1400" b="1" dirty="0">
-                <a:solidFill>
-                  <a:srgbClr val="0D9488"/>
+              <a:srgbClr val="DB2777"/>
+            </a:solidFill>
+            <a:prstDash val="solid"/>
+          </a:ln>
+        </p:spPr>
+      </p:sp>
+      <p:sp>
+        <p:nvSpPr>
+          <p:cNvPr id="34" name="Text 32"/>
+          <p:cNvSpPr/>
+          <p:nvPr/>
+        </p:nvSpPr>
+        <p:spPr>
+          <a:xfrm>
+            <a:off x="2254649" y="4169664"/>
+            <a:ext cx="685800" cy="475488"/>
+          </a:xfrm>
+          <a:prstGeom prst="rect">
+            <a:avLst/>
+          </a:prstGeom>
+          <a:noFill/>
+          <a:ln/>
+        </p:spPr>
+        <p:txBody>
+          <a:bodyPr wrap="square" lIns="0" tIns="0" rIns="0" bIns="0" rtlCol="0" anchor="ctr"/>
+          <a:lstStyle/>
+          <a:p>
+            <a:pPr algn="ctr" indent="0" marL="0">
+              <a:buNone/>
+            </a:pPr>
+            <a:r>
+              <a:rPr lang="en-US" sz="900" b="1" dirty="0">
+                <a:solidFill>
+                  <a:srgbClr val="9D174D"/>
                 </a:solidFill>
                 <a:latin typeface="Trebuchet MS" pitchFamily="34" charset="0"/>
                 <a:ea typeface="Trebuchet MS" pitchFamily="34" charset="-122"/>
                 <a:cs typeface="Trebuchet MS" pitchFamily="34" charset="-120"/>
               </a:rPr>
-              <a:t>rine</a:t>
-            </a:r>
-            <a:endParaRPr lang="en-US" sz="1400" dirty="0"/>
-          </a:p>
-        </p:txBody>
-      </p:sp>
-      <p:sp>
-        <p:nvSpPr>
-          <p:cNvPr id="33" name="Shape 31"/>
-          <p:cNvSpPr/>
-          <p:nvPr/>
-        </p:nvSpPr>
-        <p:spPr>
-          <a:xfrm>
-            <a:off x="365760" y="4096512"/>
-            <a:ext cx="1371600" cy="804672"/>
+              <a:t>m</a:t>
+            </a:r>
+            <a:endParaRPr lang="en-US" sz="900" dirty="0"/>
+          </a:p>
+        </p:txBody>
+      </p:sp>
+      <p:sp>
+        <p:nvSpPr>
+          <p:cNvPr id="35" name="Shape 33"/>
+          <p:cNvSpPr/>
+          <p:nvPr/>
+        </p:nvSpPr>
+        <p:spPr>
+          <a:xfrm>
+            <a:off x="3293146" y="4169664"/>
+            <a:ext cx="685800" cy="475488"/>
           </a:xfrm>
           <a:prstGeom prst="rect">
             <a:avLst>
-              <a:gd name="adj" fmla="val 6818"/>
+              <a:gd name="adj" fmla="val 7692"/>
             </a:avLst>
           </a:prstGeom>
           <a:solidFill>
-            <a:srgbClr val="E2E8F0"/>
-          </a:solidFill>
-          <a:ln w="12700">
-            <a:solidFill>
-              <a:srgbClr val="E2E8F0"/>
-            </a:solidFill>
-            <a:prstDash val="solid"/>
-          </a:ln>
-        </p:spPr>
-      </p:sp>
-      <p:sp>
-        <p:nvSpPr>
-          <p:cNvPr id="34" name="Text 32"/>
-          <p:cNvSpPr/>
-          <p:nvPr/>
-        </p:nvSpPr>
-        <p:spPr>
-          <a:xfrm>
-            <a:off x="365760" y="4096512"/>
-            <a:ext cx="1371600" cy="804672"/>
-          </a:xfrm>
-          <a:prstGeom prst="rect">
-            <a:avLst/>
-          </a:prstGeom>
-          <a:noFill/>
-          <a:ln/>
-        </p:spPr>
-        <p:txBody>
-          <a:bodyPr wrap="square" lIns="0" tIns="0" rIns="0" bIns="0" rtlCol="0" anchor="ctr"/>
-          <a:lstStyle/>
-          <a:p>
-            <a:pPr algn="ctr" indent="0" marL="0">
-              <a:buNone/>
-            </a:pPr>
-            <a:r>
-              <a:rPr lang="en-US" sz="1100" b="1" dirty="0">
-                <a:solidFill>
-                  <a:srgbClr val="475569"/>
+            <a:srgbClr val="FFFFFF"/>
+          </a:solidFill>
+          <a:ln w="12700">
+            <a:solidFill>
+              <a:srgbClr val="DB2777"/>
+            </a:solidFill>
+            <a:prstDash val="solid"/>
+          </a:ln>
+        </p:spPr>
+      </p:sp>
+      <p:sp>
+        <p:nvSpPr>
+          <p:cNvPr id="36" name="Text 34"/>
+          <p:cNvSpPr/>
+          <p:nvPr/>
+        </p:nvSpPr>
+        <p:spPr>
+          <a:xfrm>
+            <a:off x="3293146" y="4169664"/>
+            <a:ext cx="685800" cy="475488"/>
+          </a:xfrm>
+          <a:prstGeom prst="rect">
+            <a:avLst/>
+          </a:prstGeom>
+          <a:noFill/>
+          <a:ln/>
+        </p:spPr>
+        <p:txBody>
+          <a:bodyPr wrap="square" lIns="0" tIns="0" rIns="0" bIns="0" rtlCol="0" anchor="ctr"/>
+          <a:lstStyle/>
+          <a:p>
+            <a:pPr algn="ctr" indent="0" marL="0">
+              <a:buNone/>
+            </a:pPr>
+            <a:r>
+              <a:rPr lang="en-US" sz="900" b="1" dirty="0">
+                <a:solidFill>
+                  <a:srgbClr val="9D174D"/>
                 </a:solidFill>
                 <a:latin typeface="Trebuchet MS" pitchFamily="34" charset="0"/>
                 <a:ea typeface="Trebuchet MS" pitchFamily="34" charset="-122"/>
                 <a:cs typeface="Trebuchet MS" pitchFamily="34" charset="-120"/>
               </a:rPr>
-              <a:t>Phonemes</a:t>
-            </a:r>
-            <a:endParaRPr lang="en-US" sz="1100" dirty="0"/>
-          </a:p>
-        </p:txBody>
-      </p:sp>
-      <p:sp>
-        <p:nvSpPr>
-          <p:cNvPr id="35" name="Shape 33"/>
-          <p:cNvSpPr/>
-          <p:nvPr/>
-        </p:nvSpPr>
-        <p:spPr>
-          <a:xfrm>
-            <a:off x="1874520" y="4096512"/>
-            <a:ext cx="6903720" cy="658368"/>
-          </a:xfrm>
-          <a:prstGeom prst="rect">
-            <a:avLst>
-              <a:gd name="adj" fmla="val 8333"/>
-            </a:avLst>
-          </a:prstGeom>
-          <a:solidFill>
-            <a:srgbClr val="FCE7F3"/>
-          </a:solidFill>
-          <a:ln w="12700">
-            <a:solidFill>
-              <a:srgbClr val="DB2777"/>
-            </a:solidFill>
-            <a:prstDash val="solid"/>
-          </a:ln>
-        </p:spPr>
-      </p:sp>
-      <p:sp>
-        <p:nvSpPr>
-          <p:cNvPr id="36" name="Shape 34"/>
-          <p:cNvSpPr/>
-          <p:nvPr/>
-        </p:nvSpPr>
-        <p:spPr>
-          <a:xfrm>
-            <a:off x="2124837" y="4169664"/>
+              <a:t>a</a:t>
+            </a:r>
+            <a:endParaRPr lang="en-US" sz="900" dirty="0"/>
+          </a:p>
+        </p:txBody>
+      </p:sp>
+      <p:sp>
+        <p:nvSpPr>
+          <p:cNvPr id="37" name="Shape 35"/>
+          <p:cNvSpPr/>
+          <p:nvPr/>
+        </p:nvSpPr>
+        <p:spPr>
+          <a:xfrm>
+            <a:off x="4331643" y="4169664"/>
             <a:ext cx="685800" cy="475488"/>
           </a:xfrm>
           <a:prstGeom prst="rect">
@@ -14876,13 +15476,13 @@
       </p:sp>
       <p:sp>
         <p:nvSpPr>
-          <p:cNvPr id="37" name="Text 35"/>
-          <p:cNvSpPr/>
-          <p:nvPr/>
-        </p:nvSpPr>
-        <p:spPr>
-          <a:xfrm>
-            <a:off x="2124837" y="4169664"/>
+          <p:cNvPr id="38" name="Text 36"/>
+          <p:cNvSpPr/>
+          <p:nvPr/>
+        </p:nvSpPr>
+        <p:spPr>
+          <a:xfrm>
+            <a:off x="4331643" y="4169664"/>
             <a:ext cx="685800" cy="475488"/>
           </a:xfrm>
           <a:prstGeom prst="rect">
@@ -14907,7 +15507,7 @@
                 <a:ea typeface="Trebuchet MS" pitchFamily="34" charset="-122"/>
                 <a:cs typeface="Trebuchet MS" pitchFamily="34" charset="-120"/>
               </a:rPr>
-              <a:t>s</a:t>
+              <a:t>r</a:t>
             </a:r>
             <a:endParaRPr lang="en-US" sz="900" dirty="0"/>
           </a:p>
@@ -14915,13 +15515,13 @@
       </p:sp>
       <p:sp>
         <p:nvSpPr>
-          <p:cNvPr id="38" name="Shape 36"/>
-          <p:cNvSpPr/>
-          <p:nvPr/>
-        </p:nvSpPr>
-        <p:spPr>
-          <a:xfrm>
-            <a:off x="3033522" y="4169664"/>
+          <p:cNvPr id="39" name="Shape 37"/>
+          <p:cNvSpPr/>
+          <p:nvPr/>
+        </p:nvSpPr>
+        <p:spPr>
+          <a:xfrm>
+            <a:off x="5370141" y="4169664"/>
             <a:ext cx="685800" cy="475488"/>
           </a:xfrm>
           <a:prstGeom prst="rect">
@@ -14942,13 +15542,13 @@
       </p:sp>
       <p:sp>
         <p:nvSpPr>
-          <p:cNvPr id="39" name="Text 37"/>
-          <p:cNvSpPr/>
-          <p:nvPr/>
-        </p:nvSpPr>
-        <p:spPr>
-          <a:xfrm>
-            <a:off x="3033522" y="4169664"/>
+          <p:cNvPr id="40" name="Text 38"/>
+          <p:cNvSpPr/>
+          <p:nvPr/>
+        </p:nvSpPr>
+        <p:spPr>
+          <a:xfrm>
+            <a:off x="5370141" y="4169664"/>
             <a:ext cx="685800" cy="475488"/>
           </a:xfrm>
           <a:prstGeom prst="rect">
@@ -14973,7 +15573,7 @@
                 <a:ea typeface="Trebuchet MS" pitchFamily="34" charset="-122"/>
                 <a:cs typeface="Trebuchet MS" pitchFamily="34" charset="-120"/>
               </a:rPr>
-              <a:t>u</a:t>
+              <a:t>i_e</a:t>
             </a:r>
             <a:endParaRPr lang="en-US" sz="900" dirty="0"/>
           </a:p>
@@ -14981,13 +15581,13 @@
       </p:sp>
       <p:sp>
         <p:nvSpPr>
-          <p:cNvPr id="40" name="Shape 38"/>
-          <p:cNvSpPr/>
-          <p:nvPr/>
-        </p:nvSpPr>
-        <p:spPr>
-          <a:xfrm>
-            <a:off x="3942207" y="4169664"/>
+          <p:cNvPr id="41" name="Shape 39"/>
+          <p:cNvSpPr/>
+          <p:nvPr/>
+        </p:nvSpPr>
+        <p:spPr>
+          <a:xfrm>
+            <a:off x="6408638" y="4169664"/>
             <a:ext cx="685800" cy="475488"/>
           </a:xfrm>
           <a:prstGeom prst="rect">
@@ -15008,13 +15608,13 @@
       </p:sp>
       <p:sp>
         <p:nvSpPr>
-          <p:cNvPr id="41" name="Text 39"/>
-          <p:cNvSpPr/>
-          <p:nvPr/>
-        </p:nvSpPr>
-        <p:spPr>
-          <a:xfrm>
-            <a:off x="3942207" y="4169664"/>
+          <p:cNvPr id="42" name="Text 40"/>
+          <p:cNvSpPr/>
+          <p:nvPr/>
+        </p:nvSpPr>
+        <p:spPr>
+          <a:xfrm>
+            <a:off x="6408638" y="4169664"/>
             <a:ext cx="685800" cy="475488"/>
           </a:xfrm>
           <a:prstGeom prst="rect">
@@ -15039,7 +15639,7 @@
                 <a:ea typeface="Trebuchet MS" pitchFamily="34" charset="-122"/>
                 <a:cs typeface="Trebuchet MS" pitchFamily="34" charset="-120"/>
               </a:rPr>
-              <a:t>b</a:t>
+              <a:t>n</a:t>
             </a:r>
             <a:endParaRPr lang="en-US" sz="900" dirty="0"/>
           </a:p>
@@ -15047,13 +15647,13 @@
       </p:sp>
       <p:sp>
         <p:nvSpPr>
-          <p:cNvPr id="42" name="Shape 40"/>
-          <p:cNvSpPr/>
-          <p:nvPr/>
-        </p:nvSpPr>
-        <p:spPr>
-          <a:xfrm>
-            <a:off x="4850892" y="4169664"/>
+          <p:cNvPr id="43" name="Shape 41"/>
+          <p:cNvSpPr/>
+          <p:nvPr/>
+        </p:nvSpPr>
+        <p:spPr>
+          <a:xfrm>
+            <a:off x="7447135" y="4169664"/>
             <a:ext cx="685800" cy="475488"/>
           </a:xfrm>
           <a:prstGeom prst="rect">
@@ -15074,13 +15674,13 @@
       </p:sp>
       <p:sp>
         <p:nvSpPr>
-          <p:cNvPr id="43" name="Text 41"/>
-          <p:cNvSpPr/>
-          <p:nvPr/>
-        </p:nvSpPr>
-        <p:spPr>
-          <a:xfrm>
-            <a:off x="4850892" y="4169664"/>
+          <p:cNvPr id="44" name="Text 42"/>
+          <p:cNvSpPr/>
+          <p:nvPr/>
+        </p:nvSpPr>
+        <p:spPr>
+          <a:xfrm>
+            <a:off x="7447135" y="4169664"/>
             <a:ext cx="685800" cy="475488"/>
           </a:xfrm>
           <a:prstGeom prst="rect">
@@ -15105,205 +15705,7 @@
                 <a:ea typeface="Trebuchet MS" pitchFamily="34" charset="-122"/>
                 <a:cs typeface="Trebuchet MS" pitchFamily="34" charset="-120"/>
               </a:rPr>
-              <a:t>m</a:t>
-            </a:r>
-            <a:endParaRPr lang="en-US" sz="900" dirty="0"/>
-          </a:p>
-        </p:txBody>
-      </p:sp>
-      <p:sp>
-        <p:nvSpPr>
-          <p:cNvPr id="44" name="Shape 42"/>
-          <p:cNvSpPr/>
-          <p:nvPr/>
-        </p:nvSpPr>
-        <p:spPr>
-          <a:xfrm>
-            <a:off x="5759577" y="4169664"/>
-            <a:ext cx="685800" cy="475488"/>
-          </a:xfrm>
-          <a:prstGeom prst="rect">
-            <a:avLst>
-              <a:gd name="adj" fmla="val 7692"/>
-            </a:avLst>
-          </a:prstGeom>
-          <a:solidFill>
-            <a:srgbClr val="FFFFFF"/>
-          </a:solidFill>
-          <a:ln w="12700">
-            <a:solidFill>
-              <a:srgbClr val="DB2777"/>
-            </a:solidFill>
-            <a:prstDash val="solid"/>
-          </a:ln>
-        </p:spPr>
-      </p:sp>
-      <p:sp>
-        <p:nvSpPr>
-          <p:cNvPr id="45" name="Text 43"/>
-          <p:cNvSpPr/>
-          <p:nvPr/>
-        </p:nvSpPr>
-        <p:spPr>
-          <a:xfrm>
-            <a:off x="5759577" y="4169664"/>
-            <a:ext cx="685800" cy="475488"/>
-          </a:xfrm>
-          <a:prstGeom prst="rect">
-            <a:avLst/>
-          </a:prstGeom>
-          <a:noFill/>
-          <a:ln/>
-        </p:spPr>
-        <p:txBody>
-          <a:bodyPr wrap="square" lIns="0" tIns="0" rIns="0" bIns="0" rtlCol="0" anchor="ctr"/>
-          <a:lstStyle/>
-          <a:p>
-            <a:pPr algn="ctr" indent="0" marL="0">
-              <a:buNone/>
-            </a:pPr>
-            <a:r>
-              <a:rPr lang="en-US" sz="900" b="1" dirty="0">
-                <a:solidFill>
-                  <a:srgbClr val="9D174D"/>
-                </a:solidFill>
-                <a:latin typeface="Trebuchet MS" pitchFamily="34" charset="0"/>
-                <a:ea typeface="Trebuchet MS" pitchFamily="34" charset="-122"/>
-                <a:cs typeface="Trebuchet MS" pitchFamily="34" charset="-120"/>
-              </a:rPr>
-              <a:t>a</a:t>
-            </a:r>
-            <a:endParaRPr lang="en-US" sz="900" dirty="0"/>
-          </a:p>
-        </p:txBody>
-      </p:sp>
-      <p:sp>
-        <p:nvSpPr>
-          <p:cNvPr id="46" name="Shape 44"/>
-          <p:cNvSpPr/>
-          <p:nvPr/>
-        </p:nvSpPr>
-        <p:spPr>
-          <a:xfrm>
-            <a:off x="6668262" y="4169664"/>
-            <a:ext cx="685800" cy="475488"/>
-          </a:xfrm>
-          <a:prstGeom prst="rect">
-            <a:avLst>
-              <a:gd name="adj" fmla="val 7692"/>
-            </a:avLst>
-          </a:prstGeom>
-          <a:solidFill>
-            <a:srgbClr val="FFFFFF"/>
-          </a:solidFill>
-          <a:ln w="12700">
-            <a:solidFill>
-              <a:srgbClr val="DB2777"/>
-            </a:solidFill>
-            <a:prstDash val="solid"/>
-          </a:ln>
-        </p:spPr>
-      </p:sp>
-      <p:sp>
-        <p:nvSpPr>
-          <p:cNvPr id="47" name="Text 45"/>
-          <p:cNvSpPr/>
-          <p:nvPr/>
-        </p:nvSpPr>
-        <p:spPr>
-          <a:xfrm>
-            <a:off x="6668262" y="4169664"/>
-            <a:ext cx="685800" cy="475488"/>
-          </a:xfrm>
-          <a:prstGeom prst="rect">
-            <a:avLst/>
-          </a:prstGeom>
-          <a:noFill/>
-          <a:ln/>
-        </p:spPr>
-        <p:txBody>
-          <a:bodyPr wrap="square" lIns="0" tIns="0" rIns="0" bIns="0" rtlCol="0" anchor="ctr"/>
-          <a:lstStyle/>
-          <a:p>
-            <a:pPr algn="ctr" indent="0" marL="0">
-              <a:buNone/>
-            </a:pPr>
-            <a:r>
-              <a:rPr lang="en-US" sz="900" b="1" dirty="0">
-                <a:solidFill>
-                  <a:srgbClr val="9D174D"/>
-                </a:solidFill>
-                <a:latin typeface="Trebuchet MS" pitchFamily="34" charset="0"/>
-                <a:ea typeface="Trebuchet MS" pitchFamily="34" charset="-122"/>
-                <a:cs typeface="Trebuchet MS" pitchFamily="34" charset="-120"/>
-              </a:rPr>
-              <a:t>r</a:t>
-            </a:r>
-            <a:endParaRPr lang="en-US" sz="900" dirty="0"/>
-          </a:p>
-        </p:txBody>
-      </p:sp>
-      <p:sp>
-        <p:nvSpPr>
-          <p:cNvPr id="48" name="Shape 46"/>
-          <p:cNvSpPr/>
-          <p:nvPr/>
-        </p:nvSpPr>
-        <p:spPr>
-          <a:xfrm>
-            <a:off x="7576947" y="4169664"/>
-            <a:ext cx="685800" cy="475488"/>
-          </a:xfrm>
-          <a:prstGeom prst="rect">
-            <a:avLst>
-              <a:gd name="adj" fmla="val 7692"/>
-            </a:avLst>
-          </a:prstGeom>
-          <a:solidFill>
-            <a:srgbClr val="FFFFFF"/>
-          </a:solidFill>
-          <a:ln w="12700">
-            <a:solidFill>
-              <a:srgbClr val="DB2777"/>
-            </a:solidFill>
-            <a:prstDash val="solid"/>
-          </a:ln>
-        </p:spPr>
-      </p:sp>
-      <p:sp>
-        <p:nvSpPr>
-          <p:cNvPr id="49" name="Text 47"/>
-          <p:cNvSpPr/>
-          <p:nvPr/>
-        </p:nvSpPr>
-        <p:spPr>
-          <a:xfrm>
-            <a:off x="7576947" y="4169664"/>
-            <a:ext cx="685800" cy="475488"/>
-          </a:xfrm>
-          <a:prstGeom prst="rect">
-            <a:avLst/>
-          </a:prstGeom>
-          <a:noFill/>
-          <a:ln/>
-        </p:spPr>
-        <p:txBody>
-          <a:bodyPr wrap="square" lIns="0" tIns="0" rIns="0" bIns="0" rtlCol="0" anchor="ctr"/>
-          <a:lstStyle/>
-          <a:p>
-            <a:pPr algn="ctr" indent="0" marL="0">
-              <a:buNone/>
-            </a:pPr>
-            <a:r>
-              <a:rPr lang="en-US" sz="900" b="1" dirty="0">
-                <a:solidFill>
-                  <a:srgbClr val="9D174D"/>
-                </a:solidFill>
-                <a:latin typeface="Trebuchet MS" pitchFamily="34" charset="0"/>
-                <a:ea typeface="Trebuchet MS" pitchFamily="34" charset="-122"/>
-                <a:cs typeface="Trebuchet MS" pitchFamily="34" charset="-120"/>
-              </a:rPr>
-              <a:t>ine</a:t>
+              <a:t>s</a:t>
             </a:r>
             <a:endParaRPr lang="en-US" sz="900" dirty="0"/>
           </a:p>
@@ -15877,7 +16279,7 @@
                 <a:ea typeface="Calibri" pitchFamily="34" charset="-122"/>
                 <a:cs typeface="Calibri" pitchFamily="34" charset="-120"/>
               </a:rPr>
-              <a:t>Word Labs  •  wordlabs.app  •  Root: 'marine' = of the sea or ocean</a:t>
+              <a:t>Word Labs  •  wordlabs.app  •  Root: 'marine' = relating to the sea</a:t>
             </a:r>
             <a:endParaRPr lang="en-US" sz="800" dirty="0"/>
           </a:p>
@@ -16211,7 +16613,7 @@
                 <a:ea typeface="Trebuchet MS" pitchFamily="34" charset="-122"/>
                 <a:cs typeface="Trebuchet MS" pitchFamily="34" charset="-120"/>
               </a:rPr>
-              <a:t>1</a:t>
+              <a:t>0</a:t>
             </a:r>
             <a:pPr algn="ctr" indent="0" marL="0">
               <a:buNone/>
@@ -16517,7 +16919,7 @@
                 <a:ea typeface="Calibri" pitchFamily="34" charset="-122"/>
                 <a:cs typeface="Calibri" pitchFamily="34" charset="-120"/>
               </a:rPr>
-              <a:t>Word Labs  •  wordlabs.app  •  Root: 'marine' = of the sea or ocean</a:t>
+              <a:t>Word Labs  •  wordlabs.app  •  Root: 'marine' = relating to the sea</a:t>
             </a:r>
             <a:endParaRPr lang="en-US" sz="800" dirty="0"/>
           </a:p>
@@ -16646,7 +17048,7 @@
                 <a:ea typeface="Calibri" pitchFamily="34" charset="-122"/>
                 <a:cs typeface="Calibri" pitchFamily="34" charset="-120"/>
               </a:rPr>
-              <a:t>mariner</a:t>
+              <a:t>mariners</a:t>
             </a:r>
             <a:pPr algn="l" indent="0" marL="0">
               <a:buNone/>
@@ -16660,7 +17062,7 @@
                 <a:ea typeface="Calibri" pitchFamily="34" charset="-122"/>
                 <a:cs typeface="Calibri" pitchFamily="34" charset="-120"/>
               </a:rPr>
-              <a:t> guided the </a:t>
+              <a:t> guided the ship safely through the storm. The </a:t>
             </a:r>
             <a:pPr algn="l" indent="0" marL="0">
               <a:buNone/>
@@ -16677,7 +17079,7 @@
                 <a:ea typeface="Calibri" pitchFamily="34" charset="-122"/>
                 <a:cs typeface="Calibri" pitchFamily="34" charset="-120"/>
               </a:rPr>
-              <a:t>aquamarine</a:t>
+              <a:t>submarine</a:t>
             </a:r>
             <a:pPr algn="l" indent="0" marL="0">
               <a:buNone/>
@@ -16691,7 +17093,7 @@
                 <a:ea typeface="Calibri" pitchFamily="34" charset="-122"/>
                 <a:cs typeface="Calibri" pitchFamily="34" charset="-120"/>
               </a:rPr>
-              <a:t> waters carefully, knowing that </a:t>
+              <a:t> dived deep beneath the waves to avoid detection. The artist mixed </a:t>
             </a:r>
             <a:pPr algn="l" indent="0" marL="0">
               <a:buNone/>
@@ -16722,7 +17124,7 @@
                 <a:ea typeface="Calibri" pitchFamily="34" charset="-122"/>
                 <a:cs typeface="Calibri" pitchFamily="34" charset="-120"/>
               </a:rPr>
-              <a:t> depths lay just beyond the reef.</a:t>
+              <a:t> paint for the sky.</a:t>
             </a:r>
             <a:endParaRPr lang="en-US" sz="1800" dirty="0"/>
           </a:p>
@@ -16877,7 +17279,7 @@
                 <a:ea typeface="Trebuchet MS" pitchFamily="34" charset="-122"/>
                 <a:cs typeface="Trebuchet MS" pitchFamily="34" charset="-120"/>
               </a:rPr>
-              <a:t>mariner</a:t>
+              <a:t>mariners</a:t>
             </a:r>
             <a:endParaRPr lang="en-US" sz="1400" dirty="0"/>
           </a:p>
@@ -17005,7 +17407,7 @@
                 <a:ea typeface="Trebuchet MS" pitchFamily="34" charset="-122"/>
                 <a:cs typeface="Trebuchet MS" pitchFamily="34" charset="-120"/>
               </a:rPr>
-              <a:t>aquamarine</a:t>
+              <a:t>submarine</a:t>
             </a:r>
             <a:endParaRPr lang="en-US" sz="1400" dirty="0"/>
           </a:p>
@@ -17464,7 +17866,7 @@
                 <a:ea typeface="Calibri" pitchFamily="34" charset="-122"/>
                 <a:cs typeface="Calibri" pitchFamily="34" charset="-120"/>
               </a:rPr>
-              <a:t>Word Labs  •  wordlabs.app  •  Root: 'marine' = of the sea or ocean</a:t>
+              <a:t>Word Labs  •  wordlabs.app  •  Root: 'marine' = relating to the sea</a:t>
             </a:r>
             <a:endParaRPr lang="en-US" sz="800" dirty="0"/>
           </a:p>
@@ -17603,7 +18005,7 @@
                 <a:ea typeface="Trebuchet MS" pitchFamily="34" charset="-122"/>
                 <a:cs typeface="Trebuchet MS" pitchFamily="34" charset="-120"/>
               </a:rPr>
-              <a:t>mariner</a:t>
+              <a:t>mariners</a:t>
             </a:r>
             <a:endParaRPr lang="en-US" sz="2800" dirty="0"/>
           </a:p>
@@ -18291,7 +18693,7 @@
                 <a:ea typeface="Calibri" pitchFamily="34" charset="-122"/>
                 <a:cs typeface="Calibri" pitchFamily="34" charset="-120"/>
               </a:rPr>
-              <a:t>Word Labs  •  wordlabs.app  •  Root: 'marine' = of the sea or ocean</a:t>
+              <a:t>Word Labs  •  wordlabs.app  •  Root: 'marine' = relating to the sea</a:t>
             </a:r>
             <a:endParaRPr lang="en-US" sz="800" dirty="0"/>
           </a:p>
@@ -18430,7 +18832,7 @@
                 <a:ea typeface="Trebuchet MS" pitchFamily="34" charset="-122"/>
                 <a:cs typeface="Trebuchet MS" pitchFamily="34" charset="-120"/>
               </a:rPr>
-              <a:t>mariner</a:t>
+              <a:t>mariners</a:t>
             </a:r>
             <a:endParaRPr lang="en-US" sz="2800" dirty="0"/>
           </a:p>
@@ -18608,7 +19010,7 @@
                 <a:ea typeface="Calibri" pitchFamily="34" charset="-122"/>
                 <a:cs typeface="Calibri" pitchFamily="34" charset="-120"/>
               </a:rPr>
-              <a:t>of the sea</a:t>
+              <a:t>relating to the sea</a:t>
             </a:r>
             <a:endParaRPr lang="en-US" sz="850" dirty="0"/>
           </a:p>
@@ -18681,7 +19083,7 @@
                 <a:ea typeface="Trebuchet MS" pitchFamily="34" charset="-122"/>
                 <a:cs typeface="Trebuchet MS" pitchFamily="34" charset="-120"/>
               </a:rPr>
-              <a:t>r</a:t>
+              <a:t>er</a:t>
             </a:r>
             <a:endParaRPr lang="en-US" sz="1300" dirty="0"/>
           </a:p>
@@ -18720,7 +19122,7 @@
                 <a:ea typeface="Calibri" pitchFamily="34" charset="-122"/>
                 <a:cs typeface="Calibri" pitchFamily="34" charset="-120"/>
               </a:rPr>
-              <a:t>one who does</a:t>
+              <a:t>person who; more</a:t>
             </a:r>
             <a:endParaRPr lang="en-US" sz="850" dirty="0"/>
           </a:p>
@@ -18793,7 +19195,7 @@
                 <a:ea typeface="Trebuchet MS" pitchFamily="34" charset="-122"/>
                 <a:cs typeface="Trebuchet MS" pitchFamily="34" charset="-120"/>
               </a:rPr>
-              <a:t>er</a:t>
+              <a:t>s</a:t>
             </a:r>
             <a:endParaRPr lang="en-US" sz="1300" dirty="0"/>
           </a:p>
@@ -18832,7 +19234,7 @@
                 <a:ea typeface="Calibri" pitchFamily="34" charset="-122"/>
                 <a:cs typeface="Calibri" pitchFamily="34" charset="-120"/>
               </a:rPr>
-              <a:t>person who does something</a:t>
+              <a:t>plural or present tense</a:t>
             </a:r>
             <a:endParaRPr lang="en-US" sz="850" dirty="0"/>
           </a:p>
@@ -19388,7 +19790,7 @@
                 <a:ea typeface="Calibri" pitchFamily="34" charset="-122"/>
                 <a:cs typeface="Calibri" pitchFamily="34" charset="-120"/>
               </a:rPr>
-              <a:t>Word Labs  •  wordlabs.app  •  Root: 'marine' = of the sea or ocean</a:t>
+              <a:t>Word Labs  •  wordlabs.app  •  Root: 'marine' = relating to the sea</a:t>
             </a:r>
             <a:endParaRPr lang="en-US" sz="800" dirty="0"/>
           </a:p>
@@ -19527,7 +19929,7 @@
                 <a:ea typeface="Trebuchet MS" pitchFamily="34" charset="-122"/>
                 <a:cs typeface="Trebuchet MS" pitchFamily="34" charset="-120"/>
               </a:rPr>
-              <a:t>mariner</a:t>
+              <a:t>mariners</a:t>
             </a:r>
             <a:endParaRPr lang="en-US" sz="2800" dirty="0"/>
           </a:p>
@@ -19705,7 +20107,7 @@
                 <a:ea typeface="Calibri" pitchFamily="34" charset="-122"/>
                 <a:cs typeface="Calibri" pitchFamily="34" charset="-120"/>
               </a:rPr>
-              <a:t>of the sea</a:t>
+              <a:t>relating to the sea</a:t>
             </a:r>
             <a:endParaRPr lang="en-US" sz="850" dirty="0"/>
           </a:p>
@@ -19778,7 +20180,7 @@
                 <a:ea typeface="Trebuchet MS" pitchFamily="34" charset="-122"/>
                 <a:cs typeface="Trebuchet MS" pitchFamily="34" charset="-120"/>
               </a:rPr>
-              <a:t>r</a:t>
+              <a:t>er</a:t>
             </a:r>
             <a:endParaRPr lang="en-US" sz="1300" dirty="0"/>
           </a:p>
@@ -19817,7 +20219,7 @@
                 <a:ea typeface="Calibri" pitchFamily="34" charset="-122"/>
                 <a:cs typeface="Calibri" pitchFamily="34" charset="-120"/>
               </a:rPr>
-              <a:t>one who does</a:t>
+              <a:t>person who; more</a:t>
             </a:r>
             <a:endParaRPr lang="en-US" sz="850" dirty="0"/>
           </a:p>
@@ -19890,7 +20292,7 @@
                 <a:ea typeface="Trebuchet MS" pitchFamily="34" charset="-122"/>
                 <a:cs typeface="Trebuchet MS" pitchFamily="34" charset="-120"/>
               </a:rPr>
-              <a:t>er</a:t>
+              <a:t>s</a:t>
             </a:r>
             <a:endParaRPr lang="en-US" sz="1300" dirty="0"/>
           </a:p>
@@ -19929,7 +20331,7 @@
                 <a:ea typeface="Calibri" pitchFamily="34" charset="-122"/>
                 <a:cs typeface="Calibri" pitchFamily="34" charset="-120"/>
               </a:rPr>
-              <a:t>person who does something</a:t>
+              <a:t>plural or present tense</a:t>
             </a:r>
             <a:endParaRPr lang="en-US" sz="850" dirty="0"/>
           </a:p>
@@ -20298,7 +20700,7 @@
                 <a:ea typeface="Trebuchet MS" pitchFamily="34" charset="-122"/>
                 <a:cs typeface="Trebuchet MS" pitchFamily="34" charset="-120"/>
               </a:rPr>
-              <a:t>ner</a:t>
+              <a:t>ners</a:t>
             </a:r>
             <a:endParaRPr lang="en-US" sz="1400" dirty="0"/>
           </a:p>
@@ -20722,7 +21124,7 @@
                 <a:ea typeface="Calibri" pitchFamily="34" charset="-122"/>
                 <a:cs typeface="Calibri" pitchFamily="34" charset="-120"/>
               </a:rPr>
-              <a:t>Word Labs  •  wordlabs.app  •  Root: 'marine' = of the sea or ocean</a:t>
+              <a:t>Word Labs  •  wordlabs.app  •  Root: 'marine' = relating to the sea</a:t>
             </a:r>
             <a:endParaRPr lang="en-US" sz="800" dirty="0"/>
           </a:p>
@@ -20861,7 +21263,7 @@
                 <a:ea typeface="Trebuchet MS" pitchFamily="34" charset="-122"/>
                 <a:cs typeface="Trebuchet MS" pitchFamily="34" charset="-120"/>
               </a:rPr>
-              <a:t>mariner</a:t>
+              <a:t>mariners</a:t>
             </a:r>
             <a:endParaRPr lang="en-US" sz="2800" dirty="0"/>
           </a:p>
@@ -21039,7 +21441,7 @@
                 <a:ea typeface="Calibri" pitchFamily="34" charset="-122"/>
                 <a:cs typeface="Calibri" pitchFamily="34" charset="-120"/>
               </a:rPr>
-              <a:t>of the sea</a:t>
+              <a:t>relating to the sea</a:t>
             </a:r>
             <a:endParaRPr lang="en-US" sz="850" dirty="0"/>
           </a:p>
@@ -21112,7 +21514,7 @@
                 <a:ea typeface="Trebuchet MS" pitchFamily="34" charset="-122"/>
                 <a:cs typeface="Trebuchet MS" pitchFamily="34" charset="-120"/>
               </a:rPr>
-              <a:t>r</a:t>
+              <a:t>er</a:t>
             </a:r>
             <a:endParaRPr lang="en-US" sz="1300" dirty="0"/>
           </a:p>
@@ -21151,7 +21553,7 @@
                 <a:ea typeface="Calibri" pitchFamily="34" charset="-122"/>
                 <a:cs typeface="Calibri" pitchFamily="34" charset="-120"/>
               </a:rPr>
-              <a:t>one who does</a:t>
+              <a:t>person who; more</a:t>
             </a:r>
             <a:endParaRPr lang="en-US" sz="850" dirty="0"/>
           </a:p>
@@ -21224,7 +21626,7 @@
                 <a:ea typeface="Trebuchet MS" pitchFamily="34" charset="-122"/>
                 <a:cs typeface="Trebuchet MS" pitchFamily="34" charset="-120"/>
               </a:rPr>
-              <a:t>er</a:t>
+              <a:t>s</a:t>
             </a:r>
             <a:endParaRPr lang="en-US" sz="1300" dirty="0"/>
           </a:p>
@@ -21263,7 +21665,7 @@
                 <a:ea typeface="Calibri" pitchFamily="34" charset="-122"/>
                 <a:cs typeface="Calibri" pitchFamily="34" charset="-120"/>
               </a:rPr>
-              <a:t>person who does something</a:t>
+              <a:t>plural or present tense</a:t>
             </a:r>
             <a:endParaRPr lang="en-US" sz="850" dirty="0"/>
           </a:p>
@@ -21632,7 +22034,7 @@
                 <a:ea typeface="Trebuchet MS" pitchFamily="34" charset="-122"/>
                 <a:cs typeface="Trebuchet MS" pitchFamily="34" charset="-120"/>
               </a:rPr>
-              <a:t>ner</a:t>
+              <a:t>ners</a:t>
             </a:r>
             <a:endParaRPr lang="en-US" sz="1400" dirty="0"/>
           </a:p>
@@ -21739,7 +22141,7 @@
         </p:nvSpPr>
         <p:spPr>
           <a:xfrm>
-            <a:off x="2427732" y="4169664"/>
+            <a:off x="2124837" y="4169664"/>
             <a:ext cx="685800" cy="475488"/>
           </a:xfrm>
           <a:prstGeom prst="rect">
@@ -21766,7 +22168,7 @@
         </p:nvSpPr>
         <p:spPr>
           <a:xfrm>
-            <a:off x="2427732" y="4169664"/>
+            <a:off x="2124837" y="4169664"/>
             <a:ext cx="685800" cy="475488"/>
           </a:xfrm>
           <a:prstGeom prst="rect">
@@ -21805,7 +22207,7 @@
         </p:nvSpPr>
         <p:spPr>
           <a:xfrm>
-            <a:off x="3639312" y="4169664"/>
+            <a:off x="3033522" y="4169664"/>
             <a:ext cx="685800" cy="475488"/>
           </a:xfrm>
           <a:prstGeom prst="rect">
@@ -21832,7 +22234,7 @@
         </p:nvSpPr>
         <p:spPr>
           <a:xfrm>
-            <a:off x="3639312" y="4169664"/>
+            <a:off x="3033522" y="4169664"/>
             <a:ext cx="685800" cy="475488"/>
           </a:xfrm>
           <a:prstGeom prst="rect">
@@ -21857,7 +22259,7 @@
                 <a:ea typeface="Trebuchet MS" pitchFamily="34" charset="-122"/>
                 <a:cs typeface="Trebuchet MS" pitchFamily="34" charset="-120"/>
               </a:rPr>
-              <a:t>ar</a:t>
+              <a:t>a</a:t>
             </a:r>
             <a:endParaRPr lang="en-US" sz="900" dirty="0"/>
           </a:p>
@@ -21871,7 +22273,7 @@
         </p:nvSpPr>
         <p:spPr>
           <a:xfrm>
-            <a:off x="4850892" y="4169664"/>
+            <a:off x="3942207" y="4169664"/>
             <a:ext cx="685800" cy="475488"/>
           </a:xfrm>
           <a:prstGeom prst="rect">
@@ -21898,7 +22300,7 @@
         </p:nvSpPr>
         <p:spPr>
           <a:xfrm>
-            <a:off x="4850892" y="4169664"/>
+            <a:off x="3942207" y="4169664"/>
             <a:ext cx="685800" cy="475488"/>
           </a:xfrm>
           <a:prstGeom prst="rect">
@@ -21923,7 +22325,7 @@
                 <a:ea typeface="Trebuchet MS" pitchFamily="34" charset="-122"/>
                 <a:cs typeface="Trebuchet MS" pitchFamily="34" charset="-120"/>
               </a:rPr>
-              <a:t>i</a:t>
+              <a:t>r</a:t>
             </a:r>
             <a:endParaRPr lang="en-US" sz="900" dirty="0"/>
           </a:p>
@@ -21937,7 +22339,7 @@
         </p:nvSpPr>
         <p:spPr>
           <a:xfrm>
-            <a:off x="6062472" y="4169664"/>
+            <a:off x="4850892" y="4169664"/>
             <a:ext cx="685800" cy="475488"/>
           </a:xfrm>
           <a:prstGeom prst="rect">
@@ -21964,7 +22366,7 @@
         </p:nvSpPr>
         <p:spPr>
           <a:xfrm>
-            <a:off x="6062472" y="4169664"/>
+            <a:off x="4850892" y="4169664"/>
             <a:ext cx="685800" cy="475488"/>
           </a:xfrm>
           <a:prstGeom prst="rect">
@@ -21989,7 +22391,7 @@
                 <a:ea typeface="Trebuchet MS" pitchFamily="34" charset="-122"/>
                 <a:cs typeface="Trebuchet MS" pitchFamily="34" charset="-120"/>
               </a:rPr>
-              <a:t>n</a:t>
+              <a:t>i</a:t>
             </a:r>
             <a:endParaRPr lang="en-US" sz="900" dirty="0"/>
           </a:p>
@@ -22003,7 +22405,7 @@
         </p:nvSpPr>
         <p:spPr>
           <a:xfrm>
-            <a:off x="7274052" y="4169664"/>
+            <a:off x="5759577" y="4169664"/>
             <a:ext cx="685800" cy="475488"/>
           </a:xfrm>
           <a:prstGeom prst="rect">
@@ -22030,7 +22432,7 @@
         </p:nvSpPr>
         <p:spPr>
           <a:xfrm>
-            <a:off x="7274052" y="4169664"/>
+            <a:off x="5759577" y="4169664"/>
             <a:ext cx="685800" cy="475488"/>
           </a:xfrm>
           <a:prstGeom prst="rect">
@@ -22055,7 +22457,139 @@
                 <a:ea typeface="Trebuchet MS" pitchFamily="34" charset="-122"/>
                 <a:cs typeface="Trebuchet MS" pitchFamily="34" charset="-120"/>
               </a:rPr>
+              <a:t>n</a:t>
+            </a:r>
+            <a:endParaRPr lang="en-US" sz="900" dirty="0"/>
+          </a:p>
+        </p:txBody>
+      </p:sp>
+      <p:sp>
+        <p:nvSpPr>
+          <p:cNvPr id="49" name="Shape 47"/>
+          <p:cNvSpPr/>
+          <p:nvPr/>
+        </p:nvSpPr>
+        <p:spPr>
+          <a:xfrm>
+            <a:off x="6668262" y="4169664"/>
+            <a:ext cx="685800" cy="475488"/>
+          </a:xfrm>
+          <a:prstGeom prst="rect">
+            <a:avLst>
+              <a:gd name="adj" fmla="val 7692"/>
+            </a:avLst>
+          </a:prstGeom>
+          <a:solidFill>
+            <a:srgbClr val="FFFFFF"/>
+          </a:solidFill>
+          <a:ln w="12700">
+            <a:solidFill>
+              <a:srgbClr val="DB2777"/>
+            </a:solidFill>
+            <a:prstDash val="solid"/>
+          </a:ln>
+        </p:spPr>
+      </p:sp>
+      <p:sp>
+        <p:nvSpPr>
+          <p:cNvPr id="50" name="Text 48"/>
+          <p:cNvSpPr/>
+          <p:nvPr/>
+        </p:nvSpPr>
+        <p:spPr>
+          <a:xfrm>
+            <a:off x="6668262" y="4169664"/>
+            <a:ext cx="685800" cy="475488"/>
+          </a:xfrm>
+          <a:prstGeom prst="rect">
+            <a:avLst/>
+          </a:prstGeom>
+          <a:noFill/>
+          <a:ln/>
+        </p:spPr>
+        <p:txBody>
+          <a:bodyPr wrap="square" lIns="0" tIns="0" rIns="0" bIns="0" rtlCol="0" anchor="ctr"/>
+          <a:lstStyle/>
+          <a:p>
+            <a:pPr algn="ctr" indent="0" marL="0">
+              <a:buNone/>
+            </a:pPr>
+            <a:r>
+              <a:rPr lang="en-US" sz="900" b="1" dirty="0">
+                <a:solidFill>
+                  <a:srgbClr val="9D174D"/>
+                </a:solidFill>
+                <a:latin typeface="Trebuchet MS" pitchFamily="34" charset="0"/>
+                <a:ea typeface="Trebuchet MS" pitchFamily="34" charset="-122"/>
+                <a:cs typeface="Trebuchet MS" pitchFamily="34" charset="-120"/>
+              </a:rPr>
               <a:t>er</a:t>
+            </a:r>
+            <a:endParaRPr lang="en-US" sz="900" dirty="0"/>
+          </a:p>
+        </p:txBody>
+      </p:sp>
+      <p:sp>
+        <p:nvSpPr>
+          <p:cNvPr id="51" name="Shape 49"/>
+          <p:cNvSpPr/>
+          <p:nvPr/>
+        </p:nvSpPr>
+        <p:spPr>
+          <a:xfrm>
+            <a:off x="7576947" y="4169664"/>
+            <a:ext cx="685800" cy="475488"/>
+          </a:xfrm>
+          <a:prstGeom prst="rect">
+            <a:avLst>
+              <a:gd name="adj" fmla="val 7692"/>
+            </a:avLst>
+          </a:prstGeom>
+          <a:solidFill>
+            <a:srgbClr val="FFFFFF"/>
+          </a:solidFill>
+          <a:ln w="12700">
+            <a:solidFill>
+              <a:srgbClr val="DB2777"/>
+            </a:solidFill>
+            <a:prstDash val="solid"/>
+          </a:ln>
+        </p:spPr>
+      </p:sp>
+      <p:sp>
+        <p:nvSpPr>
+          <p:cNvPr id="52" name="Text 50"/>
+          <p:cNvSpPr/>
+          <p:nvPr/>
+        </p:nvSpPr>
+        <p:spPr>
+          <a:xfrm>
+            <a:off x="7576947" y="4169664"/>
+            <a:ext cx="685800" cy="475488"/>
+          </a:xfrm>
+          <a:prstGeom prst="rect">
+            <a:avLst/>
+          </a:prstGeom>
+          <a:noFill/>
+          <a:ln/>
+        </p:spPr>
+        <p:txBody>
+          <a:bodyPr wrap="square" lIns="0" tIns="0" rIns="0" bIns="0" rtlCol="0" anchor="ctr"/>
+          <a:lstStyle/>
+          <a:p>
+            <a:pPr algn="ctr" indent="0" marL="0">
+              <a:buNone/>
+            </a:pPr>
+            <a:r>
+              <a:rPr lang="en-US" sz="900" b="1" dirty="0">
+                <a:solidFill>
+                  <a:srgbClr val="9D174D"/>
+                </a:solidFill>
+                <a:latin typeface="Trebuchet MS" pitchFamily="34" charset="0"/>
+                <a:ea typeface="Trebuchet MS" pitchFamily="34" charset="-122"/>
+                <a:cs typeface="Trebuchet MS" pitchFamily="34" charset="-120"/>
+              </a:rPr>
+              <a:t>s</a:t>
             </a:r>
             <a:endParaRPr lang="en-US" sz="900" dirty="0"/>
           </a:p>
@@ -22347,7 +22881,7 @@
                 <a:ea typeface="Calibri" pitchFamily="34" charset="-122"/>
                 <a:cs typeface="Calibri" pitchFamily="34" charset="-120"/>
               </a:rPr>
-              <a:t>Word Labs  •  wordlabs.app  •  Root: 'marine' = of the sea or ocean</a:t>
+              <a:t>Word Labs  •  wordlabs.app  •  Root: 'marine' = relating to the sea</a:t>
             </a:r>
             <a:endParaRPr lang="en-US" sz="800" dirty="0"/>
           </a:p>
@@ -22486,7 +23020,7 @@
                 <a:ea typeface="Trebuchet MS" pitchFamily="34" charset="-122"/>
                 <a:cs typeface="Trebuchet MS" pitchFamily="34" charset="-120"/>
               </a:rPr>
-              <a:t>aquamarine</a:t>
+              <a:t>submarine</a:t>
             </a:r>
             <a:endParaRPr lang="en-US" sz="2800" dirty="0"/>
           </a:p>
@@ -23174,7 +23708,7 @@
                 <a:ea typeface="Calibri" pitchFamily="34" charset="-122"/>
                 <a:cs typeface="Calibri" pitchFamily="34" charset="-120"/>
               </a:rPr>
-              <a:t>Word Labs  •  wordlabs.app  •  Root: 'marine' = of the sea or ocean</a:t>
+              <a:t>Word Labs  •  wordlabs.app  •  Root: 'marine' = relating to the sea</a:t>
             </a:r>
             <a:endParaRPr lang="en-US" sz="800" dirty="0"/>
           </a:p>
@@ -23313,7 +23847,7 @@
                 <a:ea typeface="Trebuchet MS" pitchFamily="34" charset="-122"/>
                 <a:cs typeface="Trebuchet MS" pitchFamily="34" charset="-120"/>
               </a:rPr>
-              <a:t>aquamarine</a:t>
+              <a:t>submarine</a:t>
             </a:r>
             <a:endParaRPr lang="en-US" sz="2800" dirty="0"/>
           </a:p>
@@ -23452,7 +23986,7 @@
                 <a:ea typeface="Trebuchet MS" pitchFamily="34" charset="-122"/>
                 <a:cs typeface="Trebuchet MS" pitchFamily="34" charset="-120"/>
               </a:rPr>
-              <a:t>aqua</a:t>
+              <a:t>sub</a:t>
             </a:r>
             <a:endParaRPr lang="en-US" sz="1300" dirty="0"/>
           </a:p>
@@ -23491,7 +24025,7 @@
                 <a:ea typeface="Calibri" pitchFamily="34" charset="-122"/>
                 <a:cs typeface="Calibri" pitchFamily="34" charset="-120"/>
               </a:rPr>
-              <a:t>water</a:t>
+              <a:t>under; below</a:t>
             </a:r>
             <a:endParaRPr lang="en-US" sz="850" dirty="0"/>
           </a:p>
@@ -23603,7 +24137,7 @@
                 <a:ea typeface="Calibri" pitchFamily="34" charset="-122"/>
                 <a:cs typeface="Calibri" pitchFamily="34" charset="-120"/>
               </a:rPr>
-              <a:t>of the sea</a:t>
+              <a:t>relating to the sea</a:t>
             </a:r>
             <a:endParaRPr lang="en-US" sz="850" dirty="0"/>
           </a:p>
@@ -24159,7 +24693,7 @@
                 <a:ea typeface="Calibri" pitchFamily="34" charset="-122"/>
                 <a:cs typeface="Calibri" pitchFamily="34" charset="-120"/>
               </a:rPr>
-              <a:t>Word Labs  •  wordlabs.app  •  Root: 'marine' = of the sea or ocean</a:t>
+              <a:t>Word Labs  •  wordlabs.app  •  Root: 'marine' = relating to the sea</a:t>
             </a:r>
             <a:endParaRPr lang="en-US" sz="800" dirty="0"/>
           </a:p>
@@ -24232,7 +24766,7 @@
                 <a:ea typeface="Trebuchet MS" pitchFamily="34" charset="-122"/>
                 <a:cs typeface="Trebuchet MS" pitchFamily="34" charset="-120"/>
               </a:rPr>
-              <a:t>We are learning that the root 'marine' means 'of the sea or ocean'.</a:t>
+              <a:t>We are learning that the root 'marine' means 'relating to the sea'.</a:t>
             </a:r>
             <a:endParaRPr lang="en-US" sz="2000" dirty="0"/>
           </a:p>
@@ -24878,7 +25412,7 @@
                 <a:ea typeface="Calibri" pitchFamily="34" charset="-122"/>
                 <a:cs typeface="Calibri" pitchFamily="34" charset="-120"/>
               </a:rPr>
-              <a:t>Word Labs  •  wordlabs.app  •  Root: 'marine' = of the sea or ocean</a:t>
+              <a:t>Word Labs  •  wordlabs.app  •  Root: 'marine' = relating to the sea</a:t>
             </a:r>
             <a:endParaRPr lang="en-US" sz="800" dirty="0"/>
           </a:p>
@@ -25017,7 +25551,7 @@
                 <a:ea typeface="Trebuchet MS" pitchFamily="34" charset="-122"/>
                 <a:cs typeface="Trebuchet MS" pitchFamily="34" charset="-120"/>
               </a:rPr>
-              <a:t>aquamarine</a:t>
+              <a:t>submarine</a:t>
             </a:r>
             <a:endParaRPr lang="en-US" sz="2800" dirty="0"/>
           </a:p>
@@ -25156,7 +25690,7 @@
                 <a:ea typeface="Trebuchet MS" pitchFamily="34" charset="-122"/>
                 <a:cs typeface="Trebuchet MS" pitchFamily="34" charset="-120"/>
               </a:rPr>
-              <a:t>aqua</a:t>
+              <a:t>sub</a:t>
             </a:r>
             <a:endParaRPr lang="en-US" sz="1300" dirty="0"/>
           </a:p>
@@ -25195,7 +25729,7 @@
                 <a:ea typeface="Calibri" pitchFamily="34" charset="-122"/>
                 <a:cs typeface="Calibri" pitchFamily="34" charset="-120"/>
               </a:rPr>
-              <a:t>water</a:t>
+              <a:t>under; below</a:t>
             </a:r>
             <a:endParaRPr lang="en-US" sz="850" dirty="0"/>
           </a:p>
@@ -25307,7 +25841,7 @@
                 <a:ea typeface="Calibri" pitchFamily="34" charset="-122"/>
                 <a:cs typeface="Calibri" pitchFamily="34" charset="-120"/>
               </a:rPr>
-              <a:t>of the sea</a:t>
+              <a:t>relating to the sea</a:t>
             </a:r>
             <a:endParaRPr lang="en-US" sz="850" dirty="0"/>
           </a:p>
@@ -25414,8 +25948,8 @@
         </p:nvSpPr>
         <p:spPr>
           <a:xfrm>
-            <a:off x="1975104" y="3364992"/>
-            <a:ext cx="1554480" cy="475488"/>
+            <a:off x="2313432" y="3364992"/>
+            <a:ext cx="1645920" cy="475488"/>
           </a:xfrm>
           <a:prstGeom prst="rect">
             <a:avLst>
@@ -25441,8 +25975,8 @@
         </p:nvSpPr>
         <p:spPr>
           <a:xfrm>
-            <a:off x="1975104" y="3364992"/>
-            <a:ext cx="1554480" cy="475488"/>
+            <a:off x="2313432" y="3364992"/>
+            <a:ext cx="1645920" cy="475488"/>
           </a:xfrm>
           <a:prstGeom prst="rect">
             <a:avLst/>
@@ -25466,7 +26000,7 @@
                 <a:ea typeface="Trebuchet MS" pitchFamily="34" charset="-122"/>
                 <a:cs typeface="Trebuchet MS" pitchFamily="34" charset="-120"/>
               </a:rPr>
-              <a:t>a</a:t>
+              <a:t>sub</a:t>
             </a:r>
             <a:endParaRPr lang="en-US" sz="1400" dirty="0"/>
           </a:p>
@@ -25480,8 +26014,8 @@
         </p:nvSpPr>
         <p:spPr>
           <a:xfrm>
-            <a:off x="3529584" y="3364992"/>
-            <a:ext cx="73152" cy="475488"/>
+            <a:off x="3959352" y="3364992"/>
+            <a:ext cx="411480" cy="475488"/>
           </a:xfrm>
           <a:prstGeom prst="rect">
             <a:avLst/>
@@ -25519,8 +26053,8 @@
         </p:nvSpPr>
         <p:spPr>
           <a:xfrm>
-            <a:off x="3602736" y="3364992"/>
-            <a:ext cx="1554480" cy="475488"/>
+            <a:off x="4370832" y="3364992"/>
+            <a:ext cx="1645920" cy="475488"/>
           </a:xfrm>
           <a:prstGeom prst="rect">
             <a:avLst>
@@ -25546,8 +26080,8 @@
         </p:nvSpPr>
         <p:spPr>
           <a:xfrm>
-            <a:off x="3602736" y="3364992"/>
-            <a:ext cx="1554480" cy="475488"/>
+            <a:off x="4370832" y="3364992"/>
+            <a:ext cx="1645920" cy="475488"/>
           </a:xfrm>
           <a:prstGeom prst="rect">
             <a:avLst/>
@@ -25571,7 +26105,7 @@
                 <a:ea typeface="Trebuchet MS" pitchFamily="34" charset="-122"/>
                 <a:cs typeface="Trebuchet MS" pitchFamily="34" charset="-120"/>
               </a:rPr>
-              <a:t>qua</a:t>
+              <a:t>ma</a:t>
             </a:r>
             <a:endParaRPr lang="en-US" sz="1400" dirty="0"/>
           </a:p>
@@ -25585,8 +26119,8 @@
         </p:nvSpPr>
         <p:spPr>
           <a:xfrm>
-            <a:off x="5157216" y="3364992"/>
-            <a:ext cx="73152" cy="475488"/>
+            <a:off x="6016752" y="3364992"/>
+            <a:ext cx="411480" cy="475488"/>
           </a:xfrm>
           <a:prstGeom prst="rect">
             <a:avLst/>
@@ -25624,8 +26158,8 @@
         </p:nvSpPr>
         <p:spPr>
           <a:xfrm>
-            <a:off x="5230368" y="3364992"/>
-            <a:ext cx="1554480" cy="475488"/>
+            <a:off x="6428232" y="3364992"/>
+            <a:ext cx="1645920" cy="475488"/>
           </a:xfrm>
           <a:prstGeom prst="rect">
             <a:avLst>
@@ -25651,8 +26185,8 @@
         </p:nvSpPr>
         <p:spPr>
           <a:xfrm>
-            <a:off x="5230368" y="3364992"/>
-            <a:ext cx="1554480" cy="475488"/>
+            <a:off x="6428232" y="3364992"/>
+            <a:ext cx="1645920" cy="475488"/>
           </a:xfrm>
           <a:prstGeom prst="rect">
             <a:avLst/>
@@ -25676,7 +26210,7 @@
                 <a:ea typeface="Trebuchet MS" pitchFamily="34" charset="-122"/>
                 <a:cs typeface="Trebuchet MS" pitchFamily="34" charset="-120"/>
               </a:rPr>
-              <a:t>ma</a:t>
+              <a:t>rine</a:t>
             </a:r>
             <a:endParaRPr lang="en-US" sz="1400" dirty="0"/>
           </a:p>
@@ -25684,119 +26218,80 @@
       </p:sp>
       <p:sp>
         <p:nvSpPr>
-          <p:cNvPr id="33" name="Text 31"/>
-          <p:cNvSpPr/>
-          <p:nvPr/>
-        </p:nvSpPr>
-        <p:spPr>
-          <a:xfrm>
-            <a:off x="6784848" y="3364992"/>
-            <a:ext cx="73152" cy="475488"/>
-          </a:xfrm>
-          <a:prstGeom prst="rect">
-            <a:avLst/>
-          </a:prstGeom>
-          <a:noFill/>
-          <a:ln/>
-        </p:spPr>
-        <p:txBody>
-          <a:bodyPr wrap="square" lIns="0" tIns="0" rIns="0" bIns="0" rtlCol="0" anchor="ctr"/>
-          <a:lstStyle/>
-          <a:p>
-            <a:pPr algn="ctr" indent="0" marL="0">
-              <a:buNone/>
-            </a:pPr>
-            <a:r>
-              <a:rPr lang="en-US" sz="1600" b="1" dirty="0">
-                <a:solidFill>
-                  <a:srgbClr val="0D9488"/>
+          <p:cNvPr id="33" name="Shape 31"/>
+          <p:cNvSpPr/>
+          <p:nvPr/>
+        </p:nvSpPr>
+        <p:spPr>
+          <a:xfrm>
+            <a:off x="365760" y="4096512"/>
+            <a:ext cx="1371600" cy="804672"/>
+          </a:xfrm>
+          <a:prstGeom prst="rect">
+            <a:avLst>
+              <a:gd name="adj" fmla="val 6818"/>
+            </a:avLst>
+          </a:prstGeom>
+          <a:solidFill>
+            <a:srgbClr val="E2E8F0"/>
+          </a:solidFill>
+          <a:ln w="12700">
+            <a:solidFill>
+              <a:srgbClr val="E2E8F0"/>
+            </a:solidFill>
+            <a:prstDash val="solid"/>
+          </a:ln>
+        </p:spPr>
+      </p:sp>
+      <p:sp>
+        <p:nvSpPr>
+          <p:cNvPr id="34" name="Text 32"/>
+          <p:cNvSpPr/>
+          <p:nvPr/>
+        </p:nvSpPr>
+        <p:spPr>
+          <a:xfrm>
+            <a:off x="365760" y="4096512"/>
+            <a:ext cx="1371600" cy="804672"/>
+          </a:xfrm>
+          <a:prstGeom prst="rect">
+            <a:avLst/>
+          </a:prstGeom>
+          <a:noFill/>
+          <a:ln/>
+        </p:spPr>
+        <p:txBody>
+          <a:bodyPr wrap="square" lIns="0" tIns="0" rIns="0" bIns="0" rtlCol="0" anchor="ctr"/>
+          <a:lstStyle/>
+          <a:p>
+            <a:pPr algn="ctr" indent="0" marL="0">
+              <a:buNone/>
+            </a:pPr>
+            <a:r>
+              <a:rPr lang="en-US" sz="1100" b="1" dirty="0">
+                <a:solidFill>
+                  <a:srgbClr val="475569"/>
                 </a:solidFill>
                 <a:latin typeface="Trebuchet MS" pitchFamily="34" charset="0"/>
                 <a:ea typeface="Trebuchet MS" pitchFamily="34" charset="-122"/>
                 <a:cs typeface="Trebuchet MS" pitchFamily="34" charset="-120"/>
               </a:rPr>
-              <a:t>·</a:t>
-            </a:r>
-            <a:endParaRPr lang="en-US" sz="1600" dirty="0"/>
-          </a:p>
-        </p:txBody>
-      </p:sp>
-      <p:sp>
-        <p:nvSpPr>
-          <p:cNvPr id="34" name="Shape 32"/>
-          <p:cNvSpPr/>
-          <p:nvPr/>
-        </p:nvSpPr>
-        <p:spPr>
-          <a:xfrm>
-            <a:off x="6858000" y="3364992"/>
-            <a:ext cx="1554480" cy="475488"/>
-          </a:xfrm>
-          <a:prstGeom prst="rect">
-            <a:avLst>
-              <a:gd name="adj" fmla="val 9615"/>
-            </a:avLst>
-          </a:prstGeom>
-          <a:solidFill>
-            <a:srgbClr val="FFFFFF"/>
-          </a:solidFill>
-          <a:ln w="12700">
-            <a:solidFill>
-              <a:srgbClr val="0D9488"/>
-            </a:solidFill>
-            <a:prstDash val="solid"/>
-          </a:ln>
-        </p:spPr>
-      </p:sp>
-      <p:sp>
-        <p:nvSpPr>
-          <p:cNvPr id="35" name="Text 33"/>
-          <p:cNvSpPr/>
-          <p:nvPr/>
-        </p:nvSpPr>
-        <p:spPr>
-          <a:xfrm>
-            <a:off x="6858000" y="3364992"/>
-            <a:ext cx="1554480" cy="475488"/>
-          </a:xfrm>
-          <a:prstGeom prst="rect">
-            <a:avLst/>
-          </a:prstGeom>
-          <a:noFill/>
-          <a:ln/>
-        </p:spPr>
-        <p:txBody>
-          <a:bodyPr wrap="square" lIns="0" tIns="0" rIns="0" bIns="0" rtlCol="0" anchor="ctr"/>
-          <a:lstStyle/>
-          <a:p>
-            <a:pPr algn="ctr" indent="0" marL="0">
-              <a:buNone/>
-            </a:pPr>
-            <a:r>
-              <a:rPr lang="en-US" sz="1400" b="1" dirty="0">
-                <a:solidFill>
-                  <a:srgbClr val="0D9488"/>
-                </a:solidFill>
-                <a:latin typeface="Trebuchet MS" pitchFamily="34" charset="0"/>
-                <a:ea typeface="Trebuchet MS" pitchFamily="34" charset="-122"/>
-                <a:cs typeface="Trebuchet MS" pitchFamily="34" charset="-120"/>
-              </a:rPr>
-              <a:t>rine</a:t>
-            </a:r>
-            <a:endParaRPr lang="en-US" sz="1400" dirty="0"/>
-          </a:p>
-        </p:txBody>
-      </p:sp>
-      <p:sp>
-        <p:nvSpPr>
-          <p:cNvPr id="36" name="Shape 34"/>
-          <p:cNvSpPr/>
-          <p:nvPr/>
-        </p:nvSpPr>
-        <p:spPr>
-          <a:xfrm>
-            <a:off x="365760" y="4096512"/>
-            <a:ext cx="1371600" cy="804672"/>
+              <a:t>Phonemes</a:t>
+            </a:r>
+            <a:endParaRPr lang="en-US" sz="1100" dirty="0"/>
+          </a:p>
+        </p:txBody>
+      </p:sp>
+      <p:sp>
+        <p:nvSpPr>
+          <p:cNvPr id="35" name="Shape 33"/>
+          <p:cNvSpPr/>
+          <p:nvPr/>
+        </p:nvSpPr>
+        <p:spPr>
+          <a:xfrm>
+            <a:off x="1874520" y="4096512"/>
+            <a:ext cx="6903720" cy="804672"/>
           </a:xfrm>
           <a:prstGeom prst="rect">
             <a:avLst>
@@ -25804,85 +26299,19 @@
             </a:avLst>
           </a:prstGeom>
           <a:solidFill>
-            <a:srgbClr val="E2E8F0"/>
+            <a:srgbClr val="F8FAFC"/>
           </a:solidFill>
           <a:ln w="12700">
             <a:solidFill>
               <a:srgbClr val="E2E8F0"/>
             </a:solidFill>
-            <a:prstDash val="solid"/>
-          </a:ln>
-        </p:spPr>
-      </p:sp>
-      <p:sp>
-        <p:nvSpPr>
-          <p:cNvPr id="37" name="Text 35"/>
-          <p:cNvSpPr/>
-          <p:nvPr/>
-        </p:nvSpPr>
-        <p:spPr>
-          <a:xfrm>
-            <a:off x="365760" y="4096512"/>
-            <a:ext cx="1371600" cy="804672"/>
-          </a:xfrm>
-          <a:prstGeom prst="rect">
-            <a:avLst/>
-          </a:prstGeom>
-          <a:noFill/>
-          <a:ln/>
-        </p:spPr>
-        <p:txBody>
-          <a:bodyPr wrap="square" lIns="0" tIns="0" rIns="0" bIns="0" rtlCol="0" anchor="ctr"/>
-          <a:lstStyle/>
-          <a:p>
-            <a:pPr algn="ctr" indent="0" marL="0">
-              <a:buNone/>
-            </a:pPr>
-            <a:r>
-              <a:rPr lang="en-US" sz="1100" b="1" dirty="0">
-                <a:solidFill>
-                  <a:srgbClr val="475569"/>
-                </a:solidFill>
-                <a:latin typeface="Trebuchet MS" pitchFamily="34" charset="0"/>
-                <a:ea typeface="Trebuchet MS" pitchFamily="34" charset="-122"/>
-                <a:cs typeface="Trebuchet MS" pitchFamily="34" charset="-120"/>
-              </a:rPr>
-              <a:t>Phonemes</a:t>
-            </a:r>
-            <a:endParaRPr lang="en-US" sz="1100" dirty="0"/>
-          </a:p>
-        </p:txBody>
-      </p:sp>
-      <p:sp>
-        <p:nvSpPr>
-          <p:cNvPr id="38" name="Shape 36"/>
-          <p:cNvSpPr/>
-          <p:nvPr/>
-        </p:nvSpPr>
-        <p:spPr>
-          <a:xfrm>
-            <a:off x="1874520" y="4096512"/>
-            <a:ext cx="6903720" cy="804672"/>
-          </a:xfrm>
-          <a:prstGeom prst="rect">
-            <a:avLst>
-              <a:gd name="adj" fmla="val 6818"/>
-            </a:avLst>
-          </a:prstGeom>
-          <a:solidFill>
-            <a:srgbClr val="F8FAFC"/>
-          </a:solidFill>
-          <a:ln w="12700">
-            <a:solidFill>
-              <a:srgbClr val="E2E8F0"/>
-            </a:solidFill>
             <a:prstDash val="dash"/>
           </a:ln>
         </p:spPr>
       </p:sp>
       <p:sp>
         <p:nvSpPr>
-          <p:cNvPr id="39" name="Text 37"/>
+          <p:cNvPr id="36" name="Text 34"/>
           <p:cNvSpPr/>
           <p:nvPr/>
         </p:nvSpPr>
@@ -26205,7 +26634,7 @@
                 <a:ea typeface="Calibri" pitchFamily="34" charset="-122"/>
                 <a:cs typeface="Calibri" pitchFamily="34" charset="-120"/>
               </a:rPr>
-              <a:t>Word Labs  •  wordlabs.app  •  Root: 'marine' = of the sea or ocean</a:t>
+              <a:t>Word Labs  •  wordlabs.app  •  Root: 'marine' = relating to the sea</a:t>
             </a:r>
             <a:endParaRPr lang="en-US" sz="800" dirty="0"/>
           </a:p>
@@ -26344,7 +26773,7 @@
                 <a:ea typeface="Trebuchet MS" pitchFamily="34" charset="-122"/>
                 <a:cs typeface="Trebuchet MS" pitchFamily="34" charset="-120"/>
               </a:rPr>
-              <a:t>aquamarine</a:t>
+              <a:t>submarine</a:t>
             </a:r>
             <a:endParaRPr lang="en-US" sz="2800" dirty="0"/>
           </a:p>
@@ -26483,7 +26912,7 @@
                 <a:ea typeface="Trebuchet MS" pitchFamily="34" charset="-122"/>
                 <a:cs typeface="Trebuchet MS" pitchFamily="34" charset="-120"/>
               </a:rPr>
-              <a:t>aqua</a:t>
+              <a:t>sub</a:t>
             </a:r>
             <a:endParaRPr lang="en-US" sz="1300" dirty="0"/>
           </a:p>
@@ -26522,7 +26951,7 @@
                 <a:ea typeface="Calibri" pitchFamily="34" charset="-122"/>
                 <a:cs typeface="Calibri" pitchFamily="34" charset="-120"/>
               </a:rPr>
-              <a:t>water</a:t>
+              <a:t>under; below</a:t>
             </a:r>
             <a:endParaRPr lang="en-US" sz="850" dirty="0"/>
           </a:p>
@@ -26634,7 +27063,7 @@
                 <a:ea typeface="Calibri" pitchFamily="34" charset="-122"/>
                 <a:cs typeface="Calibri" pitchFamily="34" charset="-120"/>
               </a:rPr>
-              <a:t>of the sea</a:t>
+              <a:t>relating to the sea</a:t>
             </a:r>
             <a:endParaRPr lang="en-US" sz="850" dirty="0"/>
           </a:p>
@@ -26741,8 +27170,8 @@
         </p:nvSpPr>
         <p:spPr>
           <a:xfrm>
-            <a:off x="1975104" y="3364992"/>
-            <a:ext cx="1554480" cy="475488"/>
+            <a:off x="2313432" y="3364992"/>
+            <a:ext cx="1645920" cy="475488"/>
           </a:xfrm>
           <a:prstGeom prst="rect">
             <a:avLst>
@@ -26768,8 +27197,8 @@
         </p:nvSpPr>
         <p:spPr>
           <a:xfrm>
-            <a:off x="1975104" y="3364992"/>
-            <a:ext cx="1554480" cy="475488"/>
+            <a:off x="2313432" y="3364992"/>
+            <a:ext cx="1645920" cy="475488"/>
           </a:xfrm>
           <a:prstGeom prst="rect">
             <a:avLst/>
@@ -26793,7 +27222,7 @@
                 <a:ea typeface="Trebuchet MS" pitchFamily="34" charset="-122"/>
                 <a:cs typeface="Trebuchet MS" pitchFamily="34" charset="-120"/>
               </a:rPr>
-              <a:t>a</a:t>
+              <a:t>sub</a:t>
             </a:r>
             <a:endParaRPr lang="en-US" sz="1400" dirty="0"/>
           </a:p>
@@ -26807,8 +27236,8 @@
         </p:nvSpPr>
         <p:spPr>
           <a:xfrm>
-            <a:off x="3529584" y="3364992"/>
-            <a:ext cx="73152" cy="475488"/>
+            <a:off x="3959352" y="3364992"/>
+            <a:ext cx="411480" cy="475488"/>
           </a:xfrm>
           <a:prstGeom prst="rect">
             <a:avLst/>
@@ -26846,8 +27275,8 @@
         </p:nvSpPr>
         <p:spPr>
           <a:xfrm>
-            <a:off x="3602736" y="3364992"/>
-            <a:ext cx="1554480" cy="475488"/>
+            <a:off x="4370832" y="3364992"/>
+            <a:ext cx="1645920" cy="475488"/>
           </a:xfrm>
           <a:prstGeom prst="rect">
             <a:avLst>
@@ -26873,8 +27302,8 @@
         </p:nvSpPr>
         <p:spPr>
           <a:xfrm>
-            <a:off x="3602736" y="3364992"/>
-            <a:ext cx="1554480" cy="475488"/>
+            <a:off x="4370832" y="3364992"/>
+            <a:ext cx="1645920" cy="475488"/>
           </a:xfrm>
           <a:prstGeom prst="rect">
             <a:avLst/>
@@ -26898,7 +27327,7 @@
                 <a:ea typeface="Trebuchet MS" pitchFamily="34" charset="-122"/>
                 <a:cs typeface="Trebuchet MS" pitchFamily="34" charset="-120"/>
               </a:rPr>
-              <a:t>qua</a:t>
+              <a:t>ma</a:t>
             </a:r>
             <a:endParaRPr lang="en-US" sz="1400" dirty="0"/>
           </a:p>
@@ -26912,8 +27341,8 @@
         </p:nvSpPr>
         <p:spPr>
           <a:xfrm>
-            <a:off x="5157216" y="3364992"/>
-            <a:ext cx="73152" cy="475488"/>
+            <a:off x="6016752" y="3364992"/>
+            <a:ext cx="411480" cy="475488"/>
           </a:xfrm>
           <a:prstGeom prst="rect">
             <a:avLst/>
@@ -26951,8 +27380,8 @@
         </p:nvSpPr>
         <p:spPr>
           <a:xfrm>
-            <a:off x="5230368" y="3364992"/>
-            <a:ext cx="1554480" cy="475488"/>
+            <a:off x="6428232" y="3364992"/>
+            <a:ext cx="1645920" cy="475488"/>
           </a:xfrm>
           <a:prstGeom prst="rect">
             <a:avLst>
@@ -26978,8 +27407,8 @@
         </p:nvSpPr>
         <p:spPr>
           <a:xfrm>
-            <a:off x="5230368" y="3364992"/>
-            <a:ext cx="1554480" cy="475488"/>
+            <a:off x="6428232" y="3364992"/>
+            <a:ext cx="1645920" cy="475488"/>
           </a:xfrm>
           <a:prstGeom prst="rect">
             <a:avLst/>
@@ -27003,7 +27432,7 @@
                 <a:ea typeface="Trebuchet MS" pitchFamily="34" charset="-122"/>
                 <a:cs typeface="Trebuchet MS" pitchFamily="34" charset="-120"/>
               </a:rPr>
-              <a:t>ma</a:t>
+              <a:t>rine</a:t>
             </a:r>
             <a:endParaRPr lang="en-US" sz="1400" dirty="0"/>
           </a:p>
@@ -27011,193 +27440,247 @@
       </p:sp>
       <p:sp>
         <p:nvSpPr>
-          <p:cNvPr id="33" name="Text 31"/>
-          <p:cNvSpPr/>
-          <p:nvPr/>
-        </p:nvSpPr>
-        <p:spPr>
-          <a:xfrm>
-            <a:off x="6784848" y="3364992"/>
-            <a:ext cx="73152" cy="475488"/>
-          </a:xfrm>
-          <a:prstGeom prst="rect">
-            <a:avLst/>
-          </a:prstGeom>
-          <a:noFill/>
-          <a:ln/>
-        </p:spPr>
-        <p:txBody>
-          <a:bodyPr wrap="square" lIns="0" tIns="0" rIns="0" bIns="0" rtlCol="0" anchor="ctr"/>
-          <a:lstStyle/>
-          <a:p>
-            <a:pPr algn="ctr" indent="0" marL="0">
-              <a:buNone/>
-            </a:pPr>
-            <a:r>
-              <a:rPr lang="en-US" sz="1600" b="1" dirty="0">
-                <a:solidFill>
-                  <a:srgbClr val="0D9488"/>
+          <p:cNvPr id="33" name="Shape 31"/>
+          <p:cNvSpPr/>
+          <p:nvPr/>
+        </p:nvSpPr>
+        <p:spPr>
+          <a:xfrm>
+            <a:off x="365760" y="4096512"/>
+            <a:ext cx="1371600" cy="804672"/>
+          </a:xfrm>
+          <a:prstGeom prst="rect">
+            <a:avLst>
+              <a:gd name="adj" fmla="val 6818"/>
+            </a:avLst>
+          </a:prstGeom>
+          <a:solidFill>
+            <a:srgbClr val="E2E8F0"/>
+          </a:solidFill>
+          <a:ln w="12700">
+            <a:solidFill>
+              <a:srgbClr val="E2E8F0"/>
+            </a:solidFill>
+            <a:prstDash val="solid"/>
+          </a:ln>
+        </p:spPr>
+      </p:sp>
+      <p:sp>
+        <p:nvSpPr>
+          <p:cNvPr id="34" name="Text 32"/>
+          <p:cNvSpPr/>
+          <p:nvPr/>
+        </p:nvSpPr>
+        <p:spPr>
+          <a:xfrm>
+            <a:off x="365760" y="4096512"/>
+            <a:ext cx="1371600" cy="804672"/>
+          </a:xfrm>
+          <a:prstGeom prst="rect">
+            <a:avLst/>
+          </a:prstGeom>
+          <a:noFill/>
+          <a:ln/>
+        </p:spPr>
+        <p:txBody>
+          <a:bodyPr wrap="square" lIns="0" tIns="0" rIns="0" bIns="0" rtlCol="0" anchor="ctr"/>
+          <a:lstStyle/>
+          <a:p>
+            <a:pPr algn="ctr" indent="0" marL="0">
+              <a:buNone/>
+            </a:pPr>
+            <a:r>
+              <a:rPr lang="en-US" sz="1100" b="1" dirty="0">
+                <a:solidFill>
+                  <a:srgbClr val="475569"/>
                 </a:solidFill>
                 <a:latin typeface="Trebuchet MS" pitchFamily="34" charset="0"/>
                 <a:ea typeface="Trebuchet MS" pitchFamily="34" charset="-122"/>
                 <a:cs typeface="Trebuchet MS" pitchFamily="34" charset="-120"/>
               </a:rPr>
-              <a:t>·</a:t>
-            </a:r>
-            <a:endParaRPr lang="en-US" sz="1600" dirty="0"/>
-          </a:p>
-        </p:txBody>
-      </p:sp>
-      <p:sp>
-        <p:nvSpPr>
-          <p:cNvPr id="34" name="Shape 32"/>
-          <p:cNvSpPr/>
-          <p:nvPr/>
-        </p:nvSpPr>
-        <p:spPr>
-          <a:xfrm>
-            <a:off x="6858000" y="3364992"/>
-            <a:ext cx="1554480" cy="475488"/>
+              <a:t>Phonemes</a:t>
+            </a:r>
+            <a:endParaRPr lang="en-US" sz="1100" dirty="0"/>
+          </a:p>
+        </p:txBody>
+      </p:sp>
+      <p:sp>
+        <p:nvSpPr>
+          <p:cNvPr id="35" name="Shape 33"/>
+          <p:cNvSpPr/>
+          <p:nvPr/>
+        </p:nvSpPr>
+        <p:spPr>
+          <a:xfrm>
+            <a:off x="1874520" y="4096512"/>
+            <a:ext cx="6903720" cy="658368"/>
           </a:xfrm>
           <a:prstGeom prst="rect">
             <a:avLst>
-              <a:gd name="adj" fmla="val 9615"/>
+              <a:gd name="adj" fmla="val 8333"/>
             </a:avLst>
           </a:prstGeom>
           <a:solidFill>
+            <a:srgbClr val="FCE7F3"/>
+          </a:solidFill>
+          <a:ln w="12700">
+            <a:solidFill>
+              <a:srgbClr val="DB2777"/>
+            </a:solidFill>
+            <a:prstDash val="solid"/>
+          </a:ln>
+        </p:spPr>
+      </p:sp>
+      <p:sp>
+        <p:nvSpPr>
+          <p:cNvPr id="36" name="Shape 34"/>
+          <p:cNvSpPr/>
+          <p:nvPr/>
+        </p:nvSpPr>
+        <p:spPr>
+          <a:xfrm>
+            <a:off x="2023872" y="4169664"/>
+            <a:ext cx="685800" cy="475488"/>
+          </a:xfrm>
+          <a:prstGeom prst="rect">
+            <a:avLst>
+              <a:gd name="adj" fmla="val 7692"/>
+            </a:avLst>
+          </a:prstGeom>
+          <a:solidFill>
             <a:srgbClr val="FFFFFF"/>
           </a:solidFill>
           <a:ln w="12700">
             <a:solidFill>
-              <a:srgbClr val="0D9488"/>
-            </a:solidFill>
-            <a:prstDash val="solid"/>
-          </a:ln>
-        </p:spPr>
-      </p:sp>
-      <p:sp>
-        <p:nvSpPr>
-          <p:cNvPr id="35" name="Text 33"/>
-          <p:cNvSpPr/>
-          <p:nvPr/>
-        </p:nvSpPr>
-        <p:spPr>
-          <a:xfrm>
-            <a:off x="6858000" y="3364992"/>
-            <a:ext cx="1554480" cy="475488"/>
-          </a:xfrm>
-          <a:prstGeom prst="rect">
-            <a:avLst/>
-          </a:prstGeom>
-          <a:noFill/>
-          <a:ln/>
-        </p:spPr>
-        <p:txBody>
-          <a:bodyPr wrap="square" lIns="0" tIns="0" rIns="0" bIns="0" rtlCol="0" anchor="ctr"/>
-          <a:lstStyle/>
-          <a:p>
-            <a:pPr algn="ctr" indent="0" marL="0">
-              <a:buNone/>
-            </a:pPr>
-            <a:r>
-              <a:rPr lang="en-US" sz="1400" b="1" dirty="0">
-                <a:solidFill>
-                  <a:srgbClr val="0D9488"/>
+              <a:srgbClr val="DB2777"/>
+            </a:solidFill>
+            <a:prstDash val="solid"/>
+          </a:ln>
+        </p:spPr>
+      </p:sp>
+      <p:sp>
+        <p:nvSpPr>
+          <p:cNvPr id="37" name="Text 35"/>
+          <p:cNvSpPr/>
+          <p:nvPr/>
+        </p:nvSpPr>
+        <p:spPr>
+          <a:xfrm>
+            <a:off x="2023872" y="4169664"/>
+            <a:ext cx="685800" cy="475488"/>
+          </a:xfrm>
+          <a:prstGeom prst="rect">
+            <a:avLst/>
+          </a:prstGeom>
+          <a:noFill/>
+          <a:ln/>
+        </p:spPr>
+        <p:txBody>
+          <a:bodyPr wrap="square" lIns="0" tIns="0" rIns="0" bIns="0" rtlCol="0" anchor="ctr"/>
+          <a:lstStyle/>
+          <a:p>
+            <a:pPr algn="ctr" indent="0" marL="0">
+              <a:buNone/>
+            </a:pPr>
+            <a:r>
+              <a:rPr lang="en-US" sz="900" b="1" dirty="0">
+                <a:solidFill>
+                  <a:srgbClr val="9D174D"/>
                 </a:solidFill>
                 <a:latin typeface="Trebuchet MS" pitchFamily="34" charset="0"/>
                 <a:ea typeface="Trebuchet MS" pitchFamily="34" charset="-122"/>
                 <a:cs typeface="Trebuchet MS" pitchFamily="34" charset="-120"/>
               </a:rPr>
-              <a:t>rine</a:t>
-            </a:r>
-            <a:endParaRPr lang="en-US" sz="1400" dirty="0"/>
-          </a:p>
-        </p:txBody>
-      </p:sp>
-      <p:sp>
-        <p:nvSpPr>
-          <p:cNvPr id="36" name="Shape 34"/>
-          <p:cNvSpPr/>
-          <p:nvPr/>
-        </p:nvSpPr>
-        <p:spPr>
-          <a:xfrm>
-            <a:off x="365760" y="4096512"/>
-            <a:ext cx="1371600" cy="804672"/>
+              <a:t>s</a:t>
+            </a:r>
+            <a:endParaRPr lang="en-US" sz="900" dirty="0"/>
+          </a:p>
+        </p:txBody>
+      </p:sp>
+      <p:sp>
+        <p:nvSpPr>
+          <p:cNvPr id="38" name="Shape 36"/>
+          <p:cNvSpPr/>
+          <p:nvPr/>
+        </p:nvSpPr>
+        <p:spPr>
+          <a:xfrm>
+            <a:off x="2831592" y="4169664"/>
+            <a:ext cx="685800" cy="475488"/>
           </a:xfrm>
           <a:prstGeom prst="rect">
             <a:avLst>
-              <a:gd name="adj" fmla="val 6818"/>
+              <a:gd name="adj" fmla="val 7692"/>
             </a:avLst>
           </a:prstGeom>
           <a:solidFill>
-            <a:srgbClr val="E2E8F0"/>
-          </a:solidFill>
-          <a:ln w="12700">
-            <a:solidFill>
-              <a:srgbClr val="E2E8F0"/>
-            </a:solidFill>
-            <a:prstDash val="solid"/>
-          </a:ln>
-        </p:spPr>
-      </p:sp>
-      <p:sp>
-        <p:nvSpPr>
-          <p:cNvPr id="37" name="Text 35"/>
-          <p:cNvSpPr/>
-          <p:nvPr/>
-        </p:nvSpPr>
-        <p:spPr>
-          <a:xfrm>
-            <a:off x="365760" y="4096512"/>
-            <a:ext cx="1371600" cy="804672"/>
-          </a:xfrm>
-          <a:prstGeom prst="rect">
-            <a:avLst/>
-          </a:prstGeom>
-          <a:noFill/>
-          <a:ln/>
-        </p:spPr>
-        <p:txBody>
-          <a:bodyPr wrap="square" lIns="0" tIns="0" rIns="0" bIns="0" rtlCol="0" anchor="ctr"/>
-          <a:lstStyle/>
-          <a:p>
-            <a:pPr algn="ctr" indent="0" marL="0">
-              <a:buNone/>
-            </a:pPr>
-            <a:r>
-              <a:rPr lang="en-US" sz="1100" b="1" dirty="0">
-                <a:solidFill>
-                  <a:srgbClr val="475569"/>
+            <a:srgbClr val="FFFFFF"/>
+          </a:solidFill>
+          <a:ln w="12700">
+            <a:solidFill>
+              <a:srgbClr val="DB2777"/>
+            </a:solidFill>
+            <a:prstDash val="solid"/>
+          </a:ln>
+        </p:spPr>
+      </p:sp>
+      <p:sp>
+        <p:nvSpPr>
+          <p:cNvPr id="39" name="Text 37"/>
+          <p:cNvSpPr/>
+          <p:nvPr/>
+        </p:nvSpPr>
+        <p:spPr>
+          <a:xfrm>
+            <a:off x="2831592" y="4169664"/>
+            <a:ext cx="685800" cy="475488"/>
+          </a:xfrm>
+          <a:prstGeom prst="rect">
+            <a:avLst/>
+          </a:prstGeom>
+          <a:noFill/>
+          <a:ln/>
+        </p:spPr>
+        <p:txBody>
+          <a:bodyPr wrap="square" lIns="0" tIns="0" rIns="0" bIns="0" rtlCol="0" anchor="ctr"/>
+          <a:lstStyle/>
+          <a:p>
+            <a:pPr algn="ctr" indent="0" marL="0">
+              <a:buNone/>
+            </a:pPr>
+            <a:r>
+              <a:rPr lang="en-US" sz="900" b="1" dirty="0">
+                <a:solidFill>
+                  <a:srgbClr val="9D174D"/>
                 </a:solidFill>
                 <a:latin typeface="Trebuchet MS" pitchFamily="34" charset="0"/>
                 <a:ea typeface="Trebuchet MS" pitchFamily="34" charset="-122"/>
                 <a:cs typeface="Trebuchet MS" pitchFamily="34" charset="-120"/>
               </a:rPr>
-              <a:t>Phonemes</a:t>
-            </a:r>
-            <a:endParaRPr lang="en-US" sz="1100" dirty="0"/>
-          </a:p>
-        </p:txBody>
-      </p:sp>
-      <p:sp>
-        <p:nvSpPr>
-          <p:cNvPr id="38" name="Shape 36"/>
-          <p:cNvSpPr/>
-          <p:nvPr/>
-        </p:nvSpPr>
-        <p:spPr>
-          <a:xfrm>
-            <a:off x="1874520" y="4096512"/>
-            <a:ext cx="6903720" cy="804672"/>
+              <a:t>u</a:t>
+            </a:r>
+            <a:endParaRPr lang="en-US" sz="900" dirty="0"/>
+          </a:p>
+        </p:txBody>
+      </p:sp>
+      <p:sp>
+        <p:nvSpPr>
+          <p:cNvPr id="40" name="Shape 38"/>
+          <p:cNvSpPr/>
+          <p:nvPr/>
+        </p:nvSpPr>
+        <p:spPr>
+          <a:xfrm>
+            <a:off x="3639312" y="4169664"/>
+            <a:ext cx="685800" cy="475488"/>
           </a:xfrm>
           <a:prstGeom prst="rect">
             <a:avLst>
-              <a:gd name="adj" fmla="val 6818"/>
+              <a:gd name="adj" fmla="val 7692"/>
             </a:avLst>
           </a:prstGeom>
           <a:solidFill>
-            <a:srgbClr val="FCE7F3"/>
+            <a:srgbClr val="FFFFFF"/>
           </a:solidFill>
           <a:ln w="12700">
             <a:solidFill>
@@ -27209,41 +27692,14 @@
       </p:sp>
       <p:sp>
         <p:nvSpPr>
-          <p:cNvPr id="39" name="Shape 37"/>
-          <p:cNvSpPr/>
-          <p:nvPr/>
-        </p:nvSpPr>
-        <p:spPr>
-          <a:xfrm>
-            <a:off x="2124837" y="4169664"/>
-            <a:ext cx="685800" cy="384048"/>
-          </a:xfrm>
-          <a:prstGeom prst="rect">
-            <a:avLst>
-              <a:gd name="adj" fmla="val 9524"/>
-            </a:avLst>
-          </a:prstGeom>
-          <a:solidFill>
-            <a:srgbClr val="FFFFFF"/>
-          </a:solidFill>
-          <a:ln w="12700">
-            <a:solidFill>
-              <a:srgbClr val="DB2777"/>
-            </a:solidFill>
-            <a:prstDash val="solid"/>
-          </a:ln>
-        </p:spPr>
-      </p:sp>
-      <p:sp>
-        <p:nvSpPr>
-          <p:cNvPr id="40" name="Text 38"/>
-          <p:cNvSpPr/>
-          <p:nvPr/>
-        </p:nvSpPr>
-        <p:spPr>
-          <a:xfrm>
-            <a:off x="2124837" y="4169664"/>
-            <a:ext cx="685800" cy="384048"/>
+          <p:cNvPr id="41" name="Text 39"/>
+          <p:cNvSpPr/>
+          <p:nvPr/>
+        </p:nvSpPr>
+        <p:spPr>
+          <a:xfrm>
+            <a:off x="3639312" y="4169664"/>
+            <a:ext cx="685800" cy="475488"/>
           </a:xfrm>
           <a:prstGeom prst="rect">
             <a:avLst/>
@@ -27267,7 +27723,7 @@
                 <a:ea typeface="Trebuchet MS" pitchFamily="34" charset="-122"/>
                 <a:cs typeface="Trebuchet MS" pitchFamily="34" charset="-120"/>
               </a:rPr>
-              <a:t>a</a:t>
+              <a:t>b</a:t>
             </a:r>
             <a:endParaRPr lang="en-US" sz="900" dirty="0"/>
           </a:p>
@@ -27275,18 +27731,18 @@
       </p:sp>
       <p:sp>
         <p:nvSpPr>
-          <p:cNvPr id="41" name="Shape 39"/>
-          <p:cNvSpPr/>
-          <p:nvPr/>
-        </p:nvSpPr>
-        <p:spPr>
-          <a:xfrm>
-            <a:off x="3033522" y="4169664"/>
-            <a:ext cx="685800" cy="384048"/>
+          <p:cNvPr id="42" name="Shape 40"/>
+          <p:cNvSpPr/>
+          <p:nvPr/>
+        </p:nvSpPr>
+        <p:spPr>
+          <a:xfrm>
+            <a:off x="4447032" y="4169664"/>
+            <a:ext cx="685800" cy="475488"/>
           </a:xfrm>
           <a:prstGeom prst="rect">
             <a:avLst>
-              <a:gd name="adj" fmla="val 9524"/>
+              <a:gd name="adj" fmla="val 7692"/>
             </a:avLst>
           </a:prstGeom>
           <a:solidFill>
@@ -27302,14 +27758,14 @@
       </p:sp>
       <p:sp>
         <p:nvSpPr>
-          <p:cNvPr id="42" name="Text 40"/>
-          <p:cNvSpPr/>
-          <p:nvPr/>
-        </p:nvSpPr>
-        <p:spPr>
-          <a:xfrm>
-            <a:off x="3033522" y="4169664"/>
-            <a:ext cx="685800" cy="384048"/>
+          <p:cNvPr id="43" name="Text 41"/>
+          <p:cNvSpPr/>
+          <p:nvPr/>
+        </p:nvSpPr>
+        <p:spPr>
+          <a:xfrm>
+            <a:off x="4447032" y="4169664"/>
+            <a:ext cx="685800" cy="475488"/>
           </a:xfrm>
           <a:prstGeom prst="rect">
             <a:avLst/>
@@ -27333,7 +27789,7 @@
                 <a:ea typeface="Trebuchet MS" pitchFamily="34" charset="-122"/>
                 <a:cs typeface="Trebuchet MS" pitchFamily="34" charset="-120"/>
               </a:rPr>
-              <a:t>qu</a:t>
+              <a:t>m</a:t>
             </a:r>
             <a:endParaRPr lang="en-US" sz="900" dirty="0"/>
           </a:p>
@@ -27341,57 +27797,18 @@
       </p:sp>
       <p:sp>
         <p:nvSpPr>
-          <p:cNvPr id="43" name="Text 41"/>
-          <p:cNvSpPr/>
-          <p:nvPr/>
-        </p:nvSpPr>
-        <p:spPr>
-          <a:xfrm>
-            <a:off x="3033522" y="4572000"/>
-            <a:ext cx="685800" cy="219456"/>
-          </a:xfrm>
-          <a:prstGeom prst="rect">
-            <a:avLst/>
-          </a:prstGeom>
-          <a:noFill/>
-          <a:ln/>
-        </p:spPr>
-        <p:txBody>
-          <a:bodyPr wrap="square" lIns="0" tIns="0" rIns="0" bIns="0" rtlCol="0" anchor="t"/>
-          <a:lstStyle/>
-          <a:p>
-            <a:pPr algn="ctr" indent="0" marL="0">
-              <a:buNone/>
-            </a:pPr>
-            <a:r>
-              <a:rPr lang="en-US" sz="750" i="1" dirty="0">
-                <a:solidFill>
-                  <a:srgbClr val="94A3B8"/>
-                </a:solidFill>
-                <a:latin typeface="Calibri" pitchFamily="34" charset="0"/>
-                <a:ea typeface="Calibri" pitchFamily="34" charset="-122"/>
-                <a:cs typeface="Calibri" pitchFamily="34" charset="-120"/>
-              </a:rPr>
-              <a:t>/kw/</a:t>
-            </a:r>
-            <a:endParaRPr lang="en-US" sz="750" dirty="0"/>
-          </a:p>
-        </p:txBody>
-      </p:sp>
-      <p:sp>
-        <p:nvSpPr>
           <p:cNvPr id="44" name="Shape 42"/>
           <p:cNvSpPr/>
           <p:nvPr/>
         </p:nvSpPr>
         <p:spPr>
           <a:xfrm>
-            <a:off x="3942207" y="4169664"/>
-            <a:ext cx="685800" cy="384048"/>
+            <a:off x="5254752" y="4169664"/>
+            <a:ext cx="685800" cy="475488"/>
           </a:xfrm>
           <a:prstGeom prst="rect">
             <a:avLst>
-              <a:gd name="adj" fmla="val 9524"/>
+              <a:gd name="adj" fmla="val 7692"/>
             </a:avLst>
           </a:prstGeom>
           <a:solidFill>
@@ -27413,8 +27830,8 @@
         </p:nvSpPr>
         <p:spPr>
           <a:xfrm>
-            <a:off x="3942207" y="4169664"/>
-            <a:ext cx="685800" cy="384048"/>
+            <a:off x="5254752" y="4169664"/>
+            <a:ext cx="685800" cy="475488"/>
           </a:xfrm>
           <a:prstGeom prst="rect">
             <a:avLst/>
@@ -27452,12 +27869,12 @@
         </p:nvSpPr>
         <p:spPr>
           <a:xfrm>
-            <a:off x="4850892" y="4169664"/>
-            <a:ext cx="685800" cy="384048"/>
+            <a:off x="6062472" y="4169664"/>
+            <a:ext cx="685800" cy="475488"/>
           </a:xfrm>
           <a:prstGeom prst="rect">
             <a:avLst>
-              <a:gd name="adj" fmla="val 9524"/>
+              <a:gd name="adj" fmla="val 7692"/>
             </a:avLst>
           </a:prstGeom>
           <a:solidFill>
@@ -27479,8 +27896,8 @@
         </p:nvSpPr>
         <p:spPr>
           <a:xfrm>
-            <a:off x="4850892" y="4169664"/>
-            <a:ext cx="685800" cy="384048"/>
+            <a:off x="6062472" y="4169664"/>
+            <a:ext cx="685800" cy="475488"/>
           </a:xfrm>
           <a:prstGeom prst="rect">
             <a:avLst/>
@@ -27504,7 +27921,7 @@
                 <a:ea typeface="Trebuchet MS" pitchFamily="34" charset="-122"/>
                 <a:cs typeface="Trebuchet MS" pitchFamily="34" charset="-120"/>
               </a:rPr>
-              <a:t>m</a:t>
+              <a:t>r</a:t>
             </a:r>
             <a:endParaRPr lang="en-US" sz="900" dirty="0"/>
           </a:p>
@@ -27518,12 +27935,12 @@
         </p:nvSpPr>
         <p:spPr>
           <a:xfrm>
-            <a:off x="5759577" y="4169664"/>
-            <a:ext cx="685800" cy="384048"/>
+            <a:off x="6870192" y="4169664"/>
+            <a:ext cx="685800" cy="475488"/>
           </a:xfrm>
           <a:prstGeom prst="rect">
             <a:avLst>
-              <a:gd name="adj" fmla="val 9524"/>
+              <a:gd name="adj" fmla="val 7692"/>
             </a:avLst>
           </a:prstGeom>
           <a:solidFill>
@@ -27545,8 +27962,8 @@
         </p:nvSpPr>
         <p:spPr>
           <a:xfrm>
-            <a:off x="5759577" y="4169664"/>
-            <a:ext cx="685800" cy="384048"/>
+            <a:off x="6870192" y="4169664"/>
+            <a:ext cx="685800" cy="475488"/>
           </a:xfrm>
           <a:prstGeom prst="rect">
             <a:avLst/>
@@ -27570,7 +27987,7 @@
                 <a:ea typeface="Trebuchet MS" pitchFamily="34" charset="-122"/>
                 <a:cs typeface="Trebuchet MS" pitchFamily="34" charset="-120"/>
               </a:rPr>
-              <a:t>a</a:t>
+              <a:t>i_e</a:t>
             </a:r>
             <a:endParaRPr lang="en-US" sz="900" dirty="0"/>
           </a:p>
@@ -27584,12 +28001,12 @@
         </p:nvSpPr>
         <p:spPr>
           <a:xfrm>
-            <a:off x="6668262" y="4169664"/>
-            <a:ext cx="685800" cy="384048"/>
+            <a:off x="7677912" y="4169664"/>
+            <a:ext cx="685800" cy="475488"/>
           </a:xfrm>
           <a:prstGeom prst="rect">
             <a:avLst>
-              <a:gd name="adj" fmla="val 9524"/>
+              <a:gd name="adj" fmla="val 7692"/>
             </a:avLst>
           </a:prstGeom>
           <a:solidFill>
@@ -27611,8 +28028,8 @@
         </p:nvSpPr>
         <p:spPr>
           <a:xfrm>
-            <a:off x="6668262" y="4169664"/>
-            <a:ext cx="685800" cy="384048"/>
+            <a:off x="7677912" y="4169664"/>
+            <a:ext cx="685800" cy="475488"/>
           </a:xfrm>
           <a:prstGeom prst="rect">
             <a:avLst/>
@@ -27636,73 +28053,7 @@
                 <a:ea typeface="Trebuchet MS" pitchFamily="34" charset="-122"/>
                 <a:cs typeface="Trebuchet MS" pitchFamily="34" charset="-120"/>
               </a:rPr>
-              <a:t>r</a:t>
-            </a:r>
-            <a:endParaRPr lang="en-US" sz="900" dirty="0"/>
-          </a:p>
-        </p:txBody>
-      </p:sp>
-      <p:sp>
-        <p:nvSpPr>
-          <p:cNvPr id="52" name="Shape 50"/>
-          <p:cNvSpPr/>
-          <p:nvPr/>
-        </p:nvSpPr>
-        <p:spPr>
-          <a:xfrm>
-            <a:off x="7576947" y="4169664"/>
-            <a:ext cx="685800" cy="384048"/>
-          </a:xfrm>
-          <a:prstGeom prst="rect">
-            <a:avLst>
-              <a:gd name="adj" fmla="val 9524"/>
-            </a:avLst>
-          </a:prstGeom>
-          <a:solidFill>
-            <a:srgbClr val="FFFFFF"/>
-          </a:solidFill>
-          <a:ln w="12700">
-            <a:solidFill>
-              <a:srgbClr val="DB2777"/>
-            </a:solidFill>
-            <a:prstDash val="solid"/>
-          </a:ln>
-        </p:spPr>
-      </p:sp>
-      <p:sp>
-        <p:nvSpPr>
-          <p:cNvPr id="53" name="Text 51"/>
-          <p:cNvSpPr/>
-          <p:nvPr/>
-        </p:nvSpPr>
-        <p:spPr>
-          <a:xfrm>
-            <a:off x="7576947" y="4169664"/>
-            <a:ext cx="685800" cy="384048"/>
-          </a:xfrm>
-          <a:prstGeom prst="rect">
-            <a:avLst/>
-          </a:prstGeom>
-          <a:noFill/>
-          <a:ln/>
-        </p:spPr>
-        <p:txBody>
-          <a:bodyPr wrap="square" lIns="0" tIns="0" rIns="0" bIns="0" rtlCol="0" anchor="ctr"/>
-          <a:lstStyle/>
-          <a:p>
-            <a:pPr algn="ctr" indent="0" marL="0">
-              <a:buNone/>
-            </a:pPr>
-            <a:r>
-              <a:rPr lang="en-US" sz="900" b="1" dirty="0">
-                <a:solidFill>
-                  <a:srgbClr val="9D174D"/>
-                </a:solidFill>
-                <a:latin typeface="Trebuchet MS" pitchFamily="34" charset="0"/>
-                <a:ea typeface="Trebuchet MS" pitchFamily="34" charset="-122"/>
-                <a:cs typeface="Trebuchet MS" pitchFamily="34" charset="-120"/>
-              </a:rPr>
-              <a:t>ine</a:t>
+              <a:t>n</a:t>
             </a:r>
             <a:endParaRPr lang="en-US" sz="900" dirty="0"/>
           </a:p>
@@ -27994,7 +28345,7 @@
                 <a:ea typeface="Calibri" pitchFamily="34" charset="-122"/>
                 <a:cs typeface="Calibri" pitchFamily="34" charset="-120"/>
               </a:rPr>
-              <a:t>Word Labs  •  wordlabs.app  •  Root: 'marine' = of the sea or ocean</a:t>
+              <a:t>Word Labs  •  wordlabs.app  •  Root: 'marine' = relating to the sea</a:t>
             </a:r>
             <a:endParaRPr lang="en-US" sz="800" dirty="0"/>
           </a:p>
@@ -28821,7 +29172,7 @@
                 <a:ea typeface="Calibri" pitchFamily="34" charset="-122"/>
                 <a:cs typeface="Calibri" pitchFamily="34" charset="-120"/>
               </a:rPr>
-              <a:t>Word Labs  •  wordlabs.app  •  Root: 'marine' = of the sea or ocean</a:t>
+              <a:t>Word Labs  •  wordlabs.app  •  Root: 'marine' = relating to the sea</a:t>
             </a:r>
             <a:endParaRPr lang="en-US" sz="800" dirty="0"/>
           </a:p>
@@ -29138,7 +29489,7 @@
                 <a:ea typeface="Calibri" pitchFamily="34" charset="-122"/>
                 <a:cs typeface="Calibri" pitchFamily="34" charset="-120"/>
               </a:rPr>
-              <a:t>beyond, extreme</a:t>
+              <a:t>beyond; extreme</a:t>
             </a:r>
             <a:endParaRPr lang="en-US" sz="850" dirty="0"/>
           </a:p>
@@ -29250,7 +29601,7 @@
                 <a:ea typeface="Calibri" pitchFamily="34" charset="-122"/>
                 <a:cs typeface="Calibri" pitchFamily="34" charset="-120"/>
               </a:rPr>
-              <a:t>of the sea</a:t>
+              <a:t>relating to the sea</a:t>
             </a:r>
             <a:endParaRPr lang="en-US" sz="850" dirty="0"/>
           </a:p>
@@ -29806,7 +30157,7 @@
                 <a:ea typeface="Calibri" pitchFamily="34" charset="-122"/>
                 <a:cs typeface="Calibri" pitchFamily="34" charset="-120"/>
               </a:rPr>
-              <a:t>Word Labs  •  wordlabs.app  •  Root: 'marine' = of the sea or ocean</a:t>
+              <a:t>Word Labs  •  wordlabs.app  •  Root: 'marine' = relating to the sea</a:t>
             </a:r>
             <a:endParaRPr lang="en-US" sz="800" dirty="0"/>
           </a:p>
@@ -30123,7 +30474,7 @@
                 <a:ea typeface="Calibri" pitchFamily="34" charset="-122"/>
                 <a:cs typeface="Calibri" pitchFamily="34" charset="-120"/>
               </a:rPr>
-              <a:t>beyond, extreme</a:t>
+              <a:t>beyond; extreme</a:t>
             </a:r>
             <a:endParaRPr lang="en-US" sz="850" dirty="0"/>
           </a:p>
@@ -30235,7 +30586,7 @@
                 <a:ea typeface="Calibri" pitchFamily="34" charset="-122"/>
                 <a:cs typeface="Calibri" pitchFamily="34" charset="-120"/>
               </a:rPr>
-              <a:t>of the sea</a:t>
+              <a:t>relating to the sea</a:t>
             </a:r>
             <a:endParaRPr lang="en-US" sz="850" dirty="0"/>
           </a:p>
@@ -31133,7 +31484,7 @@
                 <a:ea typeface="Calibri" pitchFamily="34" charset="-122"/>
                 <a:cs typeface="Calibri" pitchFamily="34" charset="-120"/>
               </a:rPr>
-              <a:t>Word Labs  •  wordlabs.app  •  Root: 'marine' = of the sea or ocean</a:t>
+              <a:t>Word Labs  •  wordlabs.app  •  Root: 'marine' = relating to the sea</a:t>
             </a:r>
             <a:endParaRPr lang="en-US" sz="800" dirty="0"/>
           </a:p>
@@ -31450,7 +31801,7 @@
                 <a:ea typeface="Calibri" pitchFamily="34" charset="-122"/>
                 <a:cs typeface="Calibri" pitchFamily="34" charset="-120"/>
               </a:rPr>
-              <a:t>beyond, extreme</a:t>
+              <a:t>beyond; extreme</a:t>
             </a:r>
             <a:endParaRPr lang="en-US" sz="850" dirty="0"/>
           </a:p>
@@ -31562,7 +31913,7 @@
                 <a:ea typeface="Calibri" pitchFamily="34" charset="-122"/>
                 <a:cs typeface="Calibri" pitchFamily="34" charset="-120"/>
               </a:rPr>
-              <a:t>of the sea</a:t>
+              <a:t>relating to the sea</a:t>
             </a:r>
             <a:endParaRPr lang="en-US" sz="850" dirty="0"/>
           </a:p>
@@ -32143,8 +32494,8 @@
         </p:nvSpPr>
         <p:spPr>
           <a:xfrm>
-            <a:off x="1951330" y="4169664"/>
-            <a:ext cx="676656" cy="475488"/>
+            <a:off x="1951828" y="4169664"/>
+            <a:ext cx="603504" cy="475488"/>
           </a:xfrm>
           <a:prstGeom prst="rect">
             <a:avLst>
@@ -32170,8 +32521,8 @@
         </p:nvSpPr>
         <p:spPr>
           <a:xfrm>
-            <a:off x="1951330" y="4169664"/>
-            <a:ext cx="676656" cy="475488"/>
+            <a:off x="1951828" y="4169664"/>
+            <a:ext cx="603504" cy="475488"/>
           </a:xfrm>
           <a:prstGeom prst="rect">
             <a:avLst/>
@@ -32209,8 +32560,8 @@
         </p:nvSpPr>
         <p:spPr>
           <a:xfrm>
-            <a:off x="2677363" y="4169664"/>
-            <a:ext cx="676656" cy="475488"/>
+            <a:off x="2605209" y="4169664"/>
+            <a:ext cx="603504" cy="475488"/>
           </a:xfrm>
           <a:prstGeom prst="rect">
             <a:avLst>
@@ -32236,8 +32587,8 @@
         </p:nvSpPr>
         <p:spPr>
           <a:xfrm>
-            <a:off x="2677363" y="4169664"/>
-            <a:ext cx="676656" cy="475488"/>
+            <a:off x="2605209" y="4169664"/>
+            <a:ext cx="603504" cy="475488"/>
           </a:xfrm>
           <a:prstGeom prst="rect">
             <a:avLst/>
@@ -32275,8 +32626,8 @@
         </p:nvSpPr>
         <p:spPr>
           <a:xfrm>
-            <a:off x="3403397" y="4169664"/>
-            <a:ext cx="676656" cy="475488"/>
+            <a:off x="3258589" y="4169664"/>
+            <a:ext cx="603504" cy="475488"/>
           </a:xfrm>
           <a:prstGeom prst="rect">
             <a:avLst>
@@ -32302,8 +32653,8 @@
         </p:nvSpPr>
         <p:spPr>
           <a:xfrm>
-            <a:off x="3403397" y="4169664"/>
-            <a:ext cx="676656" cy="475488"/>
+            <a:off x="3258589" y="4169664"/>
+            <a:ext cx="603504" cy="475488"/>
           </a:xfrm>
           <a:prstGeom prst="rect">
             <a:avLst/>
@@ -32341,8 +32692,8 @@
         </p:nvSpPr>
         <p:spPr>
           <a:xfrm>
-            <a:off x="4129430" y="4169664"/>
-            <a:ext cx="676656" cy="475488"/>
+            <a:off x="3911969" y="4169664"/>
+            <a:ext cx="603504" cy="475488"/>
           </a:xfrm>
           <a:prstGeom prst="rect">
             <a:avLst>
@@ -32368,8 +32719,8 @@
         </p:nvSpPr>
         <p:spPr>
           <a:xfrm>
-            <a:off x="4129430" y="4169664"/>
-            <a:ext cx="676656" cy="475488"/>
+            <a:off x="3911969" y="4169664"/>
+            <a:ext cx="603504" cy="475488"/>
           </a:xfrm>
           <a:prstGeom prst="rect">
             <a:avLst/>
@@ -32407,8 +32758,8 @@
         </p:nvSpPr>
         <p:spPr>
           <a:xfrm>
-            <a:off x="4855464" y="4169664"/>
-            <a:ext cx="676656" cy="475488"/>
+            <a:off x="4565350" y="4169664"/>
+            <a:ext cx="603504" cy="475488"/>
           </a:xfrm>
           <a:prstGeom prst="rect">
             <a:avLst>
@@ -32434,8 +32785,8 @@
         </p:nvSpPr>
         <p:spPr>
           <a:xfrm>
-            <a:off x="4855464" y="4169664"/>
-            <a:ext cx="676656" cy="475488"/>
+            <a:off x="4565350" y="4169664"/>
+            <a:ext cx="603504" cy="475488"/>
           </a:xfrm>
           <a:prstGeom prst="rect">
             <a:avLst/>
@@ -32473,8 +32824,8 @@
         </p:nvSpPr>
         <p:spPr>
           <a:xfrm>
-            <a:off x="5581498" y="4169664"/>
-            <a:ext cx="676656" cy="475488"/>
+            <a:off x="5218730" y="4169664"/>
+            <a:ext cx="603504" cy="475488"/>
           </a:xfrm>
           <a:prstGeom prst="rect">
             <a:avLst>
@@ -32500,8 +32851,8 @@
         </p:nvSpPr>
         <p:spPr>
           <a:xfrm>
-            <a:off x="5581498" y="4169664"/>
-            <a:ext cx="676656" cy="475488"/>
+            <a:off x="5218730" y="4169664"/>
+            <a:ext cx="603504" cy="475488"/>
           </a:xfrm>
           <a:prstGeom prst="rect">
             <a:avLst/>
@@ -32539,8 +32890,8 @@
         </p:nvSpPr>
         <p:spPr>
           <a:xfrm>
-            <a:off x="6307531" y="4169664"/>
-            <a:ext cx="676656" cy="475488"/>
+            <a:off x="5872111" y="4169664"/>
+            <a:ext cx="603504" cy="475488"/>
           </a:xfrm>
           <a:prstGeom prst="rect">
             <a:avLst>
@@ -32566,8 +32917,8 @@
         </p:nvSpPr>
         <p:spPr>
           <a:xfrm>
-            <a:off x="6307531" y="4169664"/>
-            <a:ext cx="676656" cy="475488"/>
+            <a:off x="5872111" y="4169664"/>
+            <a:ext cx="603504" cy="475488"/>
           </a:xfrm>
           <a:prstGeom prst="rect">
             <a:avLst/>
@@ -32605,8 +32956,8 @@
         </p:nvSpPr>
         <p:spPr>
           <a:xfrm>
-            <a:off x="7033565" y="4169664"/>
-            <a:ext cx="676656" cy="475488"/>
+            <a:off x="6525491" y="4169664"/>
+            <a:ext cx="603504" cy="475488"/>
           </a:xfrm>
           <a:prstGeom prst="rect">
             <a:avLst>
@@ -32632,8 +32983,8 @@
         </p:nvSpPr>
         <p:spPr>
           <a:xfrm>
-            <a:off x="7033565" y="4169664"/>
-            <a:ext cx="676656" cy="475488"/>
+            <a:off x="6525491" y="4169664"/>
+            <a:ext cx="603504" cy="475488"/>
           </a:xfrm>
           <a:prstGeom prst="rect">
             <a:avLst/>
@@ -32671,8 +33022,8 @@
         </p:nvSpPr>
         <p:spPr>
           <a:xfrm>
-            <a:off x="7759598" y="4169664"/>
-            <a:ext cx="676656" cy="475488"/>
+            <a:off x="7178871" y="4169664"/>
+            <a:ext cx="603504" cy="475488"/>
           </a:xfrm>
           <a:prstGeom prst="rect">
             <a:avLst>
@@ -32698,8 +33049,8 @@
         </p:nvSpPr>
         <p:spPr>
           <a:xfrm>
-            <a:off x="7759598" y="4169664"/>
-            <a:ext cx="676656" cy="475488"/>
+            <a:off x="7178871" y="4169664"/>
+            <a:ext cx="603504" cy="475488"/>
           </a:xfrm>
           <a:prstGeom prst="rect">
             <a:avLst/>
@@ -32723,7 +33074,73 @@
                 <a:ea typeface="Trebuchet MS" pitchFamily="34" charset="-122"/>
                 <a:cs typeface="Trebuchet MS" pitchFamily="34" charset="-120"/>
               </a:rPr>
-              <a:t>ine</a:t>
+              <a:t>i_e</a:t>
+            </a:r>
+            <a:endParaRPr lang="en-US" sz="900" dirty="0"/>
+          </a:p>
+        </p:txBody>
+      </p:sp>
+      <p:sp>
+        <p:nvSpPr>
+          <p:cNvPr id="57" name="Shape 55"/>
+          <p:cNvSpPr/>
+          <p:nvPr/>
+        </p:nvSpPr>
+        <p:spPr>
+          <a:xfrm>
+            <a:off x="7832252" y="4169664"/>
+            <a:ext cx="603504" cy="475488"/>
+          </a:xfrm>
+          <a:prstGeom prst="rect">
+            <a:avLst>
+              <a:gd name="adj" fmla="val 7692"/>
+            </a:avLst>
+          </a:prstGeom>
+          <a:solidFill>
+            <a:srgbClr val="FFFFFF"/>
+          </a:solidFill>
+          <a:ln w="12700">
+            <a:solidFill>
+              <a:srgbClr val="DB2777"/>
+            </a:solidFill>
+            <a:prstDash val="solid"/>
+          </a:ln>
+        </p:spPr>
+      </p:sp>
+      <p:sp>
+        <p:nvSpPr>
+          <p:cNvPr id="58" name="Text 56"/>
+          <p:cNvSpPr/>
+          <p:nvPr/>
+        </p:nvSpPr>
+        <p:spPr>
+          <a:xfrm>
+            <a:off x="7832252" y="4169664"/>
+            <a:ext cx="603504" cy="475488"/>
+          </a:xfrm>
+          <a:prstGeom prst="rect">
+            <a:avLst/>
+          </a:prstGeom>
+          <a:noFill/>
+          <a:ln/>
+        </p:spPr>
+        <p:txBody>
+          <a:bodyPr wrap="square" lIns="0" tIns="0" rIns="0" bIns="0" rtlCol="0" anchor="ctr"/>
+          <a:lstStyle/>
+          <a:p>
+            <a:pPr algn="ctr" indent="0" marL="0">
+              <a:buNone/>
+            </a:pPr>
+            <a:r>
+              <a:rPr lang="en-US" sz="900" b="1" dirty="0">
+                <a:solidFill>
+                  <a:srgbClr val="9D174D"/>
+                </a:solidFill>
+                <a:latin typeface="Trebuchet MS" pitchFamily="34" charset="0"/>
+                <a:ea typeface="Trebuchet MS" pitchFamily="34" charset="-122"/>
+                <a:cs typeface="Trebuchet MS" pitchFamily="34" charset="-120"/>
+              </a:rPr>
+              <a:t>n</a:t>
             </a:r>
             <a:endParaRPr lang="en-US" sz="900" dirty="0"/>
           </a:p>
@@ -33015,7 +33432,7 @@
                 <a:ea typeface="Calibri" pitchFamily="34" charset="-122"/>
                 <a:cs typeface="Calibri" pitchFamily="34" charset="-120"/>
               </a:rPr>
-              <a:t>Word Labs  •  wordlabs.app  •  Root: 'marine' = of the sea or ocean</a:t>
+              <a:t>Word Labs  •  wordlabs.app  •  Root: 'marine' = relating to the sea</a:t>
             </a:r>
             <a:endParaRPr lang="en-US" sz="800" dirty="0"/>
           </a:p>
@@ -34184,7 +34601,7 @@
                 <a:ea typeface="Calibri" pitchFamily="34" charset="-122"/>
                 <a:cs typeface="Calibri" pitchFamily="34" charset="-120"/>
               </a:rPr>
-              <a:t>Word Labs  •  wordlabs.app  •  Root: 'marine' = of the sea or ocean</a:t>
+              <a:t>Word Labs  •  wordlabs.app  •  Root: 'marine' = relating to the sea</a:t>
             </a:r>
             <a:endParaRPr lang="en-US" sz="800" dirty="0"/>
           </a:p>
@@ -34613,7 +35030,7 @@
                 <a:ea typeface="Trebuchet MS" pitchFamily="34" charset="-122"/>
                 <a:cs typeface="Trebuchet MS" pitchFamily="34" charset="-120"/>
               </a:rPr>
-              <a:t>-r</a:t>
+              <a:t>-er</a:t>
             </a:r>
             <a:endParaRPr lang="en-US" sz="1300" dirty="0"/>
           </a:p>
@@ -34766,7 +35183,7 @@
                 <a:ea typeface="Trebuchet MS" pitchFamily="34" charset="-122"/>
                 <a:cs typeface="Trebuchet MS" pitchFamily="34" charset="-120"/>
               </a:rPr>
-              <a:t>-ly</a:t>
+              <a:t>-s</a:t>
             </a:r>
             <a:endParaRPr lang="en-US" sz="1300" dirty="0"/>
           </a:p>
@@ -34774,1025 +35191,104 @@
       </p:sp>
       <p:sp>
         <p:nvSpPr>
-          <p:cNvPr id="28" name="Shape 26"/>
-          <p:cNvSpPr/>
-          <p:nvPr/>
-        </p:nvSpPr>
-        <p:spPr>
-          <a:xfrm>
-            <a:off x="365760" y="2404872"/>
-            <a:ext cx="2468880" cy="402336"/>
-          </a:xfrm>
-          <a:prstGeom prst="rect">
-            <a:avLst/>
-          </a:prstGeom>
-          <a:solidFill>
-            <a:srgbClr val="DDD6FE"/>
-          </a:solidFill>
-          <a:ln w="12700">
-            <a:solidFill>
-              <a:srgbClr val="E2E8F0"/>
-            </a:solidFill>
-            <a:prstDash val="solid"/>
-          </a:ln>
-        </p:spPr>
-      </p:sp>
-      <p:sp>
-        <p:nvSpPr>
-          <p:cNvPr id="29" name="Text 27"/>
-          <p:cNvSpPr/>
-          <p:nvPr/>
-        </p:nvSpPr>
-        <p:spPr>
-          <a:xfrm>
-            <a:off x="365760" y="2404872"/>
-            <a:ext cx="2468880" cy="402336"/>
-          </a:xfrm>
-          <a:prstGeom prst="rect">
-            <a:avLst/>
-          </a:prstGeom>
-          <a:noFill/>
-          <a:ln/>
-        </p:spPr>
-        <p:txBody>
-          <a:bodyPr wrap="square" lIns="0" tIns="0" rIns="0" bIns="0" rtlCol="0" anchor="ctr"/>
-          <a:lstStyle/>
-          <a:p>
-            <a:pPr algn="ctr" indent="0" marL="0">
-              <a:buNone/>
-            </a:pPr>
-            <a:r>
-              <a:rPr lang="en-US" sz="1300" b="1" dirty="0">
-                <a:solidFill>
-                  <a:srgbClr val="4C1D95"/>
+          <p:cNvPr id="28" name="Text 26"/>
+          <p:cNvSpPr/>
+          <p:nvPr/>
+        </p:nvSpPr>
+        <p:spPr>
+          <a:xfrm>
+            <a:off x="365760" y="3611880"/>
+            <a:ext cx="1828800" cy="347472"/>
+          </a:xfrm>
+          <a:prstGeom prst="rect">
+            <a:avLst/>
+          </a:prstGeom>
+          <a:noFill/>
+          <a:ln/>
+        </p:spPr>
+        <p:txBody>
+          <a:bodyPr wrap="square" lIns="0" tIns="0" rIns="0" bIns="0" rtlCol="0" anchor="ctr"/>
+          <a:lstStyle/>
+          <a:p>
+            <a:pPr algn="l" indent="0" marL="0">
+              <a:buNone/>
+            </a:pPr>
+            <a:r>
+              <a:rPr lang="en-US" sz="1200" b="1" dirty="0">
+                <a:solidFill>
+                  <a:srgbClr val="0F172A"/>
                 </a:solidFill>
                 <a:latin typeface="Trebuchet MS" pitchFamily="34" charset="0"/>
                 <a:ea typeface="Trebuchet MS" pitchFamily="34" charset="-122"/>
                 <a:cs typeface="Trebuchet MS" pitchFamily="34" charset="-120"/>
               </a:rPr>
-              <a:t>trans-</a:t>
-            </a:r>
-            <a:endParaRPr lang="en-US" sz="1300" dirty="0"/>
-          </a:p>
-        </p:txBody>
-      </p:sp>
-      <p:sp>
-        <p:nvSpPr>
-          <p:cNvPr id="30" name="Shape 28"/>
-          <p:cNvSpPr/>
-          <p:nvPr/>
-        </p:nvSpPr>
-        <p:spPr>
-          <a:xfrm>
-            <a:off x="2971800" y="2404872"/>
-            <a:ext cx="2834640" cy="402336"/>
-          </a:xfrm>
-          <a:prstGeom prst="rect">
-            <a:avLst/>
-          </a:prstGeom>
-          <a:solidFill>
-            <a:srgbClr val="F8FAFC"/>
-          </a:solidFill>
-          <a:ln w="12700">
-            <a:solidFill>
-              <a:srgbClr val="E2E8F0"/>
-            </a:solidFill>
-            <a:prstDash val="solid"/>
-          </a:ln>
-        </p:spPr>
-      </p:sp>
-      <p:sp>
-        <p:nvSpPr>
-          <p:cNvPr id="31" name="Shape 29"/>
-          <p:cNvSpPr/>
-          <p:nvPr/>
-        </p:nvSpPr>
-        <p:spPr>
-          <a:xfrm>
-            <a:off x="5943600" y="2404872"/>
-            <a:ext cx="2834640" cy="402336"/>
-          </a:xfrm>
-          <a:prstGeom prst="rect">
-            <a:avLst/>
-          </a:prstGeom>
-          <a:solidFill>
-            <a:srgbClr val="FCE7F3"/>
-          </a:solidFill>
-          <a:ln w="12700">
-            <a:solidFill>
-              <a:srgbClr val="E2E8F0"/>
-            </a:solidFill>
-            <a:prstDash val="solid"/>
-          </a:ln>
-        </p:spPr>
-      </p:sp>
-      <p:sp>
-        <p:nvSpPr>
-          <p:cNvPr id="32" name="Text 30"/>
-          <p:cNvSpPr/>
-          <p:nvPr/>
-        </p:nvSpPr>
-        <p:spPr>
-          <a:xfrm>
-            <a:off x="5943600" y="2404872"/>
-            <a:ext cx="2834640" cy="402336"/>
-          </a:xfrm>
-          <a:prstGeom prst="rect">
-            <a:avLst/>
-          </a:prstGeom>
-          <a:noFill/>
-          <a:ln/>
-        </p:spPr>
-        <p:txBody>
-          <a:bodyPr wrap="square" lIns="0" tIns="0" rIns="0" bIns="0" rtlCol="0" anchor="ctr"/>
-          <a:lstStyle/>
-          <a:p>
-            <a:pPr algn="ctr" indent="0" marL="0">
-              <a:buNone/>
-            </a:pPr>
-            <a:r>
-              <a:rPr lang="en-US" sz="1300" b="1" dirty="0">
-                <a:solidFill>
-                  <a:srgbClr val="9D174D"/>
+              <a:t>Sample words:</a:t>
+            </a:r>
+            <a:endParaRPr lang="en-US" sz="1200" dirty="0"/>
+          </a:p>
+        </p:txBody>
+      </p:sp>
+      <p:sp>
+        <p:nvSpPr>
+          <p:cNvPr id="29" name="Shape 27"/>
+          <p:cNvSpPr/>
+          <p:nvPr/>
+        </p:nvSpPr>
+        <p:spPr>
+          <a:xfrm>
+            <a:off x="365760" y="4023360"/>
+            <a:ext cx="2011680" cy="402336"/>
+          </a:xfrm>
+          <a:prstGeom prst="rect">
+            <a:avLst>
+              <a:gd name="adj" fmla="val 13636"/>
+            </a:avLst>
+          </a:prstGeom>
+          <a:solidFill>
+            <a:srgbClr val="EEF2FF"/>
+          </a:solidFill>
+          <a:ln w="12700">
+            <a:solidFill>
+              <a:srgbClr val="6366F1"/>
+            </a:solidFill>
+            <a:prstDash val="solid"/>
+          </a:ln>
+        </p:spPr>
+      </p:sp>
+      <p:sp>
+        <p:nvSpPr>
+          <p:cNvPr id="30" name="Text 28"/>
+          <p:cNvSpPr/>
+          <p:nvPr/>
+        </p:nvSpPr>
+        <p:spPr>
+          <a:xfrm>
+            <a:off x="365760" y="4023360"/>
+            <a:ext cx="2011680" cy="402336"/>
+          </a:xfrm>
+          <a:prstGeom prst="rect">
+            <a:avLst/>
+          </a:prstGeom>
+          <a:noFill/>
+          <a:ln/>
+        </p:spPr>
+        <p:txBody>
+          <a:bodyPr wrap="square" lIns="0" tIns="0" rIns="0" bIns="0" rtlCol="0" anchor="ctr"/>
+          <a:lstStyle/>
+          <a:p>
+            <a:pPr algn="ctr" indent="0" marL="0">
+              <a:buNone/>
+            </a:pPr>
+            <a:r>
+              <a:rPr lang="en-US" sz="1200" b="1" dirty="0">
+                <a:solidFill>
+                  <a:srgbClr val="4338CA"/>
                 </a:solidFill>
                 <a:latin typeface="Trebuchet MS" pitchFamily="34" charset="0"/>
                 <a:ea typeface="Trebuchet MS" pitchFamily="34" charset="-122"/>
                 <a:cs typeface="Trebuchet MS" pitchFamily="34" charset="-120"/>
               </a:rPr>
-              <a:t>-er</a:t>
-            </a:r>
-            <a:endParaRPr lang="en-US" sz="1300" dirty="0"/>
-          </a:p>
-        </p:txBody>
-      </p:sp>
-      <p:sp>
-        <p:nvSpPr>
-          <p:cNvPr id="33" name="Shape 31"/>
-          <p:cNvSpPr/>
-          <p:nvPr/>
-        </p:nvSpPr>
-        <p:spPr>
-          <a:xfrm>
-            <a:off x="365760" y="2825496"/>
-            <a:ext cx="2468880" cy="402336"/>
-          </a:xfrm>
-          <a:prstGeom prst="rect">
-            <a:avLst/>
-          </a:prstGeom>
-          <a:solidFill>
-            <a:srgbClr val="DDD6FE"/>
-          </a:solidFill>
-          <a:ln w="12700">
-            <a:solidFill>
-              <a:srgbClr val="E2E8F0"/>
-            </a:solidFill>
-            <a:prstDash val="solid"/>
-          </a:ln>
-        </p:spPr>
-      </p:sp>
-      <p:sp>
-        <p:nvSpPr>
-          <p:cNvPr id="34" name="Text 32"/>
-          <p:cNvSpPr/>
-          <p:nvPr/>
-        </p:nvSpPr>
-        <p:spPr>
-          <a:xfrm>
-            <a:off x="365760" y="2825496"/>
-            <a:ext cx="2468880" cy="402336"/>
-          </a:xfrm>
-          <a:prstGeom prst="rect">
-            <a:avLst/>
-          </a:prstGeom>
-          <a:noFill/>
-          <a:ln/>
-        </p:spPr>
-        <p:txBody>
-          <a:bodyPr wrap="square" lIns="0" tIns="0" rIns="0" bIns="0" rtlCol="0" anchor="ctr"/>
-          <a:lstStyle/>
-          <a:p>
-            <a:pPr algn="ctr" indent="0" marL="0">
-              <a:buNone/>
-            </a:pPr>
-            <a:r>
-              <a:rPr lang="en-US" sz="1300" b="1" dirty="0">
-                <a:solidFill>
-                  <a:srgbClr val="4C1D95"/>
-                </a:solidFill>
-                <a:latin typeface="Trebuchet MS" pitchFamily="34" charset="0"/>
-                <a:ea typeface="Trebuchet MS" pitchFamily="34" charset="-122"/>
-                <a:cs typeface="Trebuchet MS" pitchFamily="34" charset="-120"/>
-              </a:rPr>
-              <a:t>aqua-</a:t>
-            </a:r>
-            <a:endParaRPr lang="en-US" sz="1300" dirty="0"/>
-          </a:p>
-        </p:txBody>
-      </p:sp>
-      <p:sp>
-        <p:nvSpPr>
-          <p:cNvPr id="35" name="Shape 33"/>
-          <p:cNvSpPr/>
-          <p:nvPr/>
-        </p:nvSpPr>
-        <p:spPr>
-          <a:xfrm>
-            <a:off x="2971800" y="2825496"/>
-            <a:ext cx="2834640" cy="402336"/>
-          </a:xfrm>
-          <a:prstGeom prst="rect">
-            <a:avLst/>
-          </a:prstGeom>
-          <a:solidFill>
-            <a:srgbClr val="F1F5F9"/>
-          </a:solidFill>
-          <a:ln w="12700">
-            <a:solidFill>
-              <a:srgbClr val="E2E8F0"/>
-            </a:solidFill>
-            <a:prstDash val="solid"/>
-          </a:ln>
-        </p:spPr>
-      </p:sp>
-      <p:sp>
-        <p:nvSpPr>
-          <p:cNvPr id="36" name="Shape 34"/>
-          <p:cNvSpPr/>
-          <p:nvPr/>
-        </p:nvSpPr>
-        <p:spPr>
-          <a:xfrm>
-            <a:off x="5943600" y="2825496"/>
-            <a:ext cx="2834640" cy="402336"/>
-          </a:xfrm>
-          <a:prstGeom prst="rect">
-            <a:avLst/>
-          </a:prstGeom>
-          <a:solidFill>
-            <a:srgbClr val="FCE7F3"/>
-          </a:solidFill>
-          <a:ln w="12700">
-            <a:solidFill>
-              <a:srgbClr val="E2E8F0"/>
-            </a:solidFill>
-            <a:prstDash val="solid"/>
-          </a:ln>
-        </p:spPr>
-      </p:sp>
-      <p:sp>
-        <p:nvSpPr>
-          <p:cNvPr id="37" name="Text 35"/>
-          <p:cNvSpPr/>
-          <p:nvPr/>
-        </p:nvSpPr>
-        <p:spPr>
-          <a:xfrm>
-            <a:off x="5943600" y="2825496"/>
-            <a:ext cx="2834640" cy="402336"/>
-          </a:xfrm>
-          <a:prstGeom prst="rect">
-            <a:avLst/>
-          </a:prstGeom>
-          <a:noFill/>
-          <a:ln/>
-        </p:spPr>
-        <p:txBody>
-          <a:bodyPr wrap="square" lIns="0" tIns="0" rIns="0" bIns="0" rtlCol="0" anchor="ctr"/>
-          <a:lstStyle/>
-          <a:p>
-            <a:pPr algn="ctr" indent="0" marL="0">
-              <a:buNone/>
-            </a:pPr>
-            <a:r>
-              <a:rPr lang="en-US" sz="1300" b="1" dirty="0">
-                <a:solidFill>
-                  <a:srgbClr val="9D174D"/>
-                </a:solidFill>
-                <a:latin typeface="Trebuchet MS" pitchFamily="34" charset="0"/>
-                <a:ea typeface="Trebuchet MS" pitchFamily="34" charset="-122"/>
-                <a:cs typeface="Trebuchet MS" pitchFamily="34" charset="-120"/>
-              </a:rPr>
-              <a:t>-s</a:t>
-            </a:r>
-            <a:endParaRPr lang="en-US" sz="1300" dirty="0"/>
-          </a:p>
-        </p:txBody>
-      </p:sp>
-      <p:sp>
-        <p:nvSpPr>
-          <p:cNvPr id="38" name="Shape 36"/>
-          <p:cNvSpPr/>
-          <p:nvPr/>
-        </p:nvSpPr>
-        <p:spPr>
-          <a:xfrm>
-            <a:off x="365760" y="3246120"/>
-            <a:ext cx="2468880" cy="402336"/>
-          </a:xfrm>
-          <a:prstGeom prst="rect">
-            <a:avLst/>
-          </a:prstGeom>
-          <a:solidFill>
-            <a:srgbClr val="DDD6FE"/>
-          </a:solidFill>
-          <a:ln w="12700">
-            <a:solidFill>
-              <a:srgbClr val="E2E8F0"/>
-            </a:solidFill>
-            <a:prstDash val="solid"/>
-          </a:ln>
-        </p:spPr>
-      </p:sp>
-      <p:sp>
-        <p:nvSpPr>
-          <p:cNvPr id="39" name="Text 37"/>
-          <p:cNvSpPr/>
-          <p:nvPr/>
-        </p:nvSpPr>
-        <p:spPr>
-          <a:xfrm>
-            <a:off x="365760" y="3246120"/>
-            <a:ext cx="2468880" cy="402336"/>
-          </a:xfrm>
-          <a:prstGeom prst="rect">
-            <a:avLst/>
-          </a:prstGeom>
-          <a:noFill/>
-          <a:ln/>
-        </p:spPr>
-        <p:txBody>
-          <a:bodyPr wrap="square" lIns="0" tIns="0" rIns="0" bIns="0" rtlCol="0" anchor="ctr"/>
-          <a:lstStyle/>
-          <a:p>
-            <a:pPr algn="ctr" indent="0" marL="0">
-              <a:buNone/>
-            </a:pPr>
-            <a:r>
-              <a:rPr lang="en-US" sz="1300" b="1" dirty="0">
-                <a:solidFill>
-                  <a:srgbClr val="4C1D95"/>
-                </a:solidFill>
-                <a:latin typeface="Trebuchet MS" pitchFamily="34" charset="0"/>
-                <a:ea typeface="Trebuchet MS" pitchFamily="34" charset="-122"/>
-                <a:cs typeface="Trebuchet MS" pitchFamily="34" charset="-120"/>
-              </a:rPr>
-              <a:t>hyper-</a:t>
-            </a:r>
-            <a:endParaRPr lang="en-US" sz="1300" dirty="0"/>
-          </a:p>
-        </p:txBody>
-      </p:sp>
-      <p:sp>
-        <p:nvSpPr>
-          <p:cNvPr id="40" name="Shape 38"/>
-          <p:cNvSpPr/>
-          <p:nvPr/>
-        </p:nvSpPr>
-        <p:spPr>
-          <a:xfrm>
-            <a:off x="2971800" y="3246120"/>
-            <a:ext cx="2834640" cy="402336"/>
-          </a:xfrm>
-          <a:prstGeom prst="rect">
-            <a:avLst/>
-          </a:prstGeom>
-          <a:solidFill>
-            <a:srgbClr val="F8FAFC"/>
-          </a:solidFill>
-          <a:ln w="12700">
-            <a:solidFill>
-              <a:srgbClr val="E2E8F0"/>
-            </a:solidFill>
-            <a:prstDash val="solid"/>
-          </a:ln>
-        </p:spPr>
-      </p:sp>
-      <p:sp>
-        <p:nvSpPr>
-          <p:cNvPr id="41" name="Shape 39"/>
-          <p:cNvSpPr/>
-          <p:nvPr/>
-        </p:nvSpPr>
-        <p:spPr>
-          <a:xfrm>
-            <a:off x="5943600" y="3246120"/>
-            <a:ext cx="2834640" cy="402336"/>
-          </a:xfrm>
-          <a:prstGeom prst="rect">
-            <a:avLst/>
-          </a:prstGeom>
-          <a:solidFill>
-            <a:srgbClr val="FCE7F3"/>
-          </a:solidFill>
-          <a:ln w="12700">
-            <a:solidFill>
-              <a:srgbClr val="E2E8F0"/>
-            </a:solidFill>
-            <a:prstDash val="solid"/>
-          </a:ln>
-        </p:spPr>
-      </p:sp>
-      <p:sp>
-        <p:nvSpPr>
-          <p:cNvPr id="42" name="Text 40"/>
-          <p:cNvSpPr/>
-          <p:nvPr/>
-        </p:nvSpPr>
-        <p:spPr>
-          <a:xfrm>
-            <a:off x="5943600" y="3246120"/>
-            <a:ext cx="2834640" cy="402336"/>
-          </a:xfrm>
-          <a:prstGeom prst="rect">
-            <a:avLst/>
-          </a:prstGeom>
-          <a:noFill/>
-          <a:ln/>
-        </p:spPr>
-        <p:txBody>
-          <a:bodyPr wrap="square" lIns="0" tIns="0" rIns="0" bIns="0" rtlCol="0" anchor="ctr"/>
-          <a:lstStyle/>
-          <a:p>
-            <a:pPr algn="ctr" indent="0" marL="0">
-              <a:buNone/>
-            </a:pPr>
-            <a:r>
-              <a:rPr lang="en-US" sz="1300" b="1" dirty="0">
-                <a:solidFill>
-                  <a:srgbClr val="9D174D"/>
-                </a:solidFill>
-                <a:latin typeface="Trebuchet MS" pitchFamily="34" charset="0"/>
-                <a:ea typeface="Trebuchet MS" pitchFamily="34" charset="-122"/>
-                <a:cs typeface="Trebuchet MS" pitchFamily="34" charset="-120"/>
-              </a:rPr>
-              <a:t>-ade</a:t>
-            </a:r>
-            <a:endParaRPr lang="en-US" sz="1300" dirty="0"/>
-          </a:p>
-        </p:txBody>
-      </p:sp>
-      <p:sp>
-        <p:nvSpPr>
-          <p:cNvPr id="43" name="Text 41"/>
-          <p:cNvSpPr/>
-          <p:nvPr/>
-        </p:nvSpPr>
-        <p:spPr>
-          <a:xfrm>
-            <a:off x="365760" y="3611880"/>
-            <a:ext cx="1828800" cy="347472"/>
-          </a:xfrm>
-          <a:prstGeom prst="rect">
-            <a:avLst/>
-          </a:prstGeom>
-          <a:noFill/>
-          <a:ln/>
-        </p:spPr>
-        <p:txBody>
-          <a:bodyPr wrap="square" lIns="0" tIns="0" rIns="0" bIns="0" rtlCol="0" anchor="ctr"/>
-          <a:lstStyle/>
-          <a:p>
-            <a:pPr algn="l" indent="0" marL="0">
-              <a:buNone/>
-            </a:pPr>
-            <a:r>
-              <a:rPr lang="en-US" sz="1200" b="1" dirty="0">
-                <a:solidFill>
-                  <a:srgbClr val="0F172A"/>
-                </a:solidFill>
-                <a:latin typeface="Trebuchet MS" pitchFamily="34" charset="0"/>
-                <a:ea typeface="Trebuchet MS" pitchFamily="34" charset="-122"/>
-                <a:cs typeface="Trebuchet MS" pitchFamily="34" charset="-120"/>
-              </a:rPr>
-              <a:t>Sample words:</a:t>
-            </a:r>
-            <a:endParaRPr lang="en-US" sz="1200" dirty="0"/>
-          </a:p>
-        </p:txBody>
-      </p:sp>
-      <p:sp>
-        <p:nvSpPr>
-          <p:cNvPr id="44" name="Shape 42"/>
-          <p:cNvSpPr/>
-          <p:nvPr/>
-        </p:nvSpPr>
-        <p:spPr>
-          <a:xfrm>
-            <a:off x="365760" y="4023360"/>
-            <a:ext cx="2011680" cy="402336"/>
-          </a:xfrm>
-          <a:prstGeom prst="rect">
-            <a:avLst>
-              <a:gd name="adj" fmla="val 13636"/>
-            </a:avLst>
-          </a:prstGeom>
-          <a:solidFill>
-            <a:srgbClr val="EEF2FF"/>
-          </a:solidFill>
-          <a:ln w="12700">
-            <a:solidFill>
-              <a:srgbClr val="6366F1"/>
-            </a:solidFill>
-            <a:prstDash val="solid"/>
-          </a:ln>
-        </p:spPr>
-      </p:sp>
-      <p:sp>
-        <p:nvSpPr>
-          <p:cNvPr id="45" name="Text 43"/>
-          <p:cNvSpPr/>
-          <p:nvPr/>
-        </p:nvSpPr>
-        <p:spPr>
-          <a:xfrm>
-            <a:off x="365760" y="4023360"/>
-            <a:ext cx="2011680" cy="402336"/>
-          </a:xfrm>
-          <a:prstGeom prst="rect">
-            <a:avLst/>
-          </a:prstGeom>
-          <a:noFill/>
-          <a:ln/>
-        </p:spPr>
-        <p:txBody>
-          <a:bodyPr wrap="square" lIns="0" tIns="0" rIns="0" bIns="0" rtlCol="0" anchor="ctr"/>
-          <a:lstStyle/>
-          <a:p>
-            <a:pPr algn="ctr" indent="0" marL="0">
-              <a:buNone/>
-            </a:pPr>
-            <a:r>
-              <a:rPr lang="en-US" sz="1200" b="1" dirty="0">
-                <a:solidFill>
-                  <a:srgbClr val="4338CA"/>
-                </a:solidFill>
-                <a:latin typeface="Trebuchet MS" pitchFamily="34" charset="0"/>
-                <a:ea typeface="Trebuchet MS" pitchFamily="34" charset="-122"/>
-                <a:cs typeface="Trebuchet MS" pitchFamily="34" charset="-120"/>
-              </a:rPr>
               <a:t>marine</a:t>
-            </a:r>
-            <a:endParaRPr lang="en-US" sz="1200" dirty="0"/>
-          </a:p>
-        </p:txBody>
-      </p:sp>
-      <p:sp>
-        <p:nvSpPr>
-          <p:cNvPr id="46" name="Shape 44"/>
-          <p:cNvSpPr/>
-          <p:nvPr/>
-        </p:nvSpPr>
-        <p:spPr>
-          <a:xfrm>
-            <a:off x="2542032" y="4023360"/>
-            <a:ext cx="2011680" cy="402336"/>
-          </a:xfrm>
-          <a:prstGeom prst="rect">
-            <a:avLst>
-              <a:gd name="adj" fmla="val 13636"/>
-            </a:avLst>
-          </a:prstGeom>
-          <a:solidFill>
-            <a:srgbClr val="EEF2FF"/>
-          </a:solidFill>
-          <a:ln w="12700">
-            <a:solidFill>
-              <a:srgbClr val="6366F1"/>
-            </a:solidFill>
-            <a:prstDash val="solid"/>
-          </a:ln>
-        </p:spPr>
-      </p:sp>
-      <p:sp>
-        <p:nvSpPr>
-          <p:cNvPr id="47" name="Text 45"/>
-          <p:cNvSpPr/>
-          <p:nvPr/>
-        </p:nvSpPr>
-        <p:spPr>
-          <a:xfrm>
-            <a:off x="2542032" y="4023360"/>
-            <a:ext cx="2011680" cy="402336"/>
-          </a:xfrm>
-          <a:prstGeom prst="rect">
-            <a:avLst/>
-          </a:prstGeom>
-          <a:noFill/>
-          <a:ln/>
-        </p:spPr>
-        <p:txBody>
-          <a:bodyPr wrap="square" lIns="0" tIns="0" rIns="0" bIns="0" rtlCol="0" anchor="ctr"/>
-          <a:lstStyle/>
-          <a:p>
-            <a:pPr algn="ctr" indent="0" marL="0">
-              <a:buNone/>
-            </a:pPr>
-            <a:r>
-              <a:rPr lang="en-US" sz="1200" b="1" dirty="0">
-                <a:solidFill>
-                  <a:srgbClr val="4338CA"/>
-                </a:solidFill>
-                <a:latin typeface="Trebuchet MS" pitchFamily="34" charset="0"/>
-                <a:ea typeface="Trebuchet MS" pitchFamily="34" charset="-122"/>
-                <a:cs typeface="Trebuchet MS" pitchFamily="34" charset="-120"/>
-              </a:rPr>
-              <a:t>submarine</a:t>
-            </a:r>
-            <a:endParaRPr lang="en-US" sz="1200" dirty="0"/>
-          </a:p>
-        </p:txBody>
-      </p:sp>
-      <p:sp>
-        <p:nvSpPr>
-          <p:cNvPr id="48" name="Shape 46"/>
-          <p:cNvSpPr/>
-          <p:nvPr/>
-        </p:nvSpPr>
-        <p:spPr>
-          <a:xfrm>
-            <a:off x="4718304" y="4023360"/>
-            <a:ext cx="2011680" cy="402336"/>
-          </a:xfrm>
-          <a:prstGeom prst="rect">
-            <a:avLst>
-              <a:gd name="adj" fmla="val 13636"/>
-            </a:avLst>
-          </a:prstGeom>
-          <a:solidFill>
-            <a:srgbClr val="EEF2FF"/>
-          </a:solidFill>
-          <a:ln w="12700">
-            <a:solidFill>
-              <a:srgbClr val="6366F1"/>
-            </a:solidFill>
-            <a:prstDash val="solid"/>
-          </a:ln>
-        </p:spPr>
-      </p:sp>
-      <p:sp>
-        <p:nvSpPr>
-          <p:cNvPr id="49" name="Text 47"/>
-          <p:cNvSpPr/>
-          <p:nvPr/>
-        </p:nvSpPr>
-        <p:spPr>
-          <a:xfrm>
-            <a:off x="4718304" y="4023360"/>
-            <a:ext cx="2011680" cy="402336"/>
-          </a:xfrm>
-          <a:prstGeom prst="rect">
-            <a:avLst/>
-          </a:prstGeom>
-          <a:noFill/>
-          <a:ln/>
-        </p:spPr>
-        <p:txBody>
-          <a:bodyPr wrap="square" lIns="0" tIns="0" rIns="0" bIns="0" rtlCol="0" anchor="ctr"/>
-          <a:lstStyle/>
-          <a:p>
-            <a:pPr algn="ctr" indent="0" marL="0">
-              <a:buNone/>
-            </a:pPr>
-            <a:r>
-              <a:rPr lang="en-US" sz="1200" b="1" dirty="0">
-                <a:solidFill>
-                  <a:srgbClr val="4338CA"/>
-                </a:solidFill>
-                <a:latin typeface="Trebuchet MS" pitchFamily="34" charset="0"/>
-                <a:ea typeface="Trebuchet MS" pitchFamily="34" charset="-122"/>
-                <a:cs typeface="Trebuchet MS" pitchFamily="34" charset="-120"/>
-              </a:rPr>
-              <a:t>mariner</a:t>
-            </a:r>
-            <a:endParaRPr lang="en-US" sz="1200" dirty="0"/>
-          </a:p>
-        </p:txBody>
-      </p:sp>
-      <p:sp>
-        <p:nvSpPr>
-          <p:cNvPr id="50" name="Shape 48"/>
-          <p:cNvSpPr/>
-          <p:nvPr/>
-        </p:nvSpPr>
-        <p:spPr>
-          <a:xfrm>
-            <a:off x="6894576" y="4023360"/>
-            <a:ext cx="2011680" cy="402336"/>
-          </a:xfrm>
-          <a:prstGeom prst="rect">
-            <a:avLst>
-              <a:gd name="adj" fmla="val 13636"/>
-            </a:avLst>
-          </a:prstGeom>
-          <a:solidFill>
-            <a:srgbClr val="EEF2FF"/>
-          </a:solidFill>
-          <a:ln w="12700">
-            <a:solidFill>
-              <a:srgbClr val="6366F1"/>
-            </a:solidFill>
-            <a:prstDash val="solid"/>
-          </a:ln>
-        </p:spPr>
-      </p:sp>
-      <p:sp>
-        <p:nvSpPr>
-          <p:cNvPr id="51" name="Text 49"/>
-          <p:cNvSpPr/>
-          <p:nvPr/>
-        </p:nvSpPr>
-        <p:spPr>
-          <a:xfrm>
-            <a:off x="6894576" y="4023360"/>
-            <a:ext cx="2011680" cy="402336"/>
-          </a:xfrm>
-          <a:prstGeom prst="rect">
-            <a:avLst/>
-          </a:prstGeom>
-          <a:noFill/>
-          <a:ln/>
-        </p:spPr>
-        <p:txBody>
-          <a:bodyPr wrap="square" lIns="0" tIns="0" rIns="0" bIns="0" rtlCol="0" anchor="ctr"/>
-          <a:lstStyle/>
-          <a:p>
-            <a:pPr algn="ctr" indent="0" marL="0">
-              <a:buNone/>
-            </a:pPr>
-            <a:r>
-              <a:rPr lang="en-US" sz="1200" b="1" dirty="0">
-                <a:solidFill>
-                  <a:srgbClr val="4338CA"/>
-                </a:solidFill>
-                <a:latin typeface="Trebuchet MS" pitchFamily="34" charset="0"/>
-                <a:ea typeface="Trebuchet MS" pitchFamily="34" charset="-122"/>
-                <a:cs typeface="Trebuchet MS" pitchFamily="34" charset="-120"/>
-              </a:rPr>
-              <a:t>marines</a:t>
-            </a:r>
-            <a:endParaRPr lang="en-US" sz="1200" dirty="0"/>
-          </a:p>
-        </p:txBody>
-      </p:sp>
-      <p:sp>
-        <p:nvSpPr>
-          <p:cNvPr id="52" name="Shape 50"/>
-          <p:cNvSpPr/>
-          <p:nvPr/>
-        </p:nvSpPr>
-        <p:spPr>
-          <a:xfrm>
-            <a:off x="365760" y="4498848"/>
-            <a:ext cx="2011680" cy="402336"/>
-          </a:xfrm>
-          <a:prstGeom prst="rect">
-            <a:avLst>
-              <a:gd name="adj" fmla="val 13636"/>
-            </a:avLst>
-          </a:prstGeom>
-          <a:solidFill>
-            <a:srgbClr val="EEF2FF"/>
-          </a:solidFill>
-          <a:ln w="12700">
-            <a:solidFill>
-              <a:srgbClr val="6366F1"/>
-            </a:solidFill>
-            <a:prstDash val="solid"/>
-          </a:ln>
-        </p:spPr>
-      </p:sp>
-      <p:sp>
-        <p:nvSpPr>
-          <p:cNvPr id="53" name="Text 51"/>
-          <p:cNvSpPr/>
-          <p:nvPr/>
-        </p:nvSpPr>
-        <p:spPr>
-          <a:xfrm>
-            <a:off x="365760" y="4498848"/>
-            <a:ext cx="2011680" cy="402336"/>
-          </a:xfrm>
-          <a:prstGeom prst="rect">
-            <a:avLst/>
-          </a:prstGeom>
-          <a:noFill/>
-          <a:ln/>
-        </p:spPr>
-        <p:txBody>
-          <a:bodyPr wrap="square" lIns="0" tIns="0" rIns="0" bIns="0" rtlCol="0" anchor="ctr"/>
-          <a:lstStyle/>
-          <a:p>
-            <a:pPr algn="ctr" indent="0" marL="0">
-              <a:buNone/>
-            </a:pPr>
-            <a:r>
-              <a:rPr lang="en-US" sz="1200" b="1" dirty="0">
-                <a:solidFill>
-                  <a:srgbClr val="4338CA"/>
-                </a:solidFill>
-                <a:latin typeface="Trebuchet MS" pitchFamily="34" charset="0"/>
-                <a:ea typeface="Trebuchet MS" pitchFamily="34" charset="-122"/>
-                <a:cs typeface="Trebuchet MS" pitchFamily="34" charset="-120"/>
-              </a:rPr>
-              <a:t>ultramarine</a:t>
-            </a:r>
-            <a:endParaRPr lang="en-US" sz="1200" dirty="0"/>
-          </a:p>
-        </p:txBody>
-      </p:sp>
-      <p:sp>
-        <p:nvSpPr>
-          <p:cNvPr id="54" name="Shape 52"/>
-          <p:cNvSpPr/>
-          <p:nvPr/>
-        </p:nvSpPr>
-        <p:spPr>
-          <a:xfrm>
-            <a:off x="2542032" y="4498848"/>
-            <a:ext cx="2011680" cy="402336"/>
-          </a:xfrm>
-          <a:prstGeom prst="rect">
-            <a:avLst>
-              <a:gd name="adj" fmla="val 13636"/>
-            </a:avLst>
-          </a:prstGeom>
-          <a:solidFill>
-            <a:srgbClr val="EEF2FF"/>
-          </a:solidFill>
-          <a:ln w="12700">
-            <a:solidFill>
-              <a:srgbClr val="6366F1"/>
-            </a:solidFill>
-            <a:prstDash val="solid"/>
-          </a:ln>
-        </p:spPr>
-      </p:sp>
-      <p:sp>
-        <p:nvSpPr>
-          <p:cNvPr id="55" name="Text 53"/>
-          <p:cNvSpPr/>
-          <p:nvPr/>
-        </p:nvSpPr>
-        <p:spPr>
-          <a:xfrm>
-            <a:off x="2542032" y="4498848"/>
-            <a:ext cx="2011680" cy="402336"/>
-          </a:xfrm>
-          <a:prstGeom prst="rect">
-            <a:avLst/>
-          </a:prstGeom>
-          <a:noFill/>
-          <a:ln/>
-        </p:spPr>
-        <p:txBody>
-          <a:bodyPr wrap="square" lIns="0" tIns="0" rIns="0" bIns="0" rtlCol="0" anchor="ctr"/>
-          <a:lstStyle/>
-          <a:p>
-            <a:pPr algn="ctr" indent="0" marL="0">
-              <a:buNone/>
-            </a:pPr>
-            <a:r>
-              <a:rPr lang="en-US" sz="1200" b="1" dirty="0">
-                <a:solidFill>
-                  <a:srgbClr val="4338CA"/>
-                </a:solidFill>
-                <a:latin typeface="Trebuchet MS" pitchFamily="34" charset="0"/>
-                <a:ea typeface="Trebuchet MS" pitchFamily="34" charset="-122"/>
-                <a:cs typeface="Trebuchet MS" pitchFamily="34" charset="-120"/>
-              </a:rPr>
-              <a:t>submarine</a:t>
-            </a:r>
-            <a:endParaRPr lang="en-US" sz="1200" dirty="0"/>
-          </a:p>
-        </p:txBody>
-      </p:sp>
-      <p:sp>
-        <p:nvSpPr>
-          <p:cNvPr id="56" name="Shape 54"/>
-          <p:cNvSpPr/>
-          <p:nvPr/>
-        </p:nvSpPr>
-        <p:spPr>
-          <a:xfrm>
-            <a:off x="4718304" y="4498848"/>
-            <a:ext cx="2011680" cy="402336"/>
-          </a:xfrm>
-          <a:prstGeom prst="rect">
-            <a:avLst>
-              <a:gd name="adj" fmla="val 13636"/>
-            </a:avLst>
-          </a:prstGeom>
-          <a:solidFill>
-            <a:srgbClr val="EEF2FF"/>
-          </a:solidFill>
-          <a:ln w="12700">
-            <a:solidFill>
-              <a:srgbClr val="6366F1"/>
-            </a:solidFill>
-            <a:prstDash val="solid"/>
-          </a:ln>
-        </p:spPr>
-      </p:sp>
-      <p:sp>
-        <p:nvSpPr>
-          <p:cNvPr id="57" name="Text 55"/>
-          <p:cNvSpPr/>
-          <p:nvPr/>
-        </p:nvSpPr>
-        <p:spPr>
-          <a:xfrm>
-            <a:off x="4718304" y="4498848"/>
-            <a:ext cx="2011680" cy="402336"/>
-          </a:xfrm>
-          <a:prstGeom prst="rect">
-            <a:avLst/>
-          </a:prstGeom>
-          <a:noFill/>
-          <a:ln/>
-        </p:spPr>
-        <p:txBody>
-          <a:bodyPr wrap="square" lIns="0" tIns="0" rIns="0" bIns="0" rtlCol="0" anchor="ctr"/>
-          <a:lstStyle/>
-          <a:p>
-            <a:pPr algn="ctr" indent="0" marL="0">
-              <a:buNone/>
-            </a:pPr>
-            <a:r>
-              <a:rPr lang="en-US" sz="1200" b="1" dirty="0">
-                <a:solidFill>
-                  <a:srgbClr val="4338CA"/>
-                </a:solidFill>
-                <a:latin typeface="Trebuchet MS" pitchFamily="34" charset="0"/>
-                <a:ea typeface="Trebuchet MS" pitchFamily="34" charset="-122"/>
-                <a:cs typeface="Trebuchet MS" pitchFamily="34" charset="-120"/>
-              </a:rPr>
-              <a:t>marinely</a:t>
-            </a:r>
-            <a:endParaRPr lang="en-US" sz="1200" dirty="0"/>
-          </a:p>
-        </p:txBody>
-      </p:sp>
-      <p:sp>
-        <p:nvSpPr>
-          <p:cNvPr id="58" name="Shape 56"/>
-          <p:cNvSpPr/>
-          <p:nvPr/>
-        </p:nvSpPr>
-        <p:spPr>
-          <a:xfrm>
-            <a:off x="6894576" y="4498848"/>
-            <a:ext cx="2011680" cy="402336"/>
-          </a:xfrm>
-          <a:prstGeom prst="rect">
-            <a:avLst>
-              <a:gd name="adj" fmla="val 13636"/>
-            </a:avLst>
-          </a:prstGeom>
-          <a:solidFill>
-            <a:srgbClr val="EEF2FF"/>
-          </a:solidFill>
-          <a:ln w="12700">
-            <a:solidFill>
-              <a:srgbClr val="6366F1"/>
-            </a:solidFill>
-            <a:prstDash val="solid"/>
-          </a:ln>
-        </p:spPr>
-      </p:sp>
-      <p:sp>
-        <p:nvSpPr>
-          <p:cNvPr id="59" name="Text 57"/>
-          <p:cNvSpPr/>
-          <p:nvPr/>
-        </p:nvSpPr>
-        <p:spPr>
-          <a:xfrm>
-            <a:off x="6894576" y="4498848"/>
-            <a:ext cx="2011680" cy="402336"/>
-          </a:xfrm>
-          <a:prstGeom prst="rect">
-            <a:avLst/>
-          </a:prstGeom>
-          <a:noFill/>
-          <a:ln/>
-        </p:spPr>
-        <p:txBody>
-          <a:bodyPr wrap="square" lIns="0" tIns="0" rIns="0" bIns="0" rtlCol="0" anchor="ctr"/>
-          <a:lstStyle/>
-          <a:p>
-            <a:pPr algn="ctr" indent="0" marL="0">
-              <a:buNone/>
-            </a:pPr>
-            <a:r>
-              <a:rPr lang="en-US" sz="1200" b="1" dirty="0">
-                <a:solidFill>
-                  <a:srgbClr val="4338CA"/>
-                </a:solidFill>
-                <a:latin typeface="Trebuchet MS" pitchFamily="34" charset="0"/>
-                <a:ea typeface="Trebuchet MS" pitchFamily="34" charset="-122"/>
-                <a:cs typeface="Trebuchet MS" pitchFamily="34" charset="-120"/>
-              </a:rPr>
-              <a:t>aquamarine</a:t>
             </a:r>
             <a:endParaRPr lang="en-US" sz="1200" dirty="0"/>
           </a:p>
@@ -36084,7 +35580,7 @@
                 <a:ea typeface="Calibri" pitchFamily="34" charset="-122"/>
                 <a:cs typeface="Calibri" pitchFamily="34" charset="-120"/>
               </a:rPr>
-              <a:t>Word Labs  •  wordlabs.app  •  Root: 'marine' = of the sea or ocean</a:t>
+              <a:t>Word Labs  •  wordlabs.app  •  Root: 'marine' = relating to the sea</a:t>
             </a:r>
             <a:endParaRPr lang="en-US" sz="800" dirty="0"/>
           </a:p>
@@ -36248,7 +35744,7 @@
                 <a:ea typeface="Calibri" pitchFamily="34" charset="-122"/>
                 <a:cs typeface="Calibri" pitchFamily="34" charset="-120"/>
               </a:rPr>
-              <a:t>The core part of a word carrying its basic meaning. For example, 'marine' means 'of the sea or ocean'.</a:t>
+              <a:t>The core part of a word carrying its basic meaning. For example, 'marine' means 'relating to the sea'.</a:t>
             </a:r>
             <a:endParaRPr lang="en-US" sz="1350" dirty="0"/>
           </a:p>
@@ -36868,7 +36364,7 @@
                 <a:ea typeface="Calibri" pitchFamily="34" charset="-122"/>
                 <a:cs typeface="Calibri" pitchFamily="34" charset="-120"/>
               </a:rPr>
-              <a:t>Word Labs  •  wordlabs.app  •  Root: 'marine' = of the sea or ocean</a:t>
+              <a:t>Word Labs  •  wordlabs.app  •  Root: 'marine' = relating to the sea</a:t>
             </a:r>
             <a:endParaRPr lang="en-US" sz="800" dirty="0"/>
           </a:p>
@@ -36980,7 +36476,7 @@
                 <a:ea typeface="Calibri" pitchFamily="34" charset="-122"/>
                 <a:cs typeface="Calibri" pitchFamily="34" charset="-120"/>
               </a:rPr>
-              <a:t>1.  The root 'marine' comes from a Greek word meaning 'fish'.</a:t>
+              <a:t>1.  'marine' means 'relating to the sea'.</a:t>
             </a:r>
             <a:endParaRPr lang="en-US" sz="1300" dirty="0"/>
           </a:p>
@@ -37003,11 +36499,11 @@
             </a:avLst>
           </a:prstGeom>
           <a:solidFill>
-            <a:srgbClr val="FEE2E2"/>
-          </a:solidFill>
-          <a:ln w="12700">
-            <a:solidFill>
-              <a:srgbClr val="DC2626"/>
+            <a:srgbClr val="DCFCE7"/>
+          </a:solidFill>
+          <a:ln w="12700">
+            <a:solidFill>
+              <a:srgbClr val="16A34A"/>
             </a:solidFill>
             <a:prstDash val="solid"/>
           </a:ln>
@@ -37040,13 +36536,13 @@
             <a:r>
               <a:rPr lang="en-US" sz="1100" b="1" dirty="0">
                 <a:solidFill>
-                  <a:srgbClr val="DC2626"/>
+                  <a:srgbClr val="16A34A"/>
                 </a:solidFill>
                 <a:latin typeface="Trebuchet MS" pitchFamily="34" charset="0"/>
                 <a:ea typeface="Trebuchet MS" pitchFamily="34" charset="-122"/>
                 <a:cs typeface="Trebuchet MS" pitchFamily="34" charset="-120"/>
               </a:rPr>
-              <a:t>FALSE</a:t>
+              <a:t>TRUE</a:t>
             </a:r>
             <a:endParaRPr lang="en-US" sz="1100" dirty="0"/>
           </a:p>
@@ -37119,7 +36615,7 @@
                 <a:ea typeface="Calibri" pitchFamily="34" charset="-122"/>
                 <a:cs typeface="Calibri" pitchFamily="34" charset="-120"/>
               </a:rPr>
-              <a:t>2.  The word 'aquamarine' contains the root 'marine'.</a:t>
+              <a:t>2.  'marine' means 'relating to mountains and high places'.</a:t>
             </a:r>
             <a:endParaRPr lang="en-US" sz="1300" dirty="0"/>
           </a:p>
@@ -37142,11 +36638,11 @@
             </a:avLst>
           </a:prstGeom>
           <a:solidFill>
-            <a:srgbClr val="DCFCE7"/>
-          </a:solidFill>
-          <a:ln w="12700">
-            <a:solidFill>
-              <a:srgbClr val="16A34A"/>
+            <a:srgbClr val="FEE2E2"/>
+          </a:solidFill>
+          <a:ln w="12700">
+            <a:solidFill>
+              <a:srgbClr val="DC2626"/>
             </a:solidFill>
             <a:prstDash val="solid"/>
           </a:ln>
@@ -37179,13 +36675,13 @@
             <a:r>
               <a:rPr lang="en-US" sz="1100" b="1" dirty="0">
                 <a:solidFill>
-                  <a:srgbClr val="16A34A"/>
+                  <a:srgbClr val="DC2626"/>
                 </a:solidFill>
                 <a:latin typeface="Trebuchet MS" pitchFamily="34" charset="0"/>
                 <a:ea typeface="Trebuchet MS" pitchFamily="34" charset="-122"/>
                 <a:cs typeface="Trebuchet MS" pitchFamily="34" charset="-120"/>
               </a:rPr>
-              <a:t>TRUE</a:t>
+              <a:t>FALSE</a:t>
             </a:r>
             <a:endParaRPr lang="en-US" sz="1100" dirty="0"/>
           </a:p>
@@ -37258,7 +36754,7 @@
                 <a:ea typeface="Calibri" pitchFamily="34" charset="-122"/>
                 <a:cs typeface="Calibri" pitchFamily="34" charset="-120"/>
               </a:rPr>
-              <a:t>3.  The root 'marine' comes from a Latin word meaning 'of the sea'.</a:t>
+              <a:t>3.  'marine' means 'relating to the sea'.</a:t>
             </a:r>
             <a:endParaRPr lang="en-US" sz="1300" dirty="0"/>
           </a:p>
@@ -37325,284 +36821,6 @@
                 <a:cs typeface="Trebuchet MS" pitchFamily="34" charset="-120"/>
               </a:rPr>
               <a:t>TRUE</a:t>
-            </a:r>
-            <a:endParaRPr lang="en-US" sz="1100" dirty="0"/>
-          </a:p>
-        </p:txBody>
-      </p:sp>
-      <p:sp>
-        <p:nvSpPr>
-          <p:cNvPr id="23" name="Shape 21"/>
-          <p:cNvSpPr/>
-          <p:nvPr/>
-        </p:nvSpPr>
-        <p:spPr>
-          <a:xfrm>
-            <a:off x="365760" y="3291840"/>
-            <a:ext cx="7315200" cy="566928"/>
-          </a:xfrm>
-          <a:prstGeom prst="rect">
-            <a:avLst>
-              <a:gd name="adj" fmla="val 12903"/>
-            </a:avLst>
-          </a:prstGeom>
-          <a:solidFill>
-            <a:srgbClr val="F8FAFC"/>
-          </a:solidFill>
-          <a:ln w="12700">
-            <a:solidFill>
-              <a:srgbClr val="E2E8F0"/>
-            </a:solidFill>
-            <a:prstDash val="solid"/>
-          </a:ln>
-          <a:effectLst>
-            <a:outerShdw sx="100000" sy="100000" kx="0" ky="0" algn="bl" rotWithShape="0" blurRad="101600" dist="38100" dir="8100000">
-              <a:srgbClr val="000000">
-                <a:alpha val="12000"/>
-              </a:srgbClr>
-            </a:outerShdw>
-          </a:effectLst>
-        </p:spPr>
-      </p:sp>
-      <p:sp>
-        <p:nvSpPr>
-          <p:cNvPr id="24" name="Text 22"/>
-          <p:cNvSpPr/>
-          <p:nvPr/>
-        </p:nvSpPr>
-        <p:spPr>
-          <a:xfrm>
-            <a:off x="548640" y="3291840"/>
-            <a:ext cx="6949440" cy="566928"/>
-          </a:xfrm>
-          <a:prstGeom prst="rect">
-            <a:avLst/>
-          </a:prstGeom>
-          <a:noFill/>
-          <a:ln/>
-        </p:spPr>
-        <p:txBody>
-          <a:bodyPr wrap="square" rtlCol="0" anchor="ctr"/>
-          <a:lstStyle/>
-          <a:p>
-            <a:pPr algn="l" indent="0" marL="0">
-              <a:buNone/>
-            </a:pPr>
-            <a:r>
-              <a:rPr lang="en-US" sz="1300" dirty="0">
-                <a:solidFill>
-                  <a:srgbClr val="0F172A"/>
-                </a:solidFill>
-                <a:latin typeface="Calibri" pitchFamily="34" charset="0"/>
-                <a:ea typeface="Calibri" pitchFamily="34" charset="-122"/>
-                <a:cs typeface="Calibri" pitchFamily="34" charset="-120"/>
-              </a:rPr>
-              <a:t>4.  Words with the root 'marine' are always connected to water or the sea.</a:t>
-            </a:r>
-            <a:endParaRPr lang="en-US" sz="1300" dirty="0"/>
-          </a:p>
-        </p:txBody>
-      </p:sp>
-      <p:sp>
-        <p:nvSpPr>
-          <p:cNvPr id="25" name="Shape 23"/>
-          <p:cNvSpPr/>
-          <p:nvPr/>
-        </p:nvSpPr>
-        <p:spPr>
-          <a:xfrm>
-            <a:off x="7772400" y="3291840"/>
-            <a:ext cx="1005840" cy="566928"/>
-          </a:xfrm>
-          <a:prstGeom prst="rect">
-            <a:avLst>
-              <a:gd name="adj" fmla="val 12903"/>
-            </a:avLst>
-          </a:prstGeom>
-          <a:solidFill>
-            <a:srgbClr val="DCFCE7"/>
-          </a:solidFill>
-          <a:ln w="12700">
-            <a:solidFill>
-              <a:srgbClr val="16A34A"/>
-            </a:solidFill>
-            <a:prstDash val="solid"/>
-          </a:ln>
-        </p:spPr>
-      </p:sp>
-      <p:sp>
-        <p:nvSpPr>
-          <p:cNvPr id="26" name="Text 24"/>
-          <p:cNvSpPr/>
-          <p:nvPr/>
-        </p:nvSpPr>
-        <p:spPr>
-          <a:xfrm>
-            <a:off x="7772400" y="3291840"/>
-            <a:ext cx="1005840" cy="566928"/>
-          </a:xfrm>
-          <a:prstGeom prst="rect">
-            <a:avLst/>
-          </a:prstGeom>
-          <a:noFill/>
-          <a:ln/>
-        </p:spPr>
-        <p:txBody>
-          <a:bodyPr wrap="square" lIns="0" tIns="0" rIns="0" bIns="0" rtlCol="0" anchor="ctr"/>
-          <a:lstStyle/>
-          <a:p>
-            <a:pPr algn="ctr" indent="0" marL="0">
-              <a:buNone/>
-            </a:pPr>
-            <a:r>
-              <a:rPr lang="en-US" sz="1100" b="1" dirty="0">
-                <a:solidFill>
-                  <a:srgbClr val="16A34A"/>
-                </a:solidFill>
-                <a:latin typeface="Trebuchet MS" pitchFamily="34" charset="0"/>
-                <a:ea typeface="Trebuchet MS" pitchFamily="34" charset="-122"/>
-                <a:cs typeface="Trebuchet MS" pitchFamily="34" charset="-120"/>
-              </a:rPr>
-              <a:t>TRUE</a:t>
-            </a:r>
-            <a:endParaRPr lang="en-US" sz="1100" dirty="0"/>
-          </a:p>
-        </p:txBody>
-      </p:sp>
-      <p:sp>
-        <p:nvSpPr>
-          <p:cNvPr id="27" name="Shape 25"/>
-          <p:cNvSpPr/>
-          <p:nvPr/>
-        </p:nvSpPr>
-        <p:spPr>
-          <a:xfrm>
-            <a:off x="365760" y="3986784"/>
-            <a:ext cx="7315200" cy="566928"/>
-          </a:xfrm>
-          <a:prstGeom prst="rect">
-            <a:avLst>
-              <a:gd name="adj" fmla="val 12903"/>
-            </a:avLst>
-          </a:prstGeom>
-          <a:solidFill>
-            <a:srgbClr val="F8FAFC"/>
-          </a:solidFill>
-          <a:ln w="12700">
-            <a:solidFill>
-              <a:srgbClr val="E2E8F0"/>
-            </a:solidFill>
-            <a:prstDash val="solid"/>
-          </a:ln>
-          <a:effectLst>
-            <a:outerShdw sx="100000" sy="100000" kx="0" ky="0" algn="bl" rotWithShape="0" blurRad="101600" dist="38100" dir="8100000">
-              <a:srgbClr val="000000">
-                <a:alpha val="12000"/>
-              </a:srgbClr>
-            </a:outerShdw>
-          </a:effectLst>
-        </p:spPr>
-      </p:sp>
-      <p:sp>
-        <p:nvSpPr>
-          <p:cNvPr id="28" name="Text 26"/>
-          <p:cNvSpPr/>
-          <p:nvPr/>
-        </p:nvSpPr>
-        <p:spPr>
-          <a:xfrm>
-            <a:off x="548640" y="3986784"/>
-            <a:ext cx="6949440" cy="566928"/>
-          </a:xfrm>
-          <a:prstGeom prst="rect">
-            <a:avLst/>
-          </a:prstGeom>
-          <a:noFill/>
-          <a:ln/>
-        </p:spPr>
-        <p:txBody>
-          <a:bodyPr wrap="square" rtlCol="0" anchor="ctr"/>
-          <a:lstStyle/>
-          <a:p>
-            <a:pPr algn="l" indent="0" marL="0">
-              <a:buNone/>
-            </a:pPr>
-            <a:r>
-              <a:rPr lang="en-US" sz="1300" dirty="0">
-                <a:solidFill>
-                  <a:srgbClr val="0F172A"/>
-                </a:solidFill>
-                <a:latin typeface="Calibri" pitchFamily="34" charset="0"/>
-                <a:ea typeface="Calibri" pitchFamily="34" charset="-122"/>
-                <a:cs typeface="Calibri" pitchFamily="34" charset="-120"/>
-              </a:rPr>
-              <a:t>5.  A submarine travels above the surface of the water.</a:t>
-            </a:r>
-            <a:endParaRPr lang="en-US" sz="1300" dirty="0"/>
-          </a:p>
-        </p:txBody>
-      </p:sp>
-      <p:sp>
-        <p:nvSpPr>
-          <p:cNvPr id="29" name="Shape 27"/>
-          <p:cNvSpPr/>
-          <p:nvPr/>
-        </p:nvSpPr>
-        <p:spPr>
-          <a:xfrm>
-            <a:off x="7772400" y="3986784"/>
-            <a:ext cx="1005840" cy="566928"/>
-          </a:xfrm>
-          <a:prstGeom prst="rect">
-            <a:avLst>
-              <a:gd name="adj" fmla="val 12903"/>
-            </a:avLst>
-          </a:prstGeom>
-          <a:solidFill>
-            <a:srgbClr val="FEE2E2"/>
-          </a:solidFill>
-          <a:ln w="12700">
-            <a:solidFill>
-              <a:srgbClr val="DC2626"/>
-            </a:solidFill>
-            <a:prstDash val="solid"/>
-          </a:ln>
-        </p:spPr>
-      </p:sp>
-      <p:sp>
-        <p:nvSpPr>
-          <p:cNvPr id="30" name="Text 28"/>
-          <p:cNvSpPr/>
-          <p:nvPr/>
-        </p:nvSpPr>
-        <p:spPr>
-          <a:xfrm>
-            <a:off x="7772400" y="3986784"/>
-            <a:ext cx="1005840" cy="566928"/>
-          </a:xfrm>
-          <a:prstGeom prst="rect">
-            <a:avLst/>
-          </a:prstGeom>
-          <a:noFill/>
-          <a:ln/>
-        </p:spPr>
-        <p:txBody>
-          <a:bodyPr wrap="square" lIns="0" tIns="0" rIns="0" bIns="0" rtlCol="0" anchor="ctr"/>
-          <a:lstStyle/>
-          <a:p>
-            <a:pPr algn="ctr" indent="0" marL="0">
-              <a:buNone/>
-            </a:pPr>
-            <a:r>
-              <a:rPr lang="en-US" sz="1100" b="1" dirty="0">
-                <a:solidFill>
-                  <a:srgbClr val="DC2626"/>
-                </a:solidFill>
-                <a:latin typeface="Trebuchet MS" pitchFamily="34" charset="0"/>
-                <a:ea typeface="Trebuchet MS" pitchFamily="34" charset="-122"/>
-                <a:cs typeface="Trebuchet MS" pitchFamily="34" charset="-120"/>
-              </a:rPr>
-              <a:t>FALSE</a:t>
             </a:r>
             <a:endParaRPr lang="en-US" sz="1100" dirty="0"/>
           </a:p>
@@ -37894,7 +37112,7 @@
                 <a:ea typeface="Calibri" pitchFamily="34" charset="-122"/>
                 <a:cs typeface="Calibri" pitchFamily="34" charset="-120"/>
               </a:rPr>
-              <a:t>Word Labs  •  wordlabs.app  •  Root: 'marine' = of the sea or ocean</a:t>
+              <a:t>Word Labs  •  wordlabs.app  •  Root: 'marine' = relating to the sea</a:t>
             </a:r>
             <a:endParaRPr lang="en-US" sz="800" dirty="0"/>
           </a:p>
@@ -38031,7 +37249,7 @@
                 <a:ea typeface="Trebuchet MS" pitchFamily="34" charset="-122"/>
                 <a:cs typeface="Trebuchet MS" pitchFamily="34" charset="-120"/>
               </a:rPr>
-              <a:t>of the sea or ocean</a:t>
+              <a:t>relating to the sea</a:t>
             </a:r>
             <a:endParaRPr lang="en-US" sz="2000" dirty="0"/>
           </a:p>
@@ -38070,7 +37288,7 @@
                 <a:ea typeface="Calibri" pitchFamily="34" charset="-122"/>
                 <a:cs typeface="Calibri" pitchFamily="34" charset="-120"/>
               </a:rPr>
-              <a:t>Origin: Latin: marinus</a:t>
+              <a:t>Origin: Core English root</a:t>
             </a:r>
             <a:endParaRPr lang="en-US" sz="1100" dirty="0"/>
           </a:p>
@@ -38176,402 +37394,6 @@
                 <a:cs typeface="Trebuchet MS" pitchFamily="34" charset="-120"/>
               </a:rPr>
               <a:t>marine</a:t>
-            </a:r>
-            <a:endParaRPr lang="en-US" sz="1300" dirty="0"/>
-          </a:p>
-        </p:txBody>
-      </p:sp>
-      <p:sp>
-        <p:nvSpPr>
-          <p:cNvPr id="18" name="Shape 16"/>
-          <p:cNvSpPr/>
-          <p:nvPr/>
-        </p:nvSpPr>
-        <p:spPr>
-          <a:xfrm>
-            <a:off x="2514600" y="2743200"/>
-            <a:ext cx="2011680" cy="502920"/>
-          </a:xfrm>
-          <a:prstGeom prst="rect">
-            <a:avLst>
-              <a:gd name="adj" fmla="val 14545"/>
-            </a:avLst>
-          </a:prstGeom>
-          <a:solidFill>
-            <a:srgbClr val="EEF2FF"/>
-          </a:solidFill>
-          <a:ln w="12700">
-            <a:solidFill>
-              <a:srgbClr val="6366F1"/>
-            </a:solidFill>
-            <a:prstDash val="solid"/>
-          </a:ln>
-        </p:spPr>
-      </p:sp>
-      <p:sp>
-        <p:nvSpPr>
-          <p:cNvPr id="19" name="Text 17"/>
-          <p:cNvSpPr/>
-          <p:nvPr/>
-        </p:nvSpPr>
-        <p:spPr>
-          <a:xfrm>
-            <a:off x="2514600" y="2743200"/>
-            <a:ext cx="2011680" cy="502920"/>
-          </a:xfrm>
-          <a:prstGeom prst="rect">
-            <a:avLst/>
-          </a:prstGeom>
-          <a:noFill/>
-          <a:ln/>
-        </p:spPr>
-        <p:txBody>
-          <a:bodyPr wrap="square" lIns="0" tIns="0" rIns="0" bIns="0" rtlCol="0" anchor="ctr"/>
-          <a:lstStyle/>
-          <a:p>
-            <a:pPr algn="ctr" indent="0" marL="0">
-              <a:buNone/>
-            </a:pPr>
-            <a:r>
-              <a:rPr lang="en-US" sz="1300" b="1" dirty="0">
-                <a:solidFill>
-                  <a:srgbClr val="4338CA"/>
-                </a:solidFill>
-                <a:latin typeface="Trebuchet MS" pitchFamily="34" charset="0"/>
-                <a:ea typeface="Trebuchet MS" pitchFamily="34" charset="-122"/>
-                <a:cs typeface="Trebuchet MS" pitchFamily="34" charset="-120"/>
-              </a:rPr>
-              <a:t>submarine</a:t>
-            </a:r>
-            <a:endParaRPr lang="en-US" sz="1300" dirty="0"/>
-          </a:p>
-        </p:txBody>
-      </p:sp>
-      <p:sp>
-        <p:nvSpPr>
-          <p:cNvPr id="20" name="Shape 18"/>
-          <p:cNvSpPr/>
-          <p:nvPr/>
-        </p:nvSpPr>
-        <p:spPr>
-          <a:xfrm>
-            <a:off x="4663440" y="2743200"/>
-            <a:ext cx="2011680" cy="502920"/>
-          </a:xfrm>
-          <a:prstGeom prst="rect">
-            <a:avLst>
-              <a:gd name="adj" fmla="val 14545"/>
-            </a:avLst>
-          </a:prstGeom>
-          <a:solidFill>
-            <a:srgbClr val="EEF2FF"/>
-          </a:solidFill>
-          <a:ln w="12700">
-            <a:solidFill>
-              <a:srgbClr val="6366F1"/>
-            </a:solidFill>
-            <a:prstDash val="solid"/>
-          </a:ln>
-        </p:spPr>
-      </p:sp>
-      <p:sp>
-        <p:nvSpPr>
-          <p:cNvPr id="21" name="Text 19"/>
-          <p:cNvSpPr/>
-          <p:nvPr/>
-        </p:nvSpPr>
-        <p:spPr>
-          <a:xfrm>
-            <a:off x="4663440" y="2743200"/>
-            <a:ext cx="2011680" cy="502920"/>
-          </a:xfrm>
-          <a:prstGeom prst="rect">
-            <a:avLst/>
-          </a:prstGeom>
-          <a:noFill/>
-          <a:ln/>
-        </p:spPr>
-        <p:txBody>
-          <a:bodyPr wrap="square" lIns="0" tIns="0" rIns="0" bIns="0" rtlCol="0" anchor="ctr"/>
-          <a:lstStyle/>
-          <a:p>
-            <a:pPr algn="ctr" indent="0" marL="0">
-              <a:buNone/>
-            </a:pPr>
-            <a:r>
-              <a:rPr lang="en-US" sz="1300" b="1" dirty="0">
-                <a:solidFill>
-                  <a:srgbClr val="4338CA"/>
-                </a:solidFill>
-                <a:latin typeface="Trebuchet MS" pitchFamily="34" charset="0"/>
-                <a:ea typeface="Trebuchet MS" pitchFamily="34" charset="-122"/>
-                <a:cs typeface="Trebuchet MS" pitchFamily="34" charset="-120"/>
-              </a:rPr>
-              <a:t>mariner</a:t>
-            </a:r>
-            <a:endParaRPr lang="en-US" sz="1300" dirty="0"/>
-          </a:p>
-        </p:txBody>
-      </p:sp>
-      <p:sp>
-        <p:nvSpPr>
-          <p:cNvPr id="22" name="Shape 20"/>
-          <p:cNvSpPr/>
-          <p:nvPr/>
-        </p:nvSpPr>
-        <p:spPr>
-          <a:xfrm>
-            <a:off x="6812280" y="2743200"/>
-            <a:ext cx="2011680" cy="502920"/>
-          </a:xfrm>
-          <a:prstGeom prst="rect">
-            <a:avLst>
-              <a:gd name="adj" fmla="val 14545"/>
-            </a:avLst>
-          </a:prstGeom>
-          <a:solidFill>
-            <a:srgbClr val="EEF2FF"/>
-          </a:solidFill>
-          <a:ln w="12700">
-            <a:solidFill>
-              <a:srgbClr val="6366F1"/>
-            </a:solidFill>
-            <a:prstDash val="solid"/>
-          </a:ln>
-        </p:spPr>
-      </p:sp>
-      <p:sp>
-        <p:nvSpPr>
-          <p:cNvPr id="23" name="Text 21"/>
-          <p:cNvSpPr/>
-          <p:nvPr/>
-        </p:nvSpPr>
-        <p:spPr>
-          <a:xfrm>
-            <a:off x="6812280" y="2743200"/>
-            <a:ext cx="2011680" cy="502920"/>
-          </a:xfrm>
-          <a:prstGeom prst="rect">
-            <a:avLst/>
-          </a:prstGeom>
-          <a:noFill/>
-          <a:ln/>
-        </p:spPr>
-        <p:txBody>
-          <a:bodyPr wrap="square" lIns="0" tIns="0" rIns="0" bIns="0" rtlCol="0" anchor="ctr"/>
-          <a:lstStyle/>
-          <a:p>
-            <a:pPr algn="ctr" indent="0" marL="0">
-              <a:buNone/>
-            </a:pPr>
-            <a:r>
-              <a:rPr lang="en-US" sz="1300" b="1" dirty="0">
-                <a:solidFill>
-                  <a:srgbClr val="4338CA"/>
-                </a:solidFill>
-                <a:latin typeface="Trebuchet MS" pitchFamily="34" charset="0"/>
-                <a:ea typeface="Trebuchet MS" pitchFamily="34" charset="-122"/>
-                <a:cs typeface="Trebuchet MS" pitchFamily="34" charset="-120"/>
-              </a:rPr>
-              <a:t>marines</a:t>
-            </a:r>
-            <a:endParaRPr lang="en-US" sz="1300" dirty="0"/>
-          </a:p>
-        </p:txBody>
-      </p:sp>
-      <p:sp>
-        <p:nvSpPr>
-          <p:cNvPr id="24" name="Shape 22"/>
-          <p:cNvSpPr/>
-          <p:nvPr/>
-        </p:nvSpPr>
-        <p:spPr>
-          <a:xfrm>
-            <a:off x="365760" y="3401568"/>
-            <a:ext cx="2011680" cy="502920"/>
-          </a:xfrm>
-          <a:prstGeom prst="rect">
-            <a:avLst>
-              <a:gd name="adj" fmla="val 14545"/>
-            </a:avLst>
-          </a:prstGeom>
-          <a:solidFill>
-            <a:srgbClr val="EEF2FF"/>
-          </a:solidFill>
-          <a:ln w="12700">
-            <a:solidFill>
-              <a:srgbClr val="6366F1"/>
-            </a:solidFill>
-            <a:prstDash val="solid"/>
-          </a:ln>
-        </p:spPr>
-      </p:sp>
-      <p:sp>
-        <p:nvSpPr>
-          <p:cNvPr id="25" name="Text 23"/>
-          <p:cNvSpPr/>
-          <p:nvPr/>
-        </p:nvSpPr>
-        <p:spPr>
-          <a:xfrm>
-            <a:off x="365760" y="3401568"/>
-            <a:ext cx="2011680" cy="502920"/>
-          </a:xfrm>
-          <a:prstGeom prst="rect">
-            <a:avLst/>
-          </a:prstGeom>
-          <a:noFill/>
-          <a:ln/>
-        </p:spPr>
-        <p:txBody>
-          <a:bodyPr wrap="square" lIns="0" tIns="0" rIns="0" bIns="0" rtlCol="0" anchor="ctr"/>
-          <a:lstStyle/>
-          <a:p>
-            <a:pPr algn="ctr" indent="0" marL="0">
-              <a:buNone/>
-            </a:pPr>
-            <a:r>
-              <a:rPr lang="en-US" sz="1300" b="1" dirty="0">
-                <a:solidFill>
-                  <a:srgbClr val="4338CA"/>
-                </a:solidFill>
-                <a:latin typeface="Trebuchet MS" pitchFamily="34" charset="0"/>
-                <a:ea typeface="Trebuchet MS" pitchFamily="34" charset="-122"/>
-                <a:cs typeface="Trebuchet MS" pitchFamily="34" charset="-120"/>
-              </a:rPr>
-              <a:t>ultramarine</a:t>
-            </a:r>
-            <a:endParaRPr lang="en-US" sz="1300" dirty="0"/>
-          </a:p>
-        </p:txBody>
-      </p:sp>
-      <p:sp>
-        <p:nvSpPr>
-          <p:cNvPr id="26" name="Shape 24"/>
-          <p:cNvSpPr/>
-          <p:nvPr/>
-        </p:nvSpPr>
-        <p:spPr>
-          <a:xfrm>
-            <a:off x="2514600" y="3401568"/>
-            <a:ext cx="2011680" cy="502920"/>
-          </a:xfrm>
-          <a:prstGeom prst="rect">
-            <a:avLst>
-              <a:gd name="adj" fmla="val 14545"/>
-            </a:avLst>
-          </a:prstGeom>
-          <a:solidFill>
-            <a:srgbClr val="EEF2FF"/>
-          </a:solidFill>
-          <a:ln w="12700">
-            <a:solidFill>
-              <a:srgbClr val="6366F1"/>
-            </a:solidFill>
-            <a:prstDash val="solid"/>
-          </a:ln>
-        </p:spPr>
-      </p:sp>
-      <p:sp>
-        <p:nvSpPr>
-          <p:cNvPr id="27" name="Text 25"/>
-          <p:cNvSpPr/>
-          <p:nvPr/>
-        </p:nvSpPr>
-        <p:spPr>
-          <a:xfrm>
-            <a:off x="2514600" y="3401568"/>
-            <a:ext cx="2011680" cy="502920"/>
-          </a:xfrm>
-          <a:prstGeom prst="rect">
-            <a:avLst/>
-          </a:prstGeom>
-          <a:noFill/>
-          <a:ln/>
-        </p:spPr>
-        <p:txBody>
-          <a:bodyPr wrap="square" lIns="0" tIns="0" rIns="0" bIns="0" rtlCol="0" anchor="ctr"/>
-          <a:lstStyle/>
-          <a:p>
-            <a:pPr algn="ctr" indent="0" marL="0">
-              <a:buNone/>
-            </a:pPr>
-            <a:r>
-              <a:rPr lang="en-US" sz="1300" b="1" dirty="0">
-                <a:solidFill>
-                  <a:srgbClr val="4338CA"/>
-                </a:solidFill>
-                <a:latin typeface="Trebuchet MS" pitchFamily="34" charset="0"/>
-                <a:ea typeface="Trebuchet MS" pitchFamily="34" charset="-122"/>
-                <a:cs typeface="Trebuchet MS" pitchFamily="34" charset="-120"/>
-              </a:rPr>
-              <a:t>submarine</a:t>
-            </a:r>
-            <a:endParaRPr lang="en-US" sz="1300" dirty="0"/>
-          </a:p>
-        </p:txBody>
-      </p:sp>
-      <p:sp>
-        <p:nvSpPr>
-          <p:cNvPr id="28" name="Shape 26"/>
-          <p:cNvSpPr/>
-          <p:nvPr/>
-        </p:nvSpPr>
-        <p:spPr>
-          <a:xfrm>
-            <a:off x="4663440" y="3401568"/>
-            <a:ext cx="2011680" cy="502920"/>
-          </a:xfrm>
-          <a:prstGeom prst="rect">
-            <a:avLst>
-              <a:gd name="adj" fmla="val 14545"/>
-            </a:avLst>
-          </a:prstGeom>
-          <a:solidFill>
-            <a:srgbClr val="EEF2FF"/>
-          </a:solidFill>
-          <a:ln w="12700">
-            <a:solidFill>
-              <a:srgbClr val="6366F1"/>
-            </a:solidFill>
-            <a:prstDash val="solid"/>
-          </a:ln>
-        </p:spPr>
-      </p:sp>
-      <p:sp>
-        <p:nvSpPr>
-          <p:cNvPr id="29" name="Text 27"/>
-          <p:cNvSpPr/>
-          <p:nvPr/>
-        </p:nvSpPr>
-        <p:spPr>
-          <a:xfrm>
-            <a:off x="4663440" y="3401568"/>
-            <a:ext cx="2011680" cy="502920"/>
-          </a:xfrm>
-          <a:prstGeom prst="rect">
-            <a:avLst/>
-          </a:prstGeom>
-          <a:noFill/>
-          <a:ln/>
-        </p:spPr>
-        <p:txBody>
-          <a:bodyPr wrap="square" lIns="0" tIns="0" rIns="0" bIns="0" rtlCol="0" anchor="ctr"/>
-          <a:lstStyle/>
-          <a:p>
-            <a:pPr algn="ctr" indent="0" marL="0">
-              <a:buNone/>
-            </a:pPr>
-            <a:r>
-              <a:rPr lang="en-US" sz="1300" b="1" dirty="0">
-                <a:solidFill>
-                  <a:srgbClr val="4338CA"/>
-                </a:solidFill>
-                <a:latin typeface="Trebuchet MS" pitchFamily="34" charset="0"/>
-                <a:ea typeface="Trebuchet MS" pitchFamily="34" charset="-122"/>
-                <a:cs typeface="Trebuchet MS" pitchFamily="34" charset="-120"/>
-              </a:rPr>
-              <a:t>marinely</a:t>
             </a:r>
             <a:endParaRPr lang="en-US" sz="1300" dirty="0"/>
           </a:p>
@@ -38863,7 +37685,7 @@
                 <a:ea typeface="Calibri" pitchFamily="34" charset="-122"/>
                 <a:cs typeface="Calibri" pitchFamily="34" charset="-120"/>
               </a:rPr>
-              <a:t>Word Labs  •  wordlabs.app  •  Root: 'marine' = of the sea or ocean</a:t>
+              <a:t>Word Labs  •  wordlabs.app  •  Root: 'marine' = relating to the sea</a:t>
             </a:r>
             <a:endParaRPr lang="en-US" sz="800" dirty="0"/>
           </a:p>
@@ -39292,7 +38114,7 @@
                 <a:ea typeface="Trebuchet MS" pitchFamily="34" charset="-122"/>
                 <a:cs typeface="Trebuchet MS" pitchFamily="34" charset="-120"/>
               </a:rPr>
-              <a:t>-r</a:t>
+              <a:t>-er</a:t>
             </a:r>
             <a:endParaRPr lang="en-US" sz="1300" dirty="0"/>
           </a:p>
@@ -39445,7 +38267,7 @@
                 <a:ea typeface="Trebuchet MS" pitchFamily="34" charset="-122"/>
                 <a:cs typeface="Trebuchet MS" pitchFamily="34" charset="-120"/>
               </a:rPr>
-              <a:t>-ly</a:t>
+              <a:t>-s</a:t>
             </a:r>
             <a:endParaRPr lang="en-US" sz="1300" dirty="0"/>
           </a:p>
@@ -39453,472 +38275,13 @@
       </p:sp>
       <p:sp>
         <p:nvSpPr>
-          <p:cNvPr id="28" name="Shape 26"/>
-          <p:cNvSpPr/>
-          <p:nvPr/>
-        </p:nvSpPr>
-        <p:spPr>
-          <a:xfrm>
-            <a:off x="640080" y="2670048"/>
-            <a:ext cx="1463040" cy="420624"/>
-          </a:xfrm>
-          <a:prstGeom prst="rect">
-            <a:avLst/>
-          </a:prstGeom>
-          <a:solidFill>
-            <a:srgbClr val="DDD6FE"/>
-          </a:solidFill>
-          <a:ln w="12700">
-            <a:solidFill>
-              <a:srgbClr val="E5E7EB"/>
-            </a:solidFill>
-            <a:prstDash val="solid"/>
-          </a:ln>
-        </p:spPr>
-      </p:sp>
-      <p:sp>
-        <p:nvSpPr>
-          <p:cNvPr id="29" name="Text 27"/>
-          <p:cNvSpPr/>
-          <p:nvPr/>
-        </p:nvSpPr>
-        <p:spPr>
-          <a:xfrm>
-            <a:off x="640080" y="2670048"/>
-            <a:ext cx="1463040" cy="420624"/>
-          </a:xfrm>
-          <a:prstGeom prst="rect">
-            <a:avLst/>
-          </a:prstGeom>
-          <a:noFill/>
-          <a:ln/>
-        </p:spPr>
-        <p:txBody>
-          <a:bodyPr wrap="square" lIns="0" tIns="0" rIns="0" bIns="0" rtlCol="0" anchor="ctr"/>
-          <a:lstStyle/>
-          <a:p>
-            <a:pPr algn="ctr" indent="0" marL="0">
-              <a:buNone/>
-            </a:pPr>
-            <a:r>
-              <a:rPr lang="en-US" sz="1300" b="1" dirty="0">
-                <a:solidFill>
-                  <a:srgbClr val="4C1D95"/>
-                </a:solidFill>
-                <a:latin typeface="Trebuchet MS" pitchFamily="34" charset="0"/>
-                <a:ea typeface="Trebuchet MS" pitchFamily="34" charset="-122"/>
-                <a:cs typeface="Trebuchet MS" pitchFamily="34" charset="-120"/>
-              </a:rPr>
-              <a:t>trans-</a:t>
-            </a:r>
-            <a:endParaRPr lang="en-US" sz="1300" dirty="0"/>
-          </a:p>
-        </p:txBody>
-      </p:sp>
-      <p:sp>
-        <p:nvSpPr>
-          <p:cNvPr id="30" name="Shape 28"/>
-          <p:cNvSpPr/>
-          <p:nvPr/>
-        </p:nvSpPr>
-        <p:spPr>
-          <a:xfrm>
-            <a:off x="3291840" y="2670048"/>
-            <a:ext cx="1645920" cy="420624"/>
-          </a:xfrm>
-          <a:prstGeom prst="rect">
-            <a:avLst/>
-          </a:prstGeom>
-          <a:solidFill>
-            <a:srgbClr val="F8FAFC"/>
-          </a:solidFill>
-          <a:ln w="12700">
-            <a:solidFill>
-              <a:srgbClr val="E5E7EB"/>
-            </a:solidFill>
-            <a:prstDash val="solid"/>
-          </a:ln>
-        </p:spPr>
-      </p:sp>
-      <p:sp>
-        <p:nvSpPr>
-          <p:cNvPr id="31" name="Shape 29"/>
-          <p:cNvSpPr/>
-          <p:nvPr/>
-        </p:nvSpPr>
-        <p:spPr>
-          <a:xfrm>
-            <a:off x="5943600" y="2670048"/>
-            <a:ext cx="1463040" cy="420624"/>
-          </a:xfrm>
-          <a:prstGeom prst="rect">
-            <a:avLst/>
-          </a:prstGeom>
-          <a:solidFill>
-            <a:srgbClr val="FCE7F3"/>
-          </a:solidFill>
-          <a:ln w="12700">
-            <a:solidFill>
-              <a:srgbClr val="E5E7EB"/>
-            </a:solidFill>
-            <a:prstDash val="solid"/>
-          </a:ln>
-        </p:spPr>
-      </p:sp>
-      <p:sp>
-        <p:nvSpPr>
-          <p:cNvPr id="32" name="Text 30"/>
-          <p:cNvSpPr/>
-          <p:nvPr/>
-        </p:nvSpPr>
-        <p:spPr>
-          <a:xfrm>
-            <a:off x="5943600" y="2670048"/>
-            <a:ext cx="1463040" cy="420624"/>
-          </a:xfrm>
-          <a:prstGeom prst="rect">
-            <a:avLst/>
-          </a:prstGeom>
-          <a:noFill/>
-          <a:ln/>
-        </p:spPr>
-        <p:txBody>
-          <a:bodyPr wrap="square" lIns="0" tIns="0" rIns="0" bIns="0" rtlCol="0" anchor="ctr"/>
-          <a:lstStyle/>
-          <a:p>
-            <a:pPr algn="ctr" indent="0" marL="0">
-              <a:buNone/>
-            </a:pPr>
-            <a:r>
-              <a:rPr lang="en-US" sz="1300" b="1" dirty="0">
-                <a:solidFill>
-                  <a:srgbClr val="9D174D"/>
-                </a:solidFill>
-                <a:latin typeface="Trebuchet MS" pitchFamily="34" charset="0"/>
-                <a:ea typeface="Trebuchet MS" pitchFamily="34" charset="-122"/>
-                <a:cs typeface="Trebuchet MS" pitchFamily="34" charset="-120"/>
-              </a:rPr>
-              <a:t>-er</a:t>
-            </a:r>
-            <a:endParaRPr lang="en-US" sz="1300" dirty="0"/>
-          </a:p>
-        </p:txBody>
-      </p:sp>
-      <p:sp>
-        <p:nvSpPr>
-          <p:cNvPr id="33" name="Shape 31"/>
-          <p:cNvSpPr/>
-          <p:nvPr/>
-        </p:nvSpPr>
-        <p:spPr>
-          <a:xfrm>
-            <a:off x="640080" y="3127248"/>
-            <a:ext cx="1463040" cy="420624"/>
-          </a:xfrm>
-          <a:prstGeom prst="rect">
-            <a:avLst/>
-          </a:prstGeom>
-          <a:solidFill>
-            <a:srgbClr val="DDD6FE"/>
-          </a:solidFill>
-          <a:ln w="12700">
-            <a:solidFill>
-              <a:srgbClr val="E5E7EB"/>
-            </a:solidFill>
-            <a:prstDash val="solid"/>
-          </a:ln>
-        </p:spPr>
-      </p:sp>
-      <p:sp>
-        <p:nvSpPr>
-          <p:cNvPr id="34" name="Text 32"/>
-          <p:cNvSpPr/>
-          <p:nvPr/>
-        </p:nvSpPr>
-        <p:spPr>
-          <a:xfrm>
-            <a:off x="640080" y="3127248"/>
-            <a:ext cx="1463040" cy="420624"/>
-          </a:xfrm>
-          <a:prstGeom prst="rect">
-            <a:avLst/>
-          </a:prstGeom>
-          <a:noFill/>
-          <a:ln/>
-        </p:spPr>
-        <p:txBody>
-          <a:bodyPr wrap="square" lIns="0" tIns="0" rIns="0" bIns="0" rtlCol="0" anchor="ctr"/>
-          <a:lstStyle/>
-          <a:p>
-            <a:pPr algn="ctr" indent="0" marL="0">
-              <a:buNone/>
-            </a:pPr>
-            <a:r>
-              <a:rPr lang="en-US" sz="1300" b="1" dirty="0">
-                <a:solidFill>
-                  <a:srgbClr val="4C1D95"/>
-                </a:solidFill>
-                <a:latin typeface="Trebuchet MS" pitchFamily="34" charset="0"/>
-                <a:ea typeface="Trebuchet MS" pitchFamily="34" charset="-122"/>
-                <a:cs typeface="Trebuchet MS" pitchFamily="34" charset="-120"/>
-              </a:rPr>
-              <a:t>aqua-</a:t>
-            </a:r>
-            <a:endParaRPr lang="en-US" sz="1300" dirty="0"/>
-          </a:p>
-        </p:txBody>
-      </p:sp>
-      <p:sp>
-        <p:nvSpPr>
-          <p:cNvPr id="35" name="Shape 33"/>
-          <p:cNvSpPr/>
-          <p:nvPr/>
-        </p:nvSpPr>
-        <p:spPr>
-          <a:xfrm>
-            <a:off x="3291840" y="3127248"/>
-            <a:ext cx="1645920" cy="420624"/>
-          </a:xfrm>
-          <a:prstGeom prst="rect">
-            <a:avLst/>
-          </a:prstGeom>
-          <a:solidFill>
-            <a:srgbClr val="F1F5F9"/>
-          </a:solidFill>
-          <a:ln w="12700">
-            <a:solidFill>
-              <a:srgbClr val="E5E7EB"/>
-            </a:solidFill>
-            <a:prstDash val="solid"/>
-          </a:ln>
-        </p:spPr>
-      </p:sp>
-      <p:sp>
-        <p:nvSpPr>
-          <p:cNvPr id="36" name="Shape 34"/>
-          <p:cNvSpPr/>
-          <p:nvPr/>
-        </p:nvSpPr>
-        <p:spPr>
-          <a:xfrm>
-            <a:off x="5943600" y="3127248"/>
-            <a:ext cx="1463040" cy="420624"/>
-          </a:xfrm>
-          <a:prstGeom prst="rect">
-            <a:avLst/>
-          </a:prstGeom>
-          <a:solidFill>
-            <a:srgbClr val="FCE7F3"/>
-          </a:solidFill>
-          <a:ln w="12700">
-            <a:solidFill>
-              <a:srgbClr val="E5E7EB"/>
-            </a:solidFill>
-            <a:prstDash val="solid"/>
-          </a:ln>
-        </p:spPr>
-      </p:sp>
-      <p:sp>
-        <p:nvSpPr>
-          <p:cNvPr id="37" name="Text 35"/>
-          <p:cNvSpPr/>
-          <p:nvPr/>
-        </p:nvSpPr>
-        <p:spPr>
-          <a:xfrm>
-            <a:off x="5943600" y="3127248"/>
-            <a:ext cx="1463040" cy="420624"/>
-          </a:xfrm>
-          <a:prstGeom prst="rect">
-            <a:avLst/>
-          </a:prstGeom>
-          <a:noFill/>
-          <a:ln/>
-        </p:spPr>
-        <p:txBody>
-          <a:bodyPr wrap="square" lIns="0" tIns="0" rIns="0" bIns="0" rtlCol="0" anchor="ctr"/>
-          <a:lstStyle/>
-          <a:p>
-            <a:pPr algn="ctr" indent="0" marL="0">
-              <a:buNone/>
-            </a:pPr>
-            <a:r>
-              <a:rPr lang="en-US" sz="1300" b="1" dirty="0">
-                <a:solidFill>
-                  <a:srgbClr val="9D174D"/>
-                </a:solidFill>
-                <a:latin typeface="Trebuchet MS" pitchFamily="34" charset="0"/>
-                <a:ea typeface="Trebuchet MS" pitchFamily="34" charset="-122"/>
-                <a:cs typeface="Trebuchet MS" pitchFamily="34" charset="-120"/>
-              </a:rPr>
-              <a:t>-s</a:t>
-            </a:r>
-            <a:endParaRPr lang="en-US" sz="1300" dirty="0"/>
-          </a:p>
-        </p:txBody>
-      </p:sp>
-      <p:sp>
-        <p:nvSpPr>
-          <p:cNvPr id="38" name="Shape 36"/>
-          <p:cNvSpPr/>
-          <p:nvPr/>
-        </p:nvSpPr>
-        <p:spPr>
-          <a:xfrm>
-            <a:off x="640080" y="3584448"/>
-            <a:ext cx="1463040" cy="420624"/>
-          </a:xfrm>
-          <a:prstGeom prst="rect">
-            <a:avLst/>
-          </a:prstGeom>
-          <a:solidFill>
-            <a:srgbClr val="DDD6FE"/>
-          </a:solidFill>
-          <a:ln w="12700">
-            <a:solidFill>
-              <a:srgbClr val="E5E7EB"/>
-            </a:solidFill>
-            <a:prstDash val="solid"/>
-          </a:ln>
-        </p:spPr>
-      </p:sp>
-      <p:sp>
-        <p:nvSpPr>
-          <p:cNvPr id="39" name="Text 37"/>
-          <p:cNvSpPr/>
-          <p:nvPr/>
-        </p:nvSpPr>
-        <p:spPr>
-          <a:xfrm>
-            <a:off x="640080" y="3584448"/>
-            <a:ext cx="1463040" cy="420624"/>
-          </a:xfrm>
-          <a:prstGeom prst="rect">
-            <a:avLst/>
-          </a:prstGeom>
-          <a:noFill/>
-          <a:ln/>
-        </p:spPr>
-        <p:txBody>
-          <a:bodyPr wrap="square" lIns="0" tIns="0" rIns="0" bIns="0" rtlCol="0" anchor="ctr"/>
-          <a:lstStyle/>
-          <a:p>
-            <a:pPr algn="ctr" indent="0" marL="0">
-              <a:buNone/>
-            </a:pPr>
-            <a:r>
-              <a:rPr lang="en-US" sz="1300" b="1" dirty="0">
-                <a:solidFill>
-                  <a:srgbClr val="4C1D95"/>
-                </a:solidFill>
-                <a:latin typeface="Trebuchet MS" pitchFamily="34" charset="0"/>
-                <a:ea typeface="Trebuchet MS" pitchFamily="34" charset="-122"/>
-                <a:cs typeface="Trebuchet MS" pitchFamily="34" charset="-120"/>
-              </a:rPr>
-              <a:t>hyper-</a:t>
-            </a:r>
-            <a:endParaRPr lang="en-US" sz="1300" dirty="0"/>
-          </a:p>
-        </p:txBody>
-      </p:sp>
-      <p:sp>
-        <p:nvSpPr>
-          <p:cNvPr id="40" name="Shape 38"/>
-          <p:cNvSpPr/>
-          <p:nvPr/>
-        </p:nvSpPr>
-        <p:spPr>
-          <a:xfrm>
-            <a:off x="3291840" y="3584448"/>
-            <a:ext cx="1645920" cy="420624"/>
-          </a:xfrm>
-          <a:prstGeom prst="rect">
-            <a:avLst/>
-          </a:prstGeom>
-          <a:solidFill>
-            <a:srgbClr val="F8FAFC"/>
-          </a:solidFill>
-          <a:ln w="12700">
-            <a:solidFill>
-              <a:srgbClr val="E5E7EB"/>
-            </a:solidFill>
-            <a:prstDash val="solid"/>
-          </a:ln>
-        </p:spPr>
-      </p:sp>
-      <p:sp>
-        <p:nvSpPr>
-          <p:cNvPr id="41" name="Shape 39"/>
-          <p:cNvSpPr/>
-          <p:nvPr/>
-        </p:nvSpPr>
-        <p:spPr>
-          <a:xfrm>
-            <a:off x="5943600" y="3584448"/>
-            <a:ext cx="1463040" cy="420624"/>
-          </a:xfrm>
-          <a:prstGeom prst="rect">
-            <a:avLst/>
-          </a:prstGeom>
-          <a:solidFill>
-            <a:srgbClr val="FCE7F3"/>
-          </a:solidFill>
-          <a:ln w="12700">
-            <a:solidFill>
-              <a:srgbClr val="E5E7EB"/>
-            </a:solidFill>
-            <a:prstDash val="solid"/>
-          </a:ln>
-        </p:spPr>
-      </p:sp>
-      <p:sp>
-        <p:nvSpPr>
-          <p:cNvPr id="42" name="Text 40"/>
-          <p:cNvSpPr/>
-          <p:nvPr/>
-        </p:nvSpPr>
-        <p:spPr>
-          <a:xfrm>
-            <a:off x="5943600" y="3584448"/>
-            <a:ext cx="1463040" cy="420624"/>
-          </a:xfrm>
-          <a:prstGeom prst="rect">
-            <a:avLst/>
-          </a:prstGeom>
-          <a:noFill/>
-          <a:ln/>
-        </p:spPr>
-        <p:txBody>
-          <a:bodyPr wrap="square" lIns="0" tIns="0" rIns="0" bIns="0" rtlCol="0" anchor="ctr"/>
-          <a:lstStyle/>
-          <a:p>
-            <a:pPr algn="ctr" indent="0" marL="0">
-              <a:buNone/>
-            </a:pPr>
-            <a:r>
-              <a:rPr lang="en-US" sz="1300" b="1" dirty="0">
-                <a:solidFill>
-                  <a:srgbClr val="9D174D"/>
-                </a:solidFill>
-                <a:latin typeface="Trebuchet MS" pitchFamily="34" charset="0"/>
-                <a:ea typeface="Trebuchet MS" pitchFamily="34" charset="-122"/>
-                <a:cs typeface="Trebuchet MS" pitchFamily="34" charset="-120"/>
-              </a:rPr>
-              <a:t>-ade</a:t>
-            </a:r>
-            <a:endParaRPr lang="en-US" sz="1300" dirty="0"/>
-          </a:p>
-        </p:txBody>
-      </p:sp>
-      <p:sp>
-        <p:nvSpPr>
-          <p:cNvPr id="43" name="Text 41"/>
-          <p:cNvSpPr/>
-          <p:nvPr/>
-        </p:nvSpPr>
-        <p:spPr>
-          <a:xfrm>
-            <a:off x="365760" y="4178808"/>
+          <p:cNvPr id="28" name="Text 26"/>
+          <p:cNvSpPr/>
+          <p:nvPr/>
+        </p:nvSpPr>
+        <p:spPr>
+          <a:xfrm>
+            <a:off x="365760" y="2807208"/>
             <a:ext cx="1097280" cy="420624"/>
           </a:xfrm>
           <a:prstGeom prst="rect">
@@ -39951,13 +38314,13 @@
       </p:sp>
       <p:sp>
         <p:nvSpPr>
-          <p:cNvPr id="44" name="Shape 42"/>
-          <p:cNvSpPr/>
-          <p:nvPr/>
-        </p:nvSpPr>
-        <p:spPr>
-          <a:xfrm>
-            <a:off x="1508760" y="4178808"/>
+          <p:cNvPr id="29" name="Shape 27"/>
+          <p:cNvSpPr/>
+          <p:nvPr/>
+        </p:nvSpPr>
+        <p:spPr>
+          <a:xfrm>
+            <a:off x="1508760" y="2807208"/>
             <a:ext cx="950976" cy="420624"/>
           </a:xfrm>
           <a:prstGeom prst="rect">
@@ -39985,13 +38348,13 @@
       </p:sp>
       <p:sp>
         <p:nvSpPr>
-          <p:cNvPr id="45" name="Text 43"/>
-          <p:cNvSpPr/>
-          <p:nvPr/>
-        </p:nvSpPr>
-        <p:spPr>
-          <a:xfrm>
-            <a:off x="1508760" y="4178808"/>
+          <p:cNvPr id="30" name="Text 28"/>
+          <p:cNvSpPr/>
+          <p:nvPr/>
+        </p:nvSpPr>
+        <p:spPr>
+          <a:xfrm>
+            <a:off x="1508760" y="2807208"/>
             <a:ext cx="950976" cy="420624"/>
           </a:xfrm>
           <a:prstGeom prst="rect">
@@ -40024,13 +38387,13 @@
       </p:sp>
       <p:sp>
         <p:nvSpPr>
-          <p:cNvPr id="46" name="Text 44"/>
-          <p:cNvSpPr/>
-          <p:nvPr/>
-        </p:nvSpPr>
-        <p:spPr>
-          <a:xfrm>
-            <a:off x="2487168" y="4178808"/>
+          <p:cNvPr id="31" name="Text 29"/>
+          <p:cNvSpPr/>
+          <p:nvPr/>
+        </p:nvSpPr>
+        <p:spPr>
+          <a:xfrm>
+            <a:off x="2487168" y="2807208"/>
             <a:ext cx="320040" cy="420624"/>
           </a:xfrm>
           <a:prstGeom prst="rect">
@@ -40063,13 +38426,13 @@
       </p:sp>
       <p:sp>
         <p:nvSpPr>
-          <p:cNvPr id="47" name="Shape 45"/>
-          <p:cNvSpPr/>
-          <p:nvPr/>
-        </p:nvSpPr>
-        <p:spPr>
-          <a:xfrm>
-            <a:off x="2834640" y="4178808"/>
+          <p:cNvPr id="32" name="Shape 30"/>
+          <p:cNvSpPr/>
+          <p:nvPr/>
+        </p:nvSpPr>
+        <p:spPr>
+          <a:xfrm>
+            <a:off x="2834640" y="2807208"/>
             <a:ext cx="1536192" cy="420624"/>
           </a:xfrm>
           <a:prstGeom prst="rect">
@@ -40097,13 +38460,13 @@
       </p:sp>
       <p:sp>
         <p:nvSpPr>
-          <p:cNvPr id="48" name="Text 46"/>
-          <p:cNvSpPr/>
-          <p:nvPr/>
-        </p:nvSpPr>
-        <p:spPr>
-          <a:xfrm>
-            <a:off x="2834640" y="4178808"/>
+          <p:cNvPr id="33" name="Text 31"/>
+          <p:cNvSpPr/>
+          <p:nvPr/>
+        </p:nvSpPr>
+        <p:spPr>
+          <a:xfrm>
+            <a:off x="2834640" y="2807208"/>
             <a:ext cx="1536192" cy="420624"/>
           </a:xfrm>
           <a:prstGeom prst="rect">
@@ -40136,13 +38499,13 @@
       </p:sp>
       <p:sp>
         <p:nvSpPr>
-          <p:cNvPr id="49" name="Text 47"/>
-          <p:cNvSpPr/>
-          <p:nvPr/>
-        </p:nvSpPr>
-        <p:spPr>
-          <a:xfrm>
-            <a:off x="4398264" y="4178808"/>
+          <p:cNvPr id="34" name="Text 32"/>
+          <p:cNvSpPr/>
+          <p:nvPr/>
+        </p:nvSpPr>
+        <p:spPr>
+          <a:xfrm>
+            <a:off x="4398264" y="2807208"/>
             <a:ext cx="320040" cy="420624"/>
           </a:xfrm>
           <a:prstGeom prst="rect">
@@ -40175,13 +38538,13 @@
       </p:sp>
       <p:sp>
         <p:nvSpPr>
-          <p:cNvPr id="50" name="Shape 48"/>
-          <p:cNvSpPr/>
-          <p:nvPr/>
-        </p:nvSpPr>
-        <p:spPr>
-          <a:xfrm>
-            <a:off x="4745736" y="4178808"/>
+          <p:cNvPr id="35" name="Shape 33"/>
+          <p:cNvSpPr/>
+          <p:nvPr/>
+        </p:nvSpPr>
+        <p:spPr>
+          <a:xfrm>
+            <a:off x="4745736" y="2807208"/>
             <a:ext cx="822960" cy="420624"/>
           </a:xfrm>
           <a:prstGeom prst="rect">
@@ -40209,13 +38572,13 @@
       </p:sp>
       <p:sp>
         <p:nvSpPr>
-          <p:cNvPr id="51" name="Text 49"/>
-          <p:cNvSpPr/>
-          <p:nvPr/>
-        </p:nvSpPr>
-        <p:spPr>
-          <a:xfrm>
-            <a:off x="4745736" y="4178808"/>
+          <p:cNvPr id="36" name="Text 34"/>
+          <p:cNvSpPr/>
+          <p:nvPr/>
+        </p:nvSpPr>
+        <p:spPr>
+          <a:xfrm>
+            <a:off x="4745736" y="2807208"/>
             <a:ext cx="822960" cy="420624"/>
           </a:xfrm>
           <a:prstGeom prst="rect">
@@ -40240,7 +38603,7 @@
                 <a:ea typeface="Trebuchet MS" pitchFamily="34" charset="-122"/>
                 <a:cs typeface="Trebuchet MS" pitchFamily="34" charset="-120"/>
               </a:rPr>
-              <a:t>-r</a:t>
+              <a:t>-er</a:t>
             </a:r>
             <a:endParaRPr lang="en-US" sz="1300" dirty="0"/>
           </a:p>
@@ -40248,13 +38611,13 @@
       </p:sp>
       <p:sp>
         <p:nvSpPr>
-          <p:cNvPr id="52" name="Text 50"/>
-          <p:cNvSpPr/>
-          <p:nvPr/>
-        </p:nvSpPr>
-        <p:spPr>
-          <a:xfrm>
-            <a:off x="5641848" y="4178808"/>
+          <p:cNvPr id="37" name="Text 35"/>
+          <p:cNvSpPr/>
+          <p:nvPr/>
+        </p:nvSpPr>
+        <p:spPr>
+          <a:xfrm>
+            <a:off x="5641848" y="2807208"/>
             <a:ext cx="365760" cy="420624"/>
           </a:xfrm>
           <a:prstGeom prst="rect">
@@ -40287,13 +38650,13 @@
       </p:sp>
       <p:sp>
         <p:nvSpPr>
-          <p:cNvPr id="53" name="Shape 51"/>
-          <p:cNvSpPr/>
-          <p:nvPr/>
-        </p:nvSpPr>
-        <p:spPr>
-          <a:xfrm>
-            <a:off x="6053328" y="4178808"/>
+          <p:cNvPr id="38" name="Shape 36"/>
+          <p:cNvSpPr/>
+          <p:nvPr/>
+        </p:nvSpPr>
+        <p:spPr>
+          <a:xfrm>
+            <a:off x="6053328" y="2807208"/>
             <a:ext cx="2194560" cy="420624"/>
           </a:xfrm>
           <a:prstGeom prst="rect">
@@ -40314,13 +38677,13 @@
       </p:sp>
       <p:sp>
         <p:nvSpPr>
-          <p:cNvPr id="54" name="Text 52"/>
-          <p:cNvSpPr/>
-          <p:nvPr/>
-        </p:nvSpPr>
-        <p:spPr>
-          <a:xfrm>
-            <a:off x="6053328" y="4178808"/>
+          <p:cNvPr id="39" name="Text 37"/>
+          <p:cNvSpPr/>
+          <p:nvPr/>
+        </p:nvSpPr>
+        <p:spPr>
+          <a:xfrm>
+            <a:off x="6053328" y="2807208"/>
             <a:ext cx="2194560" cy="420624"/>
           </a:xfrm>
           <a:prstGeom prst="rect">
@@ -40637,7 +39000,7 @@
                 <a:ea typeface="Calibri" pitchFamily="34" charset="-122"/>
                 <a:cs typeface="Calibri" pitchFamily="34" charset="-120"/>
               </a:rPr>
-              <a:t>Word Labs  •  wordlabs.app  •  Root: 'marine' = of the sea or ocean</a:t>
+              <a:t>Word Labs  •  wordlabs.app  •  Root: 'marine' = relating to the sea</a:t>
             </a:r>
             <a:endParaRPr lang="en-US" sz="800" dirty="0"/>
           </a:p>
@@ -40815,841 +39178,7 @@
                 <a:ea typeface="Calibri" pitchFamily="34" charset="-122"/>
                 <a:cs typeface="Calibri" pitchFamily="34" charset="-120"/>
               </a:rPr>
-              <a:t>In a way that relates to or is typical of the sea.</a:t>
-            </a:r>
-            <a:endParaRPr lang="en-US" sz="1200" dirty="0"/>
-          </a:p>
-        </p:txBody>
-      </p:sp>
-      <p:sp>
-        <p:nvSpPr>
-          <p:cNvPr id="15" name="Shape 13"/>
-          <p:cNvSpPr/>
-          <p:nvPr/>
-        </p:nvSpPr>
-        <p:spPr>
-          <a:xfrm>
-            <a:off x="365760" y="1719072"/>
-            <a:ext cx="2011680" cy="457200"/>
-          </a:xfrm>
-          <a:prstGeom prst="rect">
-            <a:avLst>
-              <a:gd name="adj" fmla="val 12000"/>
-            </a:avLst>
-          </a:prstGeom>
-          <a:solidFill>
-            <a:srgbClr val="EEF2FF"/>
-          </a:solidFill>
-          <a:ln w="12700">
-            <a:solidFill>
-              <a:srgbClr val="6366F1"/>
-            </a:solidFill>
-            <a:prstDash val="solid"/>
-          </a:ln>
-          <a:effectLst>
-            <a:outerShdw sx="100000" sy="100000" kx="0" ky="0" algn="bl" rotWithShape="0" blurRad="101600" dist="38100" dir="8100000">
-              <a:srgbClr val="000000">
-                <a:alpha val="12000"/>
-              </a:srgbClr>
-            </a:outerShdw>
-          </a:effectLst>
-        </p:spPr>
-      </p:sp>
-      <p:sp>
-        <p:nvSpPr>
-          <p:cNvPr id="16" name="Text 14"/>
-          <p:cNvSpPr/>
-          <p:nvPr/>
-        </p:nvSpPr>
-        <p:spPr>
-          <a:xfrm>
-            <a:off x="365760" y="1719072"/>
-            <a:ext cx="2011680" cy="457200"/>
-          </a:xfrm>
-          <a:prstGeom prst="rect">
-            <a:avLst/>
-          </a:prstGeom>
-          <a:noFill/>
-          <a:ln/>
-        </p:spPr>
-        <p:txBody>
-          <a:bodyPr wrap="square" lIns="0" tIns="0" rIns="0" bIns="0" rtlCol="0" anchor="ctr"/>
-          <a:lstStyle/>
-          <a:p>
-            <a:pPr algn="ctr" indent="0" marL="0">
-              <a:buNone/>
-            </a:pPr>
-            <a:r>
-              <a:rPr lang="en-US" sz="1200" b="1" dirty="0">
-                <a:solidFill>
-                  <a:srgbClr val="4338CA"/>
-                </a:solidFill>
-                <a:latin typeface="Trebuchet MS" pitchFamily="34" charset="0"/>
-                <a:ea typeface="Trebuchet MS" pitchFamily="34" charset="-122"/>
-                <a:cs typeface="Trebuchet MS" pitchFamily="34" charset="-120"/>
-              </a:rPr>
-              <a:t>submarine</a:t>
-            </a:r>
-            <a:endParaRPr lang="en-US" sz="1200" dirty="0"/>
-          </a:p>
-        </p:txBody>
-      </p:sp>
-      <p:sp>
-        <p:nvSpPr>
-          <p:cNvPr id="17" name="Shape 15"/>
-          <p:cNvSpPr/>
-          <p:nvPr/>
-        </p:nvSpPr>
-        <p:spPr>
-          <a:xfrm>
-            <a:off x="2514600" y="1719072"/>
-            <a:ext cx="6263640" cy="457200"/>
-          </a:xfrm>
-          <a:prstGeom prst="rect">
-            <a:avLst>
-              <a:gd name="adj" fmla="val 12000"/>
-            </a:avLst>
-          </a:prstGeom>
-          <a:solidFill>
-            <a:srgbClr val="F8FAFC"/>
-          </a:solidFill>
-          <a:ln w="12700">
-            <a:solidFill>
-              <a:srgbClr val="E2E8F0"/>
-            </a:solidFill>
-            <a:prstDash val="solid"/>
-          </a:ln>
-        </p:spPr>
-      </p:sp>
-      <p:sp>
-        <p:nvSpPr>
-          <p:cNvPr id="18" name="Text 16"/>
-          <p:cNvSpPr/>
-          <p:nvPr/>
-        </p:nvSpPr>
-        <p:spPr>
-          <a:xfrm>
-            <a:off x="2651760" y="1719072"/>
-            <a:ext cx="6035040" cy="457200"/>
-          </a:xfrm>
-          <a:prstGeom prst="rect">
-            <a:avLst/>
-          </a:prstGeom>
-          <a:noFill/>
-          <a:ln/>
-        </p:spPr>
-        <p:txBody>
-          <a:bodyPr wrap="square" rtlCol="0" anchor="ctr"/>
-          <a:lstStyle/>
-          <a:p>
-            <a:pPr algn="l" indent="0" marL="0">
-              <a:buNone/>
-            </a:pPr>
-            <a:r>
-              <a:rPr lang="en-US" sz="1200" dirty="0">
-                <a:solidFill>
-                  <a:srgbClr val="0F172A"/>
-                </a:solidFill>
-                <a:latin typeface="Calibri" pitchFamily="34" charset="0"/>
-                <a:ea typeface="Calibri" pitchFamily="34" charset="-122"/>
-                <a:cs typeface="Calibri" pitchFamily="34" charset="-120"/>
-              </a:rPr>
-              <a:t>Soldiers who are trained to fight at sea and on land.</a:t>
-            </a:r>
-            <a:endParaRPr lang="en-US" sz="1200" dirty="0"/>
-          </a:p>
-        </p:txBody>
-      </p:sp>
-      <p:sp>
-        <p:nvSpPr>
-          <p:cNvPr id="19" name="Shape 17"/>
-          <p:cNvSpPr/>
-          <p:nvPr/>
-        </p:nvSpPr>
-        <p:spPr>
-          <a:xfrm>
-            <a:off x="365760" y="2249424"/>
-            <a:ext cx="2011680" cy="457200"/>
-          </a:xfrm>
-          <a:prstGeom prst="rect">
-            <a:avLst>
-              <a:gd name="adj" fmla="val 12000"/>
-            </a:avLst>
-          </a:prstGeom>
-          <a:solidFill>
-            <a:srgbClr val="EEF2FF"/>
-          </a:solidFill>
-          <a:ln w="12700">
-            <a:solidFill>
-              <a:srgbClr val="6366F1"/>
-            </a:solidFill>
-            <a:prstDash val="solid"/>
-          </a:ln>
-          <a:effectLst>
-            <a:outerShdw sx="100000" sy="100000" kx="0" ky="0" algn="bl" rotWithShape="0" blurRad="101600" dist="38100" dir="8100000">
-              <a:srgbClr val="000000">
-                <a:alpha val="12000"/>
-              </a:srgbClr>
-            </a:outerShdw>
-          </a:effectLst>
-        </p:spPr>
-      </p:sp>
-      <p:sp>
-        <p:nvSpPr>
-          <p:cNvPr id="20" name="Text 18"/>
-          <p:cNvSpPr/>
-          <p:nvPr/>
-        </p:nvSpPr>
-        <p:spPr>
-          <a:xfrm>
-            <a:off x="365760" y="2249424"/>
-            <a:ext cx="2011680" cy="457200"/>
-          </a:xfrm>
-          <a:prstGeom prst="rect">
-            <a:avLst/>
-          </a:prstGeom>
-          <a:noFill/>
-          <a:ln/>
-        </p:spPr>
-        <p:txBody>
-          <a:bodyPr wrap="square" lIns="0" tIns="0" rIns="0" bIns="0" rtlCol="0" anchor="ctr"/>
-          <a:lstStyle/>
-          <a:p>
-            <a:pPr algn="ctr" indent="0" marL="0">
-              <a:buNone/>
-            </a:pPr>
-            <a:r>
-              <a:rPr lang="en-US" sz="1200" b="1" dirty="0">
-                <a:solidFill>
-                  <a:srgbClr val="4338CA"/>
-                </a:solidFill>
-                <a:latin typeface="Trebuchet MS" pitchFamily="34" charset="0"/>
-                <a:ea typeface="Trebuchet MS" pitchFamily="34" charset="-122"/>
-                <a:cs typeface="Trebuchet MS" pitchFamily="34" charset="-120"/>
-              </a:rPr>
-              <a:t>mariner</a:t>
-            </a:r>
-            <a:endParaRPr lang="en-US" sz="1200" dirty="0"/>
-          </a:p>
-        </p:txBody>
-      </p:sp>
-      <p:sp>
-        <p:nvSpPr>
-          <p:cNvPr id="21" name="Shape 19"/>
-          <p:cNvSpPr/>
-          <p:nvPr/>
-        </p:nvSpPr>
-        <p:spPr>
-          <a:xfrm>
-            <a:off x="2514600" y="2249424"/>
-            <a:ext cx="6263640" cy="457200"/>
-          </a:xfrm>
-          <a:prstGeom prst="rect">
-            <a:avLst>
-              <a:gd name="adj" fmla="val 12000"/>
-            </a:avLst>
-          </a:prstGeom>
-          <a:solidFill>
-            <a:srgbClr val="F8FAFC"/>
-          </a:solidFill>
-          <a:ln w="12700">
-            <a:solidFill>
-              <a:srgbClr val="E2E8F0"/>
-            </a:solidFill>
-            <a:prstDash val="solid"/>
-          </a:ln>
-        </p:spPr>
-      </p:sp>
-      <p:sp>
-        <p:nvSpPr>
-          <p:cNvPr id="22" name="Text 20"/>
-          <p:cNvSpPr/>
-          <p:nvPr/>
-        </p:nvSpPr>
-        <p:spPr>
-          <a:xfrm>
-            <a:off x="2651760" y="2249424"/>
-            <a:ext cx="6035040" cy="457200"/>
-          </a:xfrm>
-          <a:prstGeom prst="rect">
-            <a:avLst/>
-          </a:prstGeom>
-          <a:noFill/>
-          <a:ln/>
-        </p:spPr>
-        <p:txBody>
-          <a:bodyPr wrap="square" rtlCol="0" anchor="ctr"/>
-          <a:lstStyle/>
-          <a:p>
-            <a:pPr algn="l" indent="0" marL="0">
-              <a:buNone/>
-            </a:pPr>
-            <a:r>
-              <a:rPr lang="en-US" sz="1200" dirty="0">
-                <a:solidFill>
-                  <a:srgbClr val="0F172A"/>
-                </a:solidFill>
-                <a:latin typeface="Calibri" pitchFamily="34" charset="0"/>
-                <a:ea typeface="Calibri" pitchFamily="34" charset="-122"/>
-                <a:cs typeface="Calibri" pitchFamily="34" charset="-120"/>
-              </a:rPr>
-              <a:t>A deep, bright blue colour, like the colour of the deep ocean.</a:t>
-            </a:r>
-            <a:endParaRPr lang="en-US" sz="1200" dirty="0"/>
-          </a:p>
-        </p:txBody>
-      </p:sp>
-      <p:sp>
-        <p:nvSpPr>
-          <p:cNvPr id="23" name="Shape 21"/>
-          <p:cNvSpPr/>
-          <p:nvPr/>
-        </p:nvSpPr>
-        <p:spPr>
-          <a:xfrm>
-            <a:off x="365760" y="2779776"/>
-            <a:ext cx="2011680" cy="457200"/>
-          </a:xfrm>
-          <a:prstGeom prst="rect">
-            <a:avLst>
-              <a:gd name="adj" fmla="val 12000"/>
-            </a:avLst>
-          </a:prstGeom>
-          <a:solidFill>
-            <a:srgbClr val="EEF2FF"/>
-          </a:solidFill>
-          <a:ln w="12700">
-            <a:solidFill>
-              <a:srgbClr val="6366F1"/>
-            </a:solidFill>
-            <a:prstDash val="solid"/>
-          </a:ln>
-          <a:effectLst>
-            <a:outerShdw sx="100000" sy="100000" kx="0" ky="0" algn="bl" rotWithShape="0" blurRad="101600" dist="38100" dir="8100000">
-              <a:srgbClr val="000000">
-                <a:alpha val="12000"/>
-              </a:srgbClr>
-            </a:outerShdw>
-          </a:effectLst>
-        </p:spPr>
-      </p:sp>
-      <p:sp>
-        <p:nvSpPr>
-          <p:cNvPr id="24" name="Text 22"/>
-          <p:cNvSpPr/>
-          <p:nvPr/>
-        </p:nvSpPr>
-        <p:spPr>
-          <a:xfrm>
-            <a:off x="365760" y="2779776"/>
-            <a:ext cx="2011680" cy="457200"/>
-          </a:xfrm>
-          <a:prstGeom prst="rect">
-            <a:avLst/>
-          </a:prstGeom>
-          <a:noFill/>
-          <a:ln/>
-        </p:spPr>
-        <p:txBody>
-          <a:bodyPr wrap="square" lIns="0" tIns="0" rIns="0" bIns="0" rtlCol="0" anchor="ctr"/>
-          <a:lstStyle/>
-          <a:p>
-            <a:pPr algn="ctr" indent="0" marL="0">
-              <a:buNone/>
-            </a:pPr>
-            <a:r>
-              <a:rPr lang="en-US" sz="1200" b="1" dirty="0">
-                <a:solidFill>
-                  <a:srgbClr val="4338CA"/>
-                </a:solidFill>
-                <a:latin typeface="Trebuchet MS" pitchFamily="34" charset="0"/>
-                <a:ea typeface="Trebuchet MS" pitchFamily="34" charset="-122"/>
-                <a:cs typeface="Trebuchet MS" pitchFamily="34" charset="-120"/>
-              </a:rPr>
-              <a:t>marines</a:t>
-            </a:r>
-            <a:endParaRPr lang="en-US" sz="1200" dirty="0"/>
-          </a:p>
-        </p:txBody>
-      </p:sp>
-      <p:sp>
-        <p:nvSpPr>
-          <p:cNvPr id="25" name="Shape 23"/>
-          <p:cNvSpPr/>
-          <p:nvPr/>
-        </p:nvSpPr>
-        <p:spPr>
-          <a:xfrm>
-            <a:off x="2514600" y="2779776"/>
-            <a:ext cx="6263640" cy="457200"/>
-          </a:xfrm>
-          <a:prstGeom prst="rect">
-            <a:avLst>
-              <a:gd name="adj" fmla="val 12000"/>
-            </a:avLst>
-          </a:prstGeom>
-          <a:solidFill>
-            <a:srgbClr val="F8FAFC"/>
-          </a:solidFill>
-          <a:ln w="12700">
-            <a:solidFill>
-              <a:srgbClr val="E2E8F0"/>
-            </a:solidFill>
-            <a:prstDash val="solid"/>
-          </a:ln>
-        </p:spPr>
-      </p:sp>
-      <p:sp>
-        <p:nvSpPr>
-          <p:cNvPr id="26" name="Text 24"/>
-          <p:cNvSpPr/>
-          <p:nvPr/>
-        </p:nvSpPr>
-        <p:spPr>
-          <a:xfrm>
-            <a:off x="2651760" y="2779776"/>
-            <a:ext cx="6035040" cy="457200"/>
-          </a:xfrm>
-          <a:prstGeom prst="rect">
-            <a:avLst/>
-          </a:prstGeom>
-          <a:noFill/>
-          <a:ln/>
-        </p:spPr>
-        <p:txBody>
-          <a:bodyPr wrap="square" rtlCol="0" anchor="ctr"/>
-          <a:lstStyle/>
-          <a:p>
-            <a:pPr algn="l" indent="0" marL="0">
-              <a:buNone/>
-            </a:pPr>
-            <a:r>
-              <a:rPr lang="en-US" sz="1200" dirty="0">
-                <a:solidFill>
-                  <a:srgbClr val="0F172A"/>
-                </a:solidFill>
-                <a:latin typeface="Calibri" pitchFamily="34" charset="0"/>
-                <a:ea typeface="Calibri" pitchFamily="34" charset="-122"/>
-                <a:cs typeface="Calibri" pitchFamily="34" charset="-120"/>
-              </a:rPr>
-              <a:t>A person who works on a ship and sails the sea.</a:t>
-            </a:r>
-            <a:endParaRPr lang="en-US" sz="1200" dirty="0"/>
-          </a:p>
-        </p:txBody>
-      </p:sp>
-      <p:sp>
-        <p:nvSpPr>
-          <p:cNvPr id="27" name="Shape 25"/>
-          <p:cNvSpPr/>
-          <p:nvPr/>
-        </p:nvSpPr>
-        <p:spPr>
-          <a:xfrm>
-            <a:off x="365760" y="3310128"/>
-            <a:ext cx="2011680" cy="457200"/>
-          </a:xfrm>
-          <a:prstGeom prst="rect">
-            <a:avLst>
-              <a:gd name="adj" fmla="val 12000"/>
-            </a:avLst>
-          </a:prstGeom>
-          <a:solidFill>
-            <a:srgbClr val="EEF2FF"/>
-          </a:solidFill>
-          <a:ln w="12700">
-            <a:solidFill>
-              <a:srgbClr val="6366F1"/>
-            </a:solidFill>
-            <a:prstDash val="solid"/>
-          </a:ln>
-          <a:effectLst>
-            <a:outerShdw sx="100000" sy="100000" kx="0" ky="0" algn="bl" rotWithShape="0" blurRad="101600" dist="38100" dir="8100000">
-              <a:srgbClr val="000000">
-                <a:alpha val="12000"/>
-              </a:srgbClr>
-            </a:outerShdw>
-          </a:effectLst>
-        </p:spPr>
-      </p:sp>
-      <p:sp>
-        <p:nvSpPr>
-          <p:cNvPr id="28" name="Text 26"/>
-          <p:cNvSpPr/>
-          <p:nvPr/>
-        </p:nvSpPr>
-        <p:spPr>
-          <a:xfrm>
-            <a:off x="365760" y="3310128"/>
-            <a:ext cx="2011680" cy="457200"/>
-          </a:xfrm>
-          <a:prstGeom prst="rect">
-            <a:avLst/>
-          </a:prstGeom>
-          <a:noFill/>
-          <a:ln/>
-        </p:spPr>
-        <p:txBody>
-          <a:bodyPr wrap="square" lIns="0" tIns="0" rIns="0" bIns="0" rtlCol="0" anchor="ctr"/>
-          <a:lstStyle/>
-          <a:p>
-            <a:pPr algn="ctr" indent="0" marL="0">
-              <a:buNone/>
-            </a:pPr>
-            <a:r>
-              <a:rPr lang="en-US" sz="1200" b="1" dirty="0">
-                <a:solidFill>
-                  <a:srgbClr val="4338CA"/>
-                </a:solidFill>
-                <a:latin typeface="Trebuchet MS" pitchFamily="34" charset="0"/>
-                <a:ea typeface="Trebuchet MS" pitchFamily="34" charset="-122"/>
-                <a:cs typeface="Trebuchet MS" pitchFamily="34" charset="-120"/>
-              </a:rPr>
-              <a:t>ultramarine</a:t>
-            </a:r>
-            <a:endParaRPr lang="en-US" sz="1200" dirty="0"/>
-          </a:p>
-        </p:txBody>
-      </p:sp>
-      <p:sp>
-        <p:nvSpPr>
-          <p:cNvPr id="29" name="Shape 27"/>
-          <p:cNvSpPr/>
-          <p:nvPr/>
-        </p:nvSpPr>
-        <p:spPr>
-          <a:xfrm>
-            <a:off x="2514600" y="3310128"/>
-            <a:ext cx="6263640" cy="457200"/>
-          </a:xfrm>
-          <a:prstGeom prst="rect">
-            <a:avLst>
-              <a:gd name="adj" fmla="val 12000"/>
-            </a:avLst>
-          </a:prstGeom>
-          <a:solidFill>
-            <a:srgbClr val="F8FAFC"/>
-          </a:solidFill>
-          <a:ln w="12700">
-            <a:solidFill>
-              <a:srgbClr val="E2E8F0"/>
-            </a:solidFill>
-            <a:prstDash val="solid"/>
-          </a:ln>
-        </p:spPr>
-      </p:sp>
-      <p:sp>
-        <p:nvSpPr>
-          <p:cNvPr id="30" name="Text 28"/>
-          <p:cNvSpPr/>
-          <p:nvPr/>
-        </p:nvSpPr>
-        <p:spPr>
-          <a:xfrm>
-            <a:off x="2651760" y="3310128"/>
-            <a:ext cx="6035040" cy="457200"/>
-          </a:xfrm>
-          <a:prstGeom prst="rect">
-            <a:avLst/>
-          </a:prstGeom>
-          <a:noFill/>
-          <a:ln/>
-        </p:spPr>
-        <p:txBody>
-          <a:bodyPr wrap="square" rtlCol="0" anchor="ctr"/>
-          <a:lstStyle/>
-          <a:p>
-            <a:pPr algn="l" indent="0" marL="0">
-              <a:buNone/>
-            </a:pPr>
-            <a:r>
-              <a:rPr lang="en-US" sz="1200" dirty="0">
-                <a:solidFill>
-                  <a:srgbClr val="0F172A"/>
-                </a:solidFill>
-                <a:latin typeface="Calibri" pitchFamily="34" charset="0"/>
-                <a:ea typeface="Calibri" pitchFamily="34" charset="-122"/>
-                <a:cs typeface="Calibri" pitchFamily="34" charset="-120"/>
-              </a:rPr>
-              <a:t>Something that exists or happens under the surface of the sea.</a:t>
-            </a:r>
-            <a:endParaRPr lang="en-US" sz="1200" dirty="0"/>
-          </a:p>
-        </p:txBody>
-      </p:sp>
-      <p:sp>
-        <p:nvSpPr>
-          <p:cNvPr id="31" name="Shape 29"/>
-          <p:cNvSpPr/>
-          <p:nvPr/>
-        </p:nvSpPr>
-        <p:spPr>
-          <a:xfrm>
-            <a:off x="365760" y="3840480"/>
-            <a:ext cx="2011680" cy="457200"/>
-          </a:xfrm>
-          <a:prstGeom prst="rect">
-            <a:avLst>
-              <a:gd name="adj" fmla="val 12000"/>
-            </a:avLst>
-          </a:prstGeom>
-          <a:solidFill>
-            <a:srgbClr val="EEF2FF"/>
-          </a:solidFill>
-          <a:ln w="12700">
-            <a:solidFill>
-              <a:srgbClr val="6366F1"/>
-            </a:solidFill>
-            <a:prstDash val="solid"/>
-          </a:ln>
-          <a:effectLst>
-            <a:outerShdw sx="100000" sy="100000" kx="0" ky="0" algn="bl" rotWithShape="0" blurRad="101600" dist="38100" dir="8100000">
-              <a:srgbClr val="000000">
-                <a:alpha val="12000"/>
-              </a:srgbClr>
-            </a:outerShdw>
-          </a:effectLst>
-        </p:spPr>
-      </p:sp>
-      <p:sp>
-        <p:nvSpPr>
-          <p:cNvPr id="32" name="Text 30"/>
-          <p:cNvSpPr/>
-          <p:nvPr/>
-        </p:nvSpPr>
-        <p:spPr>
-          <a:xfrm>
-            <a:off x="365760" y="3840480"/>
-            <a:ext cx="2011680" cy="457200"/>
-          </a:xfrm>
-          <a:prstGeom prst="rect">
-            <a:avLst/>
-          </a:prstGeom>
-          <a:noFill/>
-          <a:ln/>
-        </p:spPr>
-        <p:txBody>
-          <a:bodyPr wrap="square" lIns="0" tIns="0" rIns="0" bIns="0" rtlCol="0" anchor="ctr"/>
-          <a:lstStyle/>
-          <a:p>
-            <a:pPr algn="ctr" indent="0" marL="0">
-              <a:buNone/>
-            </a:pPr>
-            <a:r>
-              <a:rPr lang="en-US" sz="1200" b="1" dirty="0">
-                <a:solidFill>
-                  <a:srgbClr val="4338CA"/>
-                </a:solidFill>
-                <a:latin typeface="Trebuchet MS" pitchFamily="34" charset="0"/>
-                <a:ea typeface="Trebuchet MS" pitchFamily="34" charset="-122"/>
-                <a:cs typeface="Trebuchet MS" pitchFamily="34" charset="-120"/>
-              </a:rPr>
-              <a:t>submarine</a:t>
-            </a:r>
-            <a:endParaRPr lang="en-US" sz="1200" dirty="0"/>
-          </a:p>
-        </p:txBody>
-      </p:sp>
-      <p:sp>
-        <p:nvSpPr>
-          <p:cNvPr id="33" name="Shape 31"/>
-          <p:cNvSpPr/>
-          <p:nvPr/>
-        </p:nvSpPr>
-        <p:spPr>
-          <a:xfrm>
-            <a:off x="2514600" y="3840480"/>
-            <a:ext cx="6263640" cy="457200"/>
-          </a:xfrm>
-          <a:prstGeom prst="rect">
-            <a:avLst>
-              <a:gd name="adj" fmla="val 12000"/>
-            </a:avLst>
-          </a:prstGeom>
-          <a:solidFill>
-            <a:srgbClr val="F8FAFC"/>
-          </a:solidFill>
-          <a:ln w="12700">
-            <a:solidFill>
-              <a:srgbClr val="E2E8F0"/>
-            </a:solidFill>
-            <a:prstDash val="solid"/>
-          </a:ln>
-        </p:spPr>
-      </p:sp>
-      <p:sp>
-        <p:nvSpPr>
-          <p:cNvPr id="34" name="Text 32"/>
-          <p:cNvSpPr/>
-          <p:nvPr/>
-        </p:nvSpPr>
-        <p:spPr>
-          <a:xfrm>
-            <a:off x="2651760" y="3840480"/>
-            <a:ext cx="6035040" cy="457200"/>
-          </a:xfrm>
-          <a:prstGeom prst="rect">
-            <a:avLst/>
-          </a:prstGeom>
-          <a:noFill/>
-          <a:ln/>
-        </p:spPr>
-        <p:txBody>
-          <a:bodyPr wrap="square" rtlCol="0" anchor="ctr"/>
-          <a:lstStyle/>
-          <a:p>
-            <a:pPr algn="l" indent="0" marL="0">
-              <a:buNone/>
-            </a:pPr>
-            <a:r>
-              <a:rPr lang="en-US" sz="1200" dirty="0">
-                <a:solidFill>
-                  <a:srgbClr val="0F172A"/>
-                </a:solidFill>
-                <a:latin typeface="Calibri" pitchFamily="34" charset="0"/>
-                <a:ea typeface="Calibri" pitchFamily="34" charset="-122"/>
-                <a:cs typeface="Calibri" pitchFamily="34" charset="-120"/>
-              </a:rPr>
-              <a:t>Relating to the sea, or a soldier who serves at sea.</a:t>
-            </a:r>
-            <a:endParaRPr lang="en-US" sz="1200" dirty="0"/>
-          </a:p>
-        </p:txBody>
-      </p:sp>
-      <p:sp>
-        <p:nvSpPr>
-          <p:cNvPr id="35" name="Shape 33"/>
-          <p:cNvSpPr/>
-          <p:nvPr/>
-        </p:nvSpPr>
-        <p:spPr>
-          <a:xfrm>
-            <a:off x="365760" y="4370832"/>
-            <a:ext cx="2011680" cy="457200"/>
-          </a:xfrm>
-          <a:prstGeom prst="rect">
-            <a:avLst>
-              <a:gd name="adj" fmla="val 12000"/>
-            </a:avLst>
-          </a:prstGeom>
-          <a:solidFill>
-            <a:srgbClr val="EEF2FF"/>
-          </a:solidFill>
-          <a:ln w="12700">
-            <a:solidFill>
-              <a:srgbClr val="6366F1"/>
-            </a:solidFill>
-            <a:prstDash val="solid"/>
-          </a:ln>
-          <a:effectLst>
-            <a:outerShdw sx="100000" sy="100000" kx="0" ky="0" algn="bl" rotWithShape="0" blurRad="101600" dist="38100" dir="8100000">
-              <a:srgbClr val="000000">
-                <a:alpha val="12000"/>
-              </a:srgbClr>
-            </a:outerShdw>
-          </a:effectLst>
-        </p:spPr>
-      </p:sp>
-      <p:sp>
-        <p:nvSpPr>
-          <p:cNvPr id="36" name="Text 34"/>
-          <p:cNvSpPr/>
-          <p:nvPr/>
-        </p:nvSpPr>
-        <p:spPr>
-          <a:xfrm>
-            <a:off x="365760" y="4370832"/>
-            <a:ext cx="2011680" cy="457200"/>
-          </a:xfrm>
-          <a:prstGeom prst="rect">
-            <a:avLst/>
-          </a:prstGeom>
-          <a:noFill/>
-          <a:ln/>
-        </p:spPr>
-        <p:txBody>
-          <a:bodyPr wrap="square" lIns="0" tIns="0" rIns="0" bIns="0" rtlCol="0" anchor="ctr"/>
-          <a:lstStyle/>
-          <a:p>
-            <a:pPr algn="ctr" indent="0" marL="0">
-              <a:buNone/>
-            </a:pPr>
-            <a:r>
-              <a:rPr lang="en-US" sz="1200" b="1" dirty="0">
-                <a:solidFill>
-                  <a:srgbClr val="4338CA"/>
-                </a:solidFill>
-                <a:latin typeface="Trebuchet MS" pitchFamily="34" charset="0"/>
-                <a:ea typeface="Trebuchet MS" pitchFamily="34" charset="-122"/>
-                <a:cs typeface="Trebuchet MS" pitchFamily="34" charset="-120"/>
-              </a:rPr>
-              <a:t>marinely</a:t>
-            </a:r>
-            <a:endParaRPr lang="en-US" sz="1200" dirty="0"/>
-          </a:p>
-        </p:txBody>
-      </p:sp>
-      <p:sp>
-        <p:nvSpPr>
-          <p:cNvPr id="37" name="Shape 35"/>
-          <p:cNvSpPr/>
-          <p:nvPr/>
-        </p:nvSpPr>
-        <p:spPr>
-          <a:xfrm>
-            <a:off x="2514600" y="4370832"/>
-            <a:ext cx="6263640" cy="457200"/>
-          </a:xfrm>
-          <a:prstGeom prst="rect">
-            <a:avLst>
-              <a:gd name="adj" fmla="val 12000"/>
-            </a:avLst>
-          </a:prstGeom>
-          <a:solidFill>
-            <a:srgbClr val="F8FAFC"/>
-          </a:solidFill>
-          <a:ln w="12700">
-            <a:solidFill>
-              <a:srgbClr val="E2E8F0"/>
-            </a:solidFill>
-            <a:prstDash val="solid"/>
-          </a:ln>
-        </p:spPr>
-      </p:sp>
-      <p:sp>
-        <p:nvSpPr>
-          <p:cNvPr id="38" name="Text 36"/>
-          <p:cNvSpPr/>
-          <p:nvPr/>
-        </p:nvSpPr>
-        <p:spPr>
-          <a:xfrm>
-            <a:off x="2651760" y="4370832"/>
-            <a:ext cx="6035040" cy="457200"/>
-          </a:xfrm>
-          <a:prstGeom prst="rect">
-            <a:avLst/>
-          </a:prstGeom>
-          <a:noFill/>
-          <a:ln/>
-        </p:spPr>
-        <p:txBody>
-          <a:bodyPr wrap="square" rtlCol="0" anchor="ctr"/>
-          <a:lstStyle/>
-          <a:p>
-            <a:pPr algn="l" indent="0" marL="0">
-              <a:buNone/>
-            </a:pPr>
-            <a:r>
-              <a:rPr lang="en-US" sz="1200" dirty="0">
-                <a:solidFill>
-                  <a:srgbClr val="0F172A"/>
-                </a:solidFill>
-                <a:latin typeface="Calibri" pitchFamily="34" charset="0"/>
-                <a:ea typeface="Calibri" pitchFamily="34" charset="-122"/>
-                <a:cs typeface="Calibri" pitchFamily="34" charset="-120"/>
-              </a:rPr>
-              <a:t>A vehicle that travels underwater beneath the sea.</a:t>
+              <a:t>relating to the sea</a:t>
             </a:r>
             <a:endParaRPr lang="en-US" sz="1200" dirty="0"/>
           </a:p>
@@ -41941,7 +39470,7 @@
                 <a:ea typeface="Calibri" pitchFamily="34" charset="-122"/>
                 <a:cs typeface="Calibri" pitchFamily="34" charset="-120"/>
               </a:rPr>
-              <a:t>Word Labs  •  wordlabs.app  •  Root: 'marine' = of the sea or ocean</a:t>
+              <a:t>Word Labs  •  wordlabs.app  •  Root: 'marine' = relating to the sea</a:t>
             </a:r>
             <a:endParaRPr lang="en-US" sz="800" dirty="0"/>
           </a:p>
@@ -42144,7 +39673,7 @@
                 <a:ea typeface="Calibri" pitchFamily="34" charset="-122"/>
                 <a:cs typeface="Calibri" pitchFamily="34" charset="-120"/>
               </a:rPr>
-              <a:t>The marine biologist spent her days studying colourful fish and coral reefs beneath the ocean surface.</a:t>
+              <a:t>Marine biologists study creatures living in the ocean.</a:t>
             </a:r>
             <a:endParaRPr lang="en-US" sz="1500" dirty="0"/>
           </a:p>
@@ -42308,7 +39837,7 @@
                 <a:ea typeface="Calibri" pitchFamily="34" charset="-122"/>
                 <a:cs typeface="Calibri" pitchFamily="34" charset="-120"/>
               </a:rPr>
-              <a:t>We visited a marine park where we could snorkel and see amazing underwater creatures up close.</a:t>
+              <a:t>The old mariner had sailed across many oceans.</a:t>
             </a:r>
             <a:endParaRPr lang="en-US" sz="1500" dirty="0"/>
           </a:p>
@@ -42472,7 +40001,7 @@
                 <a:ea typeface="Calibri" pitchFamily="34" charset="-122"/>
                 <a:cs typeface="Calibri" pitchFamily="34" charset="-120"/>
               </a:rPr>
-              <a:t>The submarine slipped quietly beneath the waves, exploring the dark and mysterious depths of the ocean.</a:t>
+              <a:t>The marines landed on the beach at dawn.</a:t>
             </a:r>
             <a:endParaRPr lang="en-US" sz="1500" dirty="0"/>
           </a:p>
